--- a/docs/final_presentation.pptx
+++ b/docs/final_presentation.pptx
@@ -32,6 +32,11 @@
     <p:sldId id="280" r:id="rId32"/>
     <p:sldId id="281" r:id="rId33"/>
     <p:sldId id="282" r:id="rId34"/>
+    <p:sldId id="283" r:id="rId35"/>
+    <p:sldId id="284" r:id="rId36"/>
+    <p:sldId id="285" r:id="rId37"/>
+    <p:sldId id="286" r:id="rId38"/>
+    <p:sldId id="287" r:id="rId39"/>
   </p:sldIdLst>
   <p:sldSz cx="12191695" cy="6858000" type="screen4x3"/>
   <p:notesSz cx="6858000" cy="9144000"/>
@@ -1490,7 +1495,7 @@
           <a:p/>
           <a:p>
             <a:r>
-              <a:t>The talk has three parts, one per team member. I'll start with the data and the leakage audit. Jason takes the classical models and shows that once accuracy saturates, the interesting decisions move into thresholds and costs. Pranav then makes the problem as hard as we could make it — a model that sees nothing but the raw URL string — plus clustering and the state-of-the-art comparison. We close together with the synthesis.</a:t>
+              <a:t>The talk has four parts. I'll start with the data and the leakage audit. Jason takes the classical models and shows that once accuracy saturates, the interesting decisions move into thresholds and costs. Pranav then makes the problem as hard as we could make it — a model that sees nothing but the raw URL string — plus clustering and the state-of-the-art comparison. Part four is our validity check: statistical significance, realistic base rates, and a cross-dataset stress test that produced our most surprising result. We close together with the synthesis.</a:t>
             </a:r>
           </a:p>
         </p:txBody>
@@ -1994,31 +1999,13 @@
           <a:lstStyle/>
           <a:p>
             <a:r>
-              <a:t>[Presenter: Pranav (or rotate)]</a:t>
+              <a:t>[Presenter: Guna]</a:t>
             </a:r>
           </a:p>
           <a:p/>
           <a:p>
             <a:r>
-              <a:t>Let's put the three parts side by side, because the synthesis IS the result. We attacked the same suspicion — 'this benchmark is too easy, something must be leaking' — from three independent directions.</a:t>
-            </a:r>
-          </a:p>
-          <a:p/>
-          <a:p>
-            <a:r>
-              <a:t>Guna removed the obviously leaky column: the rest of the features still score 99.9%. We tightened the train/test split across a range of nearly 45 thousand groups of strictness: accuracy moved by five parts in ten thousand. And we took away every feature entirely, leaving only raw characters: 99.85%.</a:t>
-            </a:r>
-          </a:p>
-          <a:p/>
-          <a:p>
-            <a:r>
-              <a:t>Three different experimental designs, three different failure modes they were probing — and the number would not move. The only consistent explanation is that the separability is intrinsic to how this dataset was collected: its legitimate and phishing URLs differ systematically, all the way down to the character level.</a:t>
-            </a:r>
-          </a:p>
-          <a:p/>
-          <a:p>
-            <a:r>
-              <a:t>That consistency is the contribution. Not a new accuracy ceiling — an explanation of why the ceiling exists, established three ways on one shared test set.</a:t>
+              <a:t>Thanks Pranav. One more part before we wrap up: the follow-up questions all those beautiful numbers raise. Are the differences between our models even statistically meaningful? What do benchmark numbers mean at real-world phishing rates? What do the URLs we still miss look like? And the harshest test of all: does a model trained on this benchmark work on data collected by someone else? That last one produced the most surprising result of the whole project.</a:t>
             </a:r>
           </a:p>
         </p:txBody>
@@ -2088,31 +2075,25 @@
           <a:lstStyle/>
           <a:p>
             <a:r>
-              <a:t>[Presenter: Jason (or rotate)]</a:t>
+              <a:t>[Presenter: Guna]</a:t>
             </a:r>
           </a:p>
           <a:p/>
           <a:p>
             <a:r>
-              <a:t>Before the takeaways, the honest edges of this work.</a:t>
+              <a:t>First question: with 2 errors versus 90, is the difference between the full-feature and URL-only models even meaningful, or just noise? It would be easy to wave hands, so we tested it. Bootstrap confidence intervals for the two accuracies don't overlap, and McNemar's exact test — the right test when two models share one test set — gives a p-value around ten to the minus twenty-four. The gap is real.</a:t>
             </a:r>
           </a:p>
           <a:p/>
           <a:p>
             <a:r>
-              <a:t>Everything here is one collection at one point in time: our train and test sets both come from PhiUSIIL's crawl. We never tested against a different source or a later snapshot, so we can't say how much of the 99.9% travels beyond this benchmark — and given everything we've shown about collection artifacts, we'd bet a meaningful chunk doesn't. That's why cross-corpus testing is our number-one next step.</a:t>
+              <a:t>Two smaller findings along the way. Our engineered features fail in this regime too: adding them to the URL-only model actually costs a false negative, and they rank in the bottom half of the importance table. That closes the question Jason's section left open — a negative result in both regimes. And dropping IsHTTPS, the collection artifact, costs only four parts in ten thousand, so the URL-only number isn't secretly riding on it.</a:t>
             </a:r>
           </a:p>
           <a:p/>
           <a:p>
             <a:r>
-              <a:t>Second, when metrics are this saturated, ranking models is noise — we deliberately don't crown a winner. Third, the cost analysis uses illustrative numbers; the method stands, but a real deployment would plug in its own costs. And fourth, platform siblings on shared hosting can still land on both sides of our split; the grouping analysis suggests it's minor, but the character model is the most exposed to it.</a:t>
-            </a:r>
-          </a:p>
-          <a:p/>
-          <a:p>
-            <a:r>
-              <a:t>The other next steps: turn the kit-level micro-clusters HDBSCAN found into an operational campaign grouping, and close the last gap with a fully platform-aware split.</a:t>
+              <a:t>So the gap is statistically real. The next slide asks whether it matters in the real world — and that's where things get uncomfortable.</a:t>
             </a:r>
           </a:p>
         </p:txBody>
@@ -2182,43 +2163,201 @@
           <a:lstStyle/>
           <a:p>
             <a:r>
-              <a:t>[Presenter: Guna (or rotate)]</a:t>
+              <a:t>[Presenter: Guna]</a:t>
             </a:r>
           </a:p>
           <a:p/>
           <a:p>
             <a:r>
-              <a:t>We'll close with the four things we'd tell the next team handed a benchmark like this.</a:t>
+              <a:t>This is the chart we'd keep if we could keep only one. Our test set is 42% phishing. Real traffic — a browser, a mail gateway — sees maybe one phishing URL in a thousand, often one in ten thousand. Precision depends on that prevalence, and the formula is unforgiving.</a:t>
             </a:r>
           </a:p>
           <a:p/>
           <a:p>
             <a:r>
-              <a:t>One: audit before you model. The leakage checks took a fraction of the project's time and completely reframed it — without them we'd have submitted a meaningless 100%.</a:t>
+              <a:t>Follow the orange curve: the URL-only model, 99.81% accurate on the benchmark, drops to about 18% precision at one-in-ten-thousand. Five of every six warnings would be false alarms — users would learn to ignore them.</a:t>
             </a:r>
           </a:p>
           <a:p/>
           <a:p>
             <a:r>
-              <a:t>Two: report both regimes. The full-feature number gives comparability with the literature; the URL-only number tells the truth about difficulty. Either one alone misleads.</a:t>
+              <a:t>The blue curve needs one subtlety: the full model had ZERO observed false positives, but zero observed doesn't mean zero rate. The rule of three says an event never seen in n trials could still occur at up to three-over-n, so with our 27 thousand legitimate test URLs, even the perfect-looking model can only be CERTIFIED to about 47% precision at realistic rates. Our test set is simply too small to prove deployment-grade precision — and that's true of every paper on this benchmark, not just us.</a:t>
+            </a:r>
+          </a:p>
+        </p:txBody>
+      </p:sp>
+      <p:sp>
+        <p:nvSpPr>
+          <p:cNvPr id="4" name="Slide Number Placeholder 3"/>
+          <p:cNvSpPr>
+            <a:spLocks noGrp="1"/>
+          </p:cNvSpPr>
+          <p:nvPr>
+            <p:ph type="sldNum" idx="5" sz="quarter"/>
+          </p:nvPr>
+        </p:nvSpPr>
+        <p:spPr/>
+      </p:sp>
+    </p:spTree>
+  </p:cSld>
+  <p:clrMapOvr>
+    <a:masterClrMapping/>
+  </p:clrMapOvr>
+</p:notes>
+</file>
+
+<file path=ppt/notesSlides/notesSlide28.xml><?xml version="1.0" encoding="utf-8"?>
+<p:notes xmlns:a="http://schemas.openxmlformats.org/drawingml/2006/main" xmlns:p="http://schemas.openxmlformats.org/presentationml/2006/main" xmlns:r="http://schemas.openxmlformats.org/officeDocument/2006/relationships">
+  <p:cSld>
+    <p:spTree>
+      <p:nvGrpSpPr>
+        <p:cNvPr id="1" name=""/>
+        <p:cNvGrpSpPr/>
+        <p:nvPr/>
+      </p:nvGrpSpPr>
+      <p:grpSpPr>
+        <a:xfrm>
+          <a:off x="0" y="0"/>
+          <a:ext cx="0" cy="0"/>
+          <a:chOff x="0" y="0"/>
+          <a:chExt cx="0" cy="0"/>
+        </a:xfrm>
+      </p:grpSpPr>
+      <p:sp>
+        <p:nvSpPr>
+          <p:cNvPr id="2" name="Slide Image Placeholder 1"/>
+          <p:cNvSpPr>
+            <a:spLocks noGrp="1"/>
+          </p:cNvSpPr>
+          <p:nvPr>
+            <p:ph type="sldImg" idx="2"/>
+          </p:nvPr>
+        </p:nvSpPr>
+        <p:spPr/>
+      </p:sp>
+      <p:sp>
+        <p:nvSpPr>
+          <p:cNvPr id="3" name="Notes Placeholder 2"/>
+          <p:cNvSpPr>
+            <a:spLocks noGrp="1"/>
+          </p:cNvSpPr>
+          <p:nvPr>
+            <p:ph type="body" idx="3" sz="quarter"/>
+          </p:nvPr>
+        </p:nvSpPr>
+        <p:spPr/>
+        <p:txBody>
+          <a:bodyPr/>
+          <a:lstStyle/>
+          <a:p>
+            <a:r>
+              <a:t>[Presenter: Guna]</a:t>
             </a:r>
           </a:p>
           <a:p/>
           <a:p>
             <a:r>
-              <a:t>Three: negative results are results. Our engineered features failed; our clusters have soft boundaries. Saying that plainly is what makes the rest of the report trustworthy.</a:t>
+              <a:t>So who are the 78 phishing URLs the URL-only model still misses? Not a random sample — they're the WELL-CRAFTED ones. Compare medians: the missed phish use HTTPS (median 1 versus 0 for the caught ones), sit on reputable TLDs — median legitimacy score 0.52 versus 0.02 — and have short, clean strings.</a:t>
             </a:r>
           </a:p>
           <a:p/>
           <a:p>
             <a:r>
-              <a:t>Four: when metrics saturate, the decisions move — into thresholds, costs, and operating points. That's where the engineering actually happens.</a:t>
+              <a:t>Look at the examples: support-lcioud-maps.info — that's iCloud with the l and i swapped. Coinbesaprime-logi.com — Coinbase, buried in a compound word. Bendigo-verification.com — a real bank's name plus a calming word. The model catches the sloppy phish and misses exactly the ones that fool people.</a:t>
             </a:r>
           </a:p>
           <a:p/>
           <a:p>
             <a:r>
-              <a:t>If you remember one sentence: near-perfect accuracy should be explained, not celebrated. Thanks for watching — the repository with all code, notebooks, and the full report is on screen.</a:t>
+              <a:t>The ironic part: these are precisely the URLs our brand-distance feature was designed for, and it still didn't help. Whole-string edit distance can't see that 'coinbase' is INSIDE 'coinbesaprime-logi' — the brand is a substring, not a near-neighbor in edit distance. A token-level brand matcher is the concrete future-work fix, and this error analysis is the evidence for why it should work.</a:t>
+            </a:r>
+          </a:p>
+        </p:txBody>
+      </p:sp>
+      <p:sp>
+        <p:nvSpPr>
+          <p:cNvPr id="4" name="Slide Number Placeholder 3"/>
+          <p:cNvSpPr>
+            <a:spLocks noGrp="1"/>
+          </p:cNvSpPr>
+          <p:nvPr>
+            <p:ph type="sldNum" idx="5" sz="quarter"/>
+          </p:nvPr>
+        </p:nvSpPr>
+        <p:spPr/>
+      </p:sp>
+    </p:spTree>
+  </p:cSld>
+  <p:clrMapOvr>
+    <a:masterClrMapping/>
+  </p:clrMapOvr>
+</p:notes>
+</file>
+
+<file path=ppt/notesSlides/notesSlide29.xml><?xml version="1.0" encoding="utf-8"?>
+<p:notes xmlns:a="http://schemas.openxmlformats.org/drawingml/2006/main" xmlns:p="http://schemas.openxmlformats.org/presentationml/2006/main" xmlns:r="http://schemas.openxmlformats.org/officeDocument/2006/relationships">
+  <p:cSld>
+    <p:spTree>
+      <p:nvGrpSpPr>
+        <p:cNvPr id="1" name=""/>
+        <p:cNvGrpSpPr/>
+        <p:nvPr/>
+      </p:nvGrpSpPr>
+      <p:grpSpPr>
+        <a:xfrm>
+          <a:off x="0" y="0"/>
+          <a:ext cx="0" cy="0"/>
+          <a:chOff x="0" y="0"/>
+          <a:chExt cx="0" cy="0"/>
+        </a:xfrm>
+      </p:grpSpPr>
+      <p:sp>
+        <p:nvSpPr>
+          <p:cNvPr id="2" name="Slide Image Placeholder 1"/>
+          <p:cNvSpPr>
+            <a:spLocks noGrp="1"/>
+          </p:cNvSpPr>
+          <p:nvPr>
+            <p:ph type="sldImg" idx="2"/>
+          </p:nvPr>
+        </p:nvSpPr>
+        <p:spPr/>
+      </p:sp>
+      <p:sp>
+        <p:nvSpPr>
+          <p:cNvPr id="3" name="Notes Placeholder 2"/>
+          <p:cNvSpPr>
+            <a:spLocks noGrp="1"/>
+          </p:cNvSpPr>
+          <p:nvPr>
+            <p:ph type="body" idx="3" sz="quarter"/>
+          </p:nvPr>
+        </p:nvSpPr>
+        <p:spPr/>
+        <p:txBody>
+          <a:bodyPr/>
+          <a:lstStyle/>
+          <a:p>
+            <a:r>
+              <a:t>[Presenter: Guna]</a:t>
+            </a:r>
+          </a:p>
+          <a:p/>
+          <a:p>
+            <a:r>
+              <a:t>And now the stress test. We trained a model on PhiUSIIL using about 20 lexical features recomputed from the raw URL text with our own code — deliberately not PhiUSIIL's shipped columns, no IsHTTPS — and tested it, with no retraining, on the phishing corpus from Sahingoz and colleagues, the same paper our SOTA section cited. About 55 thousand usable URLs.</a:t>
+            </a:r>
+          </a:p>
+          <a:p/>
+          <a:p>
+            <a:r>
+              <a:t>On PhiUSIIL's own test split: 99.7%. On the external corpus: 45.3% — WORSE than a model that just guesses 'legitimate' for everything. It flagged essentially every legitimate URL as phishing.</a:t>
+            </a:r>
+          </a:p>
+          <a:p/>
+          <a:p>
+            <a:r>
+              <a:t>The feature importances explain it: path length alone carried 76% of the model. PhiUSIIL's legitimate URLs are homepages — median path length zero — while real browsing produces deep links, median 29 characters. So the model had learned 'URL has a path, therefore phishing.' That's the third collection artifact this project caught, after URLSimilarityIndex and IsHTTPS — and the only one that's invisible from inside the benchmark. A hostname-only model is the honest floor: about 70% externally — real transferable signal, but nowhere near what any benchmark number advertises. One caveat: the external corpus is from 2019, so this mixes collection differences with temporal drift — but every real deployment faces exactly those shifts.</a:t>
             </a:r>
           </a:p>
         </p:txBody>
@@ -2295,6 +2434,300 @@
           <a:p>
             <a:r>
               <a:t>Part one is the foundation everything else sits on: the dataset, a three-part leakage audit, and the exploratory analysis. The short version: we went looking for one leaky column, found it — and then found something more interesting: the dataset stays almost perfectly separable even after you remove it.</a:t>
+            </a:r>
+          </a:p>
+        </p:txBody>
+      </p:sp>
+      <p:sp>
+        <p:nvSpPr>
+          <p:cNvPr id="4" name="Slide Number Placeholder 3"/>
+          <p:cNvSpPr>
+            <a:spLocks noGrp="1"/>
+          </p:cNvSpPr>
+          <p:nvPr>
+            <p:ph type="sldNum" idx="5" sz="quarter"/>
+          </p:nvPr>
+        </p:nvSpPr>
+        <p:spPr/>
+      </p:sp>
+    </p:spTree>
+  </p:cSld>
+  <p:clrMapOvr>
+    <a:masterClrMapping/>
+  </p:clrMapOvr>
+</p:notes>
+</file>
+
+<file path=ppt/notesSlides/notesSlide30.xml><?xml version="1.0" encoding="utf-8"?>
+<p:notes xmlns:a="http://schemas.openxmlformats.org/drawingml/2006/main" xmlns:p="http://schemas.openxmlformats.org/presentationml/2006/main" xmlns:r="http://schemas.openxmlformats.org/officeDocument/2006/relationships">
+  <p:cSld>
+    <p:spTree>
+      <p:nvGrpSpPr>
+        <p:cNvPr id="1" name=""/>
+        <p:cNvGrpSpPr/>
+        <p:nvPr/>
+      </p:nvGrpSpPr>
+      <p:grpSpPr>
+        <a:xfrm>
+          <a:off x="0" y="0"/>
+          <a:ext cx="0" cy="0"/>
+          <a:chOff x="0" y="0"/>
+          <a:chExt cx="0" cy="0"/>
+        </a:xfrm>
+      </p:grpSpPr>
+      <p:sp>
+        <p:nvSpPr>
+          <p:cNvPr id="2" name="Slide Image Placeholder 1"/>
+          <p:cNvSpPr>
+            <a:spLocks noGrp="1"/>
+          </p:cNvSpPr>
+          <p:nvPr>
+            <p:ph type="sldImg" idx="2"/>
+          </p:nvPr>
+        </p:nvSpPr>
+        <p:spPr/>
+      </p:sp>
+      <p:sp>
+        <p:nvSpPr>
+          <p:cNvPr id="3" name="Notes Placeholder 2"/>
+          <p:cNvSpPr>
+            <a:spLocks noGrp="1"/>
+          </p:cNvSpPr>
+          <p:nvPr>
+            <p:ph type="body" idx="3" sz="quarter"/>
+          </p:nvPr>
+        </p:nvSpPr>
+        <p:spPr/>
+        <p:txBody>
+          <a:bodyPr/>
+          <a:lstStyle/>
+          <a:p>
+            <a:r>
+              <a:t>[Presenter: Pranav (or rotate)]</a:t>
+            </a:r>
+          </a:p>
+          <a:p/>
+          <a:p>
+            <a:r>
+              <a:t>Let's put the three parts side by side, because the synthesis IS the result. We attacked the same suspicion — 'this benchmark is too easy, something must be leaking' — from three independent directions.</a:t>
+            </a:r>
+          </a:p>
+          <a:p/>
+          <a:p>
+            <a:r>
+              <a:t>Guna removed the obviously leaky column: the rest of the features still score 99.9%. We tightened the train/test split across a range of nearly 45 thousand groups of strictness: accuracy moved by five parts in ten thousand. And we took away every feature entirely, leaving only raw characters: 99.85%.</a:t>
+            </a:r>
+          </a:p>
+          <a:p/>
+          <a:p>
+            <a:r>
+              <a:t>Three different experimental designs, three different failure modes they were probing — and the number would not move. The only consistent explanation is that the separability is intrinsic to how this dataset was collected: its legitimate and phishing URLs differ systematically, all the way down to the character level.</a:t>
+            </a:r>
+          </a:p>
+          <a:p/>
+          <a:p>
+            <a:r>
+              <a:t>That consistency is the contribution. Not a new accuracy ceiling — an explanation of why the ceiling exists, established three ways on one shared test set.</a:t>
+            </a:r>
+          </a:p>
+        </p:txBody>
+      </p:sp>
+      <p:sp>
+        <p:nvSpPr>
+          <p:cNvPr id="4" name="Slide Number Placeholder 3"/>
+          <p:cNvSpPr>
+            <a:spLocks noGrp="1"/>
+          </p:cNvSpPr>
+          <p:nvPr>
+            <p:ph type="sldNum" idx="5" sz="quarter"/>
+          </p:nvPr>
+        </p:nvSpPr>
+        <p:spPr/>
+      </p:sp>
+    </p:spTree>
+  </p:cSld>
+  <p:clrMapOvr>
+    <a:masterClrMapping/>
+  </p:clrMapOvr>
+</p:notes>
+</file>
+
+<file path=ppt/notesSlides/notesSlide31.xml><?xml version="1.0" encoding="utf-8"?>
+<p:notes xmlns:a="http://schemas.openxmlformats.org/drawingml/2006/main" xmlns:p="http://schemas.openxmlformats.org/presentationml/2006/main" xmlns:r="http://schemas.openxmlformats.org/officeDocument/2006/relationships">
+  <p:cSld>
+    <p:spTree>
+      <p:nvGrpSpPr>
+        <p:cNvPr id="1" name=""/>
+        <p:cNvGrpSpPr/>
+        <p:nvPr/>
+      </p:nvGrpSpPr>
+      <p:grpSpPr>
+        <a:xfrm>
+          <a:off x="0" y="0"/>
+          <a:ext cx="0" cy="0"/>
+          <a:chOff x="0" y="0"/>
+          <a:chExt cx="0" cy="0"/>
+        </a:xfrm>
+      </p:grpSpPr>
+      <p:sp>
+        <p:nvSpPr>
+          <p:cNvPr id="2" name="Slide Image Placeholder 1"/>
+          <p:cNvSpPr>
+            <a:spLocks noGrp="1"/>
+          </p:cNvSpPr>
+          <p:nvPr>
+            <p:ph type="sldImg" idx="2"/>
+          </p:nvPr>
+        </p:nvSpPr>
+        <p:spPr/>
+      </p:sp>
+      <p:sp>
+        <p:nvSpPr>
+          <p:cNvPr id="3" name="Notes Placeholder 2"/>
+          <p:cNvSpPr>
+            <a:spLocks noGrp="1"/>
+          </p:cNvSpPr>
+          <p:nvPr>
+            <p:ph type="body" idx="3" sz="quarter"/>
+          </p:nvPr>
+        </p:nvSpPr>
+        <p:spPr/>
+        <p:txBody>
+          <a:bodyPr/>
+          <a:lstStyle/>
+          <a:p>
+            <a:r>
+              <a:t>[Presenter: Jason (or rotate)]</a:t>
+            </a:r>
+          </a:p>
+          <a:p/>
+          <a:p>
+            <a:r>
+              <a:t>Before the takeaways, the honest edges of this work.</a:t>
+            </a:r>
+          </a:p>
+          <a:p/>
+          <a:p>
+            <a:r>
+              <a:t>First, the cross-dataset result needs its own caveat: the external corpus is from 2019, so the collapse from 99.7 to 45.3 percent mixes collection differences with several years of temporal drift. We can't separate the two — but a real deployment wouldn't get to separate them either; it faces both.</a:t>
+            </a:r>
+          </a:p>
+          <a:p/>
+          <a:p>
+            <a:r>
+              <a:t>Second, when metrics are this saturated, ranking models is noise — we deliberately don't crown a winner. Third, the cost analysis uses illustrative numbers; the method stands, but a real deployment would plug in its own costs. And fourth, platform siblings on shared hosting can still land on both sides of our split; the grouping analysis suggests it's minor, but the character model is the most exposed to it.</a:t>
+            </a:r>
+          </a:p>
+          <a:p/>
+          <a:p>
+            <a:r>
+              <a:t>Next steps, in order of confidence: a token-level brand matcher, which the error analysis directly motivates; turning the kit-level micro-clusters HDBSCAN found into an operational campaign grouping; and a fully platform-aware split to close the last grouping gap.</a:t>
+            </a:r>
+          </a:p>
+        </p:txBody>
+      </p:sp>
+      <p:sp>
+        <p:nvSpPr>
+          <p:cNvPr id="4" name="Slide Number Placeholder 3"/>
+          <p:cNvSpPr>
+            <a:spLocks noGrp="1"/>
+          </p:cNvSpPr>
+          <p:nvPr>
+            <p:ph type="sldNum" idx="5" sz="quarter"/>
+          </p:nvPr>
+        </p:nvSpPr>
+        <p:spPr/>
+      </p:sp>
+    </p:spTree>
+  </p:cSld>
+  <p:clrMapOvr>
+    <a:masterClrMapping/>
+  </p:clrMapOvr>
+</p:notes>
+</file>
+
+<file path=ppt/notesSlides/notesSlide32.xml><?xml version="1.0" encoding="utf-8"?>
+<p:notes xmlns:a="http://schemas.openxmlformats.org/drawingml/2006/main" xmlns:p="http://schemas.openxmlformats.org/presentationml/2006/main" xmlns:r="http://schemas.openxmlformats.org/officeDocument/2006/relationships">
+  <p:cSld>
+    <p:spTree>
+      <p:nvGrpSpPr>
+        <p:cNvPr id="1" name=""/>
+        <p:cNvGrpSpPr/>
+        <p:nvPr/>
+      </p:nvGrpSpPr>
+      <p:grpSpPr>
+        <a:xfrm>
+          <a:off x="0" y="0"/>
+          <a:ext cx="0" cy="0"/>
+          <a:chOff x="0" y="0"/>
+          <a:chExt cx="0" cy="0"/>
+        </a:xfrm>
+      </p:grpSpPr>
+      <p:sp>
+        <p:nvSpPr>
+          <p:cNvPr id="2" name="Slide Image Placeholder 1"/>
+          <p:cNvSpPr>
+            <a:spLocks noGrp="1"/>
+          </p:cNvSpPr>
+          <p:nvPr>
+            <p:ph type="sldImg" idx="2"/>
+          </p:nvPr>
+        </p:nvSpPr>
+        <p:spPr/>
+      </p:sp>
+      <p:sp>
+        <p:nvSpPr>
+          <p:cNvPr id="3" name="Notes Placeholder 2"/>
+          <p:cNvSpPr>
+            <a:spLocks noGrp="1"/>
+          </p:cNvSpPr>
+          <p:nvPr>
+            <p:ph type="body" idx="3" sz="quarter"/>
+          </p:nvPr>
+        </p:nvSpPr>
+        <p:spPr/>
+        <p:txBody>
+          <a:bodyPr/>
+          <a:lstStyle/>
+          <a:p>
+            <a:r>
+              <a:t>[Presenter: Guna (or rotate)]</a:t>
+            </a:r>
+          </a:p>
+          <a:p/>
+          <a:p>
+            <a:r>
+              <a:t>We'll close with the four things we'd tell the next team handed a benchmark like this.</a:t>
+            </a:r>
+          </a:p>
+          <a:p/>
+          <a:p>
+            <a:r>
+              <a:t>One: audit before you model. The leakage checks took a fraction of the project's time and completely reframed it — without them we'd have submitted a meaningless 100%.</a:t>
+            </a:r>
+          </a:p>
+          <a:p/>
+          <a:p>
+            <a:r>
+              <a:t>Two: report both regimes. The full-feature number gives comparability with the literature; the URL-only number tells the truth about difficulty. Either one alone misleads.</a:t>
+            </a:r>
+          </a:p>
+          <a:p/>
+          <a:p>
+            <a:r>
+              <a:t>Three: negative results are results. Our engineered features failed; our clusters have soft boundaries. Saying that plainly is what makes the rest of the report trustworthy.</a:t>
+            </a:r>
+          </a:p>
+          <a:p/>
+          <a:p>
+            <a:r>
+              <a:t>Four: when metrics saturate, the decisions move — into thresholds, costs, and operating points. That's where the engineering actually happens.</a:t>
+            </a:r>
+          </a:p>
+          <a:p/>
+          <a:p>
+            <a:r>
+              <a:t>If you remember one sentence: near-perfect accuracy should be explained, not celebrated. Thanks for watching — the repository with all code, notebooks, and the full report is on screen.</a:t>
             </a:r>
           </a:p>
         </p:txBody>
@@ -14248,8 +14681,8 @@
         </p:nvSpPr>
         <p:spPr>
           <a:xfrm>
-            <a:off x="548640" y="2240280"/>
-            <a:ext cx="11091672" cy="896112"/>
+            <a:off x="548640" y="2057400"/>
+            <a:ext cx="11091672" cy="768096"/>
           </a:xfrm>
           <a:prstGeom prst="roundRect">
             <a:avLst>
@@ -14294,8 +14727,8 @@
         </p:nvSpPr>
         <p:spPr>
           <a:xfrm>
-            <a:off x="713232" y="2414016"/>
-            <a:ext cx="548640" cy="548640"/>
+            <a:off x="713232" y="2189988"/>
+            <a:ext cx="502920" cy="502920"/>
           </a:xfrm>
           <a:prstGeom prst="roundRect">
             <a:avLst>
@@ -14340,8 +14773,8 @@
         </p:nvSpPr>
         <p:spPr>
           <a:xfrm>
-            <a:off x="713232" y="2414016"/>
-            <a:ext cx="548640" cy="548640"/>
+            <a:off x="713232" y="2189988"/>
+            <a:ext cx="502920" cy="502920"/>
           </a:xfrm>
           <a:prstGeom prst="rect">
             <a:avLst/>
@@ -14363,7 +14796,7 @@
               </a:spcAft>
             </a:pPr>
             <a:r>
-              <a:rPr sz="2200" b="1">
+              <a:rPr sz="1900" b="1">
                 <a:solidFill>
                   <a:srgbClr val="FFFFFF"/>
                 </a:solidFill>
@@ -14382,8 +14815,8 @@
         </p:nvSpPr>
         <p:spPr>
           <a:xfrm>
-            <a:off x="1463040" y="2350008"/>
-            <a:ext cx="7406640" cy="411480"/>
+            <a:off x="1417319" y="2125980"/>
+            <a:ext cx="7498079" cy="384048"/>
           </a:xfrm>
           <a:prstGeom prst="rect">
             <a:avLst/>
@@ -14405,7 +14838,7 @@
               </a:spcAft>
             </a:pPr>
             <a:r>
-              <a:rPr sz="1700" b="1">
+              <a:rPr sz="1600" b="1">
                 <a:solidFill>
                   <a:srgbClr val="0B0B0B"/>
                 </a:solidFill>
@@ -14424,8 +14857,8 @@
         </p:nvSpPr>
         <p:spPr>
           <a:xfrm>
-            <a:off x="1463040" y="2724912"/>
-            <a:ext cx="9966960" cy="365760"/>
+            <a:off x="1417319" y="2478024"/>
+            <a:ext cx="10058400" cy="329184"/>
           </a:xfrm>
           <a:prstGeom prst="rect">
             <a:avLst/>
@@ -14447,7 +14880,7 @@
               </a:spcAft>
             </a:pPr>
             <a:r>
-              <a:rPr sz="1250" b="0">
+              <a:rPr sz="1150" b="0">
                 <a:solidFill>
                   <a:srgbClr val="52514E"/>
                 </a:solidFill>
@@ -14466,8 +14899,8 @@
         </p:nvSpPr>
         <p:spPr>
           <a:xfrm>
-            <a:off x="9052560" y="2350008"/>
-            <a:ext cx="2468880" cy="411480"/>
+            <a:off x="9144000" y="2139696"/>
+            <a:ext cx="2377440" cy="384048"/>
           </a:xfrm>
           <a:prstGeom prst="rect">
             <a:avLst/>
@@ -14489,7 +14922,7 @@
               </a:spcAft>
             </a:pPr>
             <a:r>
-              <a:rPr sz="1300" b="1">
+              <a:rPr sz="1250" b="1">
                 <a:solidFill>
                   <a:srgbClr val="2A78D6"/>
                 </a:solidFill>
@@ -14508,8 +14941,8 @@
         </p:nvSpPr>
         <p:spPr>
           <a:xfrm>
-            <a:off x="548640" y="3264408"/>
-            <a:ext cx="11091672" cy="896112"/>
+            <a:off x="548640" y="2916936"/>
+            <a:ext cx="11091672" cy="768096"/>
           </a:xfrm>
           <a:prstGeom prst="roundRect">
             <a:avLst>
@@ -14554,8 +14987,8 @@
         </p:nvSpPr>
         <p:spPr>
           <a:xfrm>
-            <a:off x="713232" y="3438144"/>
-            <a:ext cx="548640" cy="548640"/>
+            <a:off x="713232" y="3049524"/>
+            <a:ext cx="502920" cy="502920"/>
           </a:xfrm>
           <a:prstGeom prst="roundRect">
             <a:avLst>
@@ -14600,8 +15033,8 @@
         </p:nvSpPr>
         <p:spPr>
           <a:xfrm>
-            <a:off x="713232" y="3438144"/>
-            <a:ext cx="548640" cy="548640"/>
+            <a:off x="713232" y="3049524"/>
+            <a:ext cx="502920" cy="502920"/>
           </a:xfrm>
           <a:prstGeom prst="rect">
             <a:avLst/>
@@ -14623,7 +15056,7 @@
               </a:spcAft>
             </a:pPr>
             <a:r>
-              <a:rPr sz="2200" b="1">
+              <a:rPr sz="1900" b="1">
                 <a:solidFill>
                   <a:srgbClr val="FFFFFF"/>
                 </a:solidFill>
@@ -14642,8 +15075,8 @@
         </p:nvSpPr>
         <p:spPr>
           <a:xfrm>
-            <a:off x="1463040" y="3374136"/>
-            <a:ext cx="7406640" cy="411480"/>
+            <a:off x="1417319" y="2985516"/>
+            <a:ext cx="7498079" cy="384048"/>
           </a:xfrm>
           <a:prstGeom prst="rect">
             <a:avLst/>
@@ -14665,7 +15098,7 @@
               </a:spcAft>
             </a:pPr>
             <a:r>
-              <a:rPr sz="1700" b="1">
+              <a:rPr sz="1600" b="1">
                 <a:solidFill>
                   <a:srgbClr val="0B0B0B"/>
                 </a:solidFill>
@@ -14684,8 +15117,8 @@
         </p:nvSpPr>
         <p:spPr>
           <a:xfrm>
-            <a:off x="1463040" y="3749040"/>
-            <a:ext cx="9966960" cy="365760"/>
+            <a:off x="1417319" y="3337560"/>
+            <a:ext cx="10058400" cy="329184"/>
           </a:xfrm>
           <a:prstGeom prst="rect">
             <a:avLst/>
@@ -14707,7 +15140,7 @@
               </a:spcAft>
             </a:pPr>
             <a:r>
-              <a:rPr sz="1250" b="0">
+              <a:rPr sz="1150" b="0">
                 <a:solidFill>
                   <a:srgbClr val="52514E"/>
                 </a:solidFill>
@@ -14726,8 +15159,8 @@
         </p:nvSpPr>
         <p:spPr>
           <a:xfrm>
-            <a:off x="9052560" y="3374136"/>
-            <a:ext cx="2468880" cy="411480"/>
+            <a:off x="9144000" y="2999232"/>
+            <a:ext cx="2377440" cy="384048"/>
           </a:xfrm>
           <a:prstGeom prst="rect">
             <a:avLst/>
@@ -14749,7 +15182,7 @@
               </a:spcAft>
             </a:pPr>
             <a:r>
-              <a:rPr sz="1300" b="1">
+              <a:rPr sz="1250" b="1">
                 <a:solidFill>
                   <a:srgbClr val="EB6834"/>
                 </a:solidFill>
@@ -14768,8 +15201,8 @@
         </p:nvSpPr>
         <p:spPr>
           <a:xfrm>
-            <a:off x="548640" y="4288536"/>
-            <a:ext cx="11091672" cy="896112"/>
+            <a:off x="548640" y="3776472"/>
+            <a:ext cx="11091672" cy="768096"/>
           </a:xfrm>
           <a:prstGeom prst="roundRect">
             <a:avLst>
@@ -14814,8 +15247,8 @@
         </p:nvSpPr>
         <p:spPr>
           <a:xfrm>
-            <a:off x="713232" y="4462272"/>
-            <a:ext cx="548640" cy="548640"/>
+            <a:off x="713232" y="3909059"/>
+            <a:ext cx="502920" cy="502920"/>
           </a:xfrm>
           <a:prstGeom prst="roundRect">
             <a:avLst>
@@ -14860,8 +15293,8 @@
         </p:nvSpPr>
         <p:spPr>
           <a:xfrm>
-            <a:off x="713232" y="4462272"/>
-            <a:ext cx="548640" cy="548640"/>
+            <a:off x="713232" y="3909059"/>
+            <a:ext cx="502920" cy="502920"/>
           </a:xfrm>
           <a:prstGeom prst="rect">
             <a:avLst/>
@@ -14883,7 +15316,7 @@
               </a:spcAft>
             </a:pPr>
             <a:r>
-              <a:rPr sz="2200" b="1">
+              <a:rPr sz="1900" b="1">
                 <a:solidFill>
                   <a:srgbClr val="FFFFFF"/>
                 </a:solidFill>
@@ -14902,8 +15335,8 @@
         </p:nvSpPr>
         <p:spPr>
           <a:xfrm>
-            <a:off x="1463040" y="4398264"/>
-            <a:ext cx="7406640" cy="411480"/>
+            <a:off x="1417319" y="3845052"/>
+            <a:ext cx="7498079" cy="384048"/>
           </a:xfrm>
           <a:prstGeom prst="rect">
             <a:avLst/>
@@ -14925,7 +15358,7 @@
               </a:spcAft>
             </a:pPr>
             <a:r>
-              <a:rPr sz="1700" b="1">
+              <a:rPr sz="1600" b="1">
                 <a:solidFill>
                   <a:srgbClr val="0B0B0B"/>
                 </a:solidFill>
@@ -14944,8 +15377,8 @@
         </p:nvSpPr>
         <p:spPr>
           <a:xfrm>
-            <a:off x="1463040" y="4773168"/>
-            <a:ext cx="9966960" cy="365760"/>
+            <a:off x="1417319" y="4197096"/>
+            <a:ext cx="10058400" cy="329184"/>
           </a:xfrm>
           <a:prstGeom prst="rect">
             <a:avLst/>
@@ -14967,7 +15400,7 @@
               </a:spcAft>
             </a:pPr>
             <a:r>
-              <a:rPr sz="1250" b="0">
+              <a:rPr sz="1150" b="0">
                 <a:solidFill>
                   <a:srgbClr val="52514E"/>
                 </a:solidFill>
@@ -14986,8 +15419,8 @@
         </p:nvSpPr>
         <p:spPr>
           <a:xfrm>
-            <a:off x="9052560" y="4398264"/>
-            <a:ext cx="2468880" cy="411480"/>
+            <a:off x="9144000" y="3858768"/>
+            <a:ext cx="2377440" cy="384048"/>
           </a:xfrm>
           <a:prstGeom prst="rect">
             <a:avLst/>
@@ -15009,7 +15442,7 @@
               </a:spcAft>
             </a:pPr>
             <a:r>
-              <a:rPr sz="1300" b="1">
+              <a:rPr sz="1250" b="1">
                 <a:solidFill>
                   <a:srgbClr val="4A3AA7"/>
                 </a:solidFill>
@@ -15028,8 +15461,8 @@
         </p:nvSpPr>
         <p:spPr>
           <a:xfrm>
-            <a:off x="548640" y="5312664"/>
-            <a:ext cx="11091672" cy="896112"/>
+            <a:off x="548640" y="4636008"/>
+            <a:ext cx="11091672" cy="768096"/>
           </a:xfrm>
           <a:prstGeom prst="roundRect">
             <a:avLst>
@@ -15074,8 +15507,8 @@
         </p:nvSpPr>
         <p:spPr>
           <a:xfrm>
-            <a:off x="713232" y="5486400"/>
-            <a:ext cx="548640" cy="548640"/>
+            <a:off x="713232" y="4768596"/>
+            <a:ext cx="502920" cy="502920"/>
           </a:xfrm>
           <a:prstGeom prst="roundRect">
             <a:avLst>
@@ -15120,8 +15553,8 @@
         </p:nvSpPr>
         <p:spPr>
           <a:xfrm>
-            <a:off x="713232" y="5486400"/>
-            <a:ext cx="548640" cy="548640"/>
+            <a:off x="713232" y="4768596"/>
+            <a:ext cx="502920" cy="502920"/>
           </a:xfrm>
           <a:prstGeom prst="rect">
             <a:avLst/>
@@ -15143,12 +15576,272 @@
               </a:spcAft>
             </a:pPr>
             <a:r>
-              <a:rPr sz="2200" b="1">
+              <a:rPr sz="1900" b="1">
                 <a:solidFill>
                   <a:srgbClr val="FFFFFF"/>
                 </a:solidFill>
                 <a:latin typeface="Calibri"/>
               </a:rPr>
+              <a:t>4</a:t>
+            </a:r>
+          </a:p>
+        </p:txBody>
+      </p:sp>
+      <p:sp>
+        <p:nvSpPr>
+          <p:cNvPr id="29" name="TextBox 28"/>
+          <p:cNvSpPr txBox="1"/>
+          <p:nvPr/>
+        </p:nvSpPr>
+        <p:spPr>
+          <a:xfrm>
+            <a:off x="1417319" y="4704588"/>
+            <a:ext cx="7498079" cy="384048"/>
+          </a:xfrm>
+          <a:prstGeom prst="rect">
+            <a:avLst/>
+          </a:prstGeom>
+          <a:noFill/>
+        </p:spPr>
+        <p:txBody>
+          <a:bodyPr wrap="square" anchor="t" lIns="0" rIns="0" tIns="0" bIns="0">
+            <a:spAutoFit/>
+          </a:bodyPr>
+          <a:lstStyle/>
+          <a:p>
+            <a:pPr algn="l">
+              <a:lnSpc>
+                <a:spcPct val="100000"/>
+              </a:lnSpc>
+              <a:spcAft>
+                <a:spcPts val="0"/>
+              </a:spcAft>
+            </a:pPr>
+            <a:r>
+              <a:rPr sz="1600" b="1">
+                <a:solidFill>
+                  <a:srgbClr val="0B0B0B"/>
+                </a:solidFill>
+                <a:latin typeface="Calibri"/>
+              </a:rPr>
+              <a:t>Does any of it hold up?</a:t>
+            </a:r>
+          </a:p>
+        </p:txBody>
+      </p:sp>
+      <p:sp>
+        <p:nvSpPr>
+          <p:cNvPr id="30" name="TextBox 29"/>
+          <p:cNvSpPr txBox="1"/>
+          <p:nvPr/>
+        </p:nvSpPr>
+        <p:spPr>
+          <a:xfrm>
+            <a:off x="1417319" y="5056632"/>
+            <a:ext cx="10058400" cy="329184"/>
+          </a:xfrm>
+          <a:prstGeom prst="rect">
+            <a:avLst/>
+          </a:prstGeom>
+          <a:noFill/>
+        </p:spPr>
+        <p:txBody>
+          <a:bodyPr wrap="square" anchor="t" lIns="0" rIns="0" tIns="0" bIns="0">
+            <a:spAutoFit/>
+          </a:bodyPr>
+          <a:lstStyle/>
+          <a:p>
+            <a:pPr algn="l">
+              <a:lnSpc>
+                <a:spcPct val="100000"/>
+              </a:lnSpc>
+              <a:spcAft>
+                <a:spcPts val="0"/>
+              </a:spcAft>
+            </a:pPr>
+            <a:r>
+              <a:rPr sz="1150" b="0">
+                <a:solidFill>
+                  <a:srgbClr val="52514E"/>
+                </a:solidFill>
+                <a:latin typeface="Calibri"/>
+              </a:rPr>
+              <a:t>Significance tests, realistic base rates, and a cross-dataset stress test</a:t>
+            </a:r>
+          </a:p>
+        </p:txBody>
+      </p:sp>
+      <p:sp>
+        <p:nvSpPr>
+          <p:cNvPr id="31" name="TextBox 30"/>
+          <p:cNvSpPr txBox="1"/>
+          <p:nvPr/>
+        </p:nvSpPr>
+        <p:spPr>
+          <a:xfrm>
+            <a:off x="9144000" y="4718304"/>
+            <a:ext cx="2377440" cy="384048"/>
+          </a:xfrm>
+          <a:prstGeom prst="rect">
+            <a:avLst/>
+          </a:prstGeom>
+          <a:noFill/>
+        </p:spPr>
+        <p:txBody>
+          <a:bodyPr wrap="square" anchor="t" lIns="0" rIns="0" tIns="0" bIns="0">
+            <a:spAutoFit/>
+          </a:bodyPr>
+          <a:lstStyle/>
+          <a:p>
+            <a:pPr algn="r">
+              <a:lnSpc>
+                <a:spcPct val="100000"/>
+              </a:lnSpc>
+              <a:spcAft>
+                <a:spcPts val="0"/>
+              </a:spcAft>
+            </a:pPr>
+            <a:r>
+              <a:rPr sz="1250" b="1">
+                <a:solidFill>
+                  <a:srgbClr val="0E7A54"/>
+                </a:solidFill>
+                <a:latin typeface="Calibri"/>
+              </a:rPr>
+              <a:t>Guna Pasupathy</a:t>
+            </a:r>
+          </a:p>
+        </p:txBody>
+      </p:sp>
+      <p:sp>
+        <p:nvSpPr>
+          <p:cNvPr id="32" name="Rounded Rectangle 31"/>
+          <p:cNvSpPr/>
+          <p:nvPr/>
+        </p:nvSpPr>
+        <p:spPr>
+          <a:xfrm>
+            <a:off x="548640" y="5495544"/>
+            <a:ext cx="11091672" cy="768096"/>
+          </a:xfrm>
+          <a:prstGeom prst="roundRect">
+            <a:avLst>
+              <a:gd name="adj" fmla="val 12000"/>
+            </a:avLst>
+          </a:prstGeom>
+          <a:solidFill>
+            <a:srgbClr val="EEF1F5"/>
+          </a:solidFill>
+          <a:ln>
+            <a:noFill/>
+          </a:ln>
+          <a:effectLst/>
+        </p:spPr>
+        <p:style>
+          <a:lnRef idx="1">
+            <a:schemeClr val="accent1"/>
+          </a:lnRef>
+          <a:fillRef idx="3">
+            <a:schemeClr val="accent1"/>
+          </a:fillRef>
+          <a:effectRef idx="2">
+            <a:schemeClr val="accent1"/>
+          </a:effectRef>
+          <a:fontRef idx="minor">
+            <a:schemeClr val="lt1"/>
+          </a:fontRef>
+        </p:style>
+        <p:txBody>
+          <a:bodyPr rtlCol="0" anchor="ctr"/>
+          <a:lstStyle/>
+          <a:p>
+            <a:pPr algn="ctr"/>
+          </a:p>
+        </p:txBody>
+      </p:sp>
+      <p:sp>
+        <p:nvSpPr>
+          <p:cNvPr id="33" name="Rounded Rectangle 32"/>
+          <p:cNvSpPr/>
+          <p:nvPr/>
+        </p:nvSpPr>
+        <p:spPr>
+          <a:xfrm>
+            <a:off x="713232" y="5628131"/>
+            <a:ext cx="502920" cy="502920"/>
+          </a:xfrm>
+          <a:prstGeom prst="roundRect">
+            <a:avLst>
+              <a:gd name="adj" fmla="val 50000"/>
+            </a:avLst>
+          </a:prstGeom>
+          <a:solidFill>
+            <a:srgbClr val="0D366B"/>
+          </a:solidFill>
+          <a:ln>
+            <a:noFill/>
+          </a:ln>
+          <a:effectLst/>
+        </p:spPr>
+        <p:style>
+          <a:lnRef idx="1">
+            <a:schemeClr val="accent1"/>
+          </a:lnRef>
+          <a:fillRef idx="3">
+            <a:schemeClr val="accent1"/>
+          </a:fillRef>
+          <a:effectRef idx="2">
+            <a:schemeClr val="accent1"/>
+          </a:effectRef>
+          <a:fontRef idx="minor">
+            <a:schemeClr val="lt1"/>
+          </a:fontRef>
+        </p:style>
+        <p:txBody>
+          <a:bodyPr rtlCol="0" anchor="ctr"/>
+          <a:lstStyle/>
+          <a:p>
+            <a:pPr algn="ctr"/>
+          </a:p>
+        </p:txBody>
+      </p:sp>
+      <p:sp>
+        <p:nvSpPr>
+          <p:cNvPr id="34" name="TextBox 33"/>
+          <p:cNvSpPr txBox="1"/>
+          <p:nvPr/>
+        </p:nvSpPr>
+        <p:spPr>
+          <a:xfrm>
+            <a:off x="713232" y="5628131"/>
+            <a:ext cx="502920" cy="502920"/>
+          </a:xfrm>
+          <a:prstGeom prst="rect">
+            <a:avLst/>
+          </a:prstGeom>
+          <a:noFill/>
+        </p:spPr>
+        <p:txBody>
+          <a:bodyPr wrap="square" anchor="ctr" lIns="0" rIns="0" tIns="0" bIns="0">
+            <a:spAutoFit/>
+          </a:bodyPr>
+          <a:lstStyle/>
+          <a:p>
+            <a:pPr algn="ctr">
+              <a:lnSpc>
+                <a:spcPct val="100000"/>
+              </a:lnSpc>
+              <a:spcAft>
+                <a:spcPts val="0"/>
+              </a:spcAft>
+            </a:pPr>
+            <a:r>
+              <a:rPr sz="1900" b="1">
+                <a:solidFill>
+                  <a:srgbClr val="FFFFFF"/>
+                </a:solidFill>
+                <a:latin typeface="Calibri"/>
+              </a:rPr>
               <a:t>✓</a:t>
             </a:r>
           </a:p>
@@ -15156,14 +15849,14 @@
       </p:sp>
       <p:sp>
         <p:nvSpPr>
-          <p:cNvPr id="29" name="TextBox 28"/>
-          <p:cNvSpPr txBox="1"/>
-          <p:nvPr/>
-        </p:nvSpPr>
-        <p:spPr>
-          <a:xfrm>
-            <a:off x="1463040" y="5422392"/>
-            <a:ext cx="7406640" cy="411480"/>
+          <p:cNvPr id="35" name="TextBox 34"/>
+          <p:cNvSpPr txBox="1"/>
+          <p:nvPr/>
+        </p:nvSpPr>
+        <p:spPr>
+          <a:xfrm>
+            <a:off x="1417319" y="5564124"/>
+            <a:ext cx="7498079" cy="384048"/>
           </a:xfrm>
           <a:prstGeom prst="rect">
             <a:avLst/>
@@ -15185,7 +15878,7 @@
               </a:spcAft>
             </a:pPr>
             <a:r>
-              <a:rPr sz="1700" b="1">
+              <a:rPr sz="1600" b="1">
                 <a:solidFill>
                   <a:srgbClr val="0B0B0B"/>
                 </a:solidFill>
@@ -15198,14 +15891,14 @@
       </p:sp>
       <p:sp>
         <p:nvSpPr>
-          <p:cNvPr id="30" name="TextBox 29"/>
-          <p:cNvSpPr txBox="1"/>
-          <p:nvPr/>
-        </p:nvSpPr>
-        <p:spPr>
-          <a:xfrm>
-            <a:off x="1463040" y="5797296"/>
-            <a:ext cx="9966960" cy="365760"/>
+          <p:cNvPr id="36" name="TextBox 35"/>
+          <p:cNvSpPr txBox="1"/>
+          <p:nvPr/>
+        </p:nvSpPr>
+        <p:spPr>
+          <a:xfrm>
+            <a:off x="1417319" y="5916168"/>
+            <a:ext cx="10058400" cy="329184"/>
           </a:xfrm>
           <a:prstGeom prst="rect">
             <a:avLst/>
@@ -15227,27 +15920,27 @@
               </a:spcAft>
             </a:pPr>
             <a:r>
-              <a:rPr sz="1250" b="0">
+              <a:rPr sz="1150" b="0">
                 <a:solidFill>
                   <a:srgbClr val="52514E"/>
                 </a:solidFill>
                 <a:latin typeface="Calibri"/>
               </a:rPr>
-              <a:t>Three independent proofs, limitations, and what we'd tell the next team</a:t>
-            </a:r>
-          </a:p>
-        </p:txBody>
-      </p:sp>
-      <p:sp>
-        <p:nvSpPr>
-          <p:cNvPr id="31" name="TextBox 30"/>
-          <p:cNvSpPr txBox="1"/>
-          <p:nvPr/>
-        </p:nvSpPr>
-        <p:spPr>
-          <a:xfrm>
-            <a:off x="9052560" y="5422392"/>
-            <a:ext cx="2468880" cy="411480"/>
+              <a:t>Independent proofs, limitations, and what we'd tell the next team</a:t>
+            </a:r>
+          </a:p>
+        </p:txBody>
+      </p:sp>
+      <p:sp>
+        <p:nvSpPr>
+          <p:cNvPr id="37" name="TextBox 36"/>
+          <p:cNvSpPr txBox="1"/>
+          <p:nvPr/>
+        </p:nvSpPr>
+        <p:spPr>
+          <a:xfrm>
+            <a:off x="9144000" y="5577840"/>
+            <a:ext cx="2377440" cy="384048"/>
           </a:xfrm>
           <a:prstGeom prst="rect">
             <a:avLst/>
@@ -15269,9 +15962,9 @@
               </a:spcAft>
             </a:pPr>
             <a:r>
-              <a:rPr sz="1300" b="1">
-                <a:solidFill>
-                  <a:srgbClr val="0E7A54"/>
+              <a:rPr sz="1250" b="1">
+                <a:solidFill>
+                  <a:srgbClr val="0D366B"/>
                 </a:solidFill>
                 <a:latin typeface="Calibri"/>
               </a:rPr>
@@ -19670,7 +20363,7 @@
     <p:bg>
       <p:bgPr>
         <a:solidFill>
-          <a:srgbClr val="FCFCFB"/>
+          <a:srgbClr val="0E7A54"/>
         </a:solidFill>
         <a:effectLst/>
       </p:bgPr>
@@ -19684,45 +20377,43 @@
       <p:grpSpPr/>
       <p:sp>
         <p:nvSpPr>
-          <p:cNvPr id="2" name="Rectangle 1"/>
-          <p:cNvSpPr/>
-          <p:nvPr/>
-        </p:nvSpPr>
-        <p:spPr>
-          <a:xfrm>
-            <a:off x="0" y="0"/>
-            <a:ext cx="12191695" cy="128016"/>
-          </a:xfrm>
-          <a:prstGeom prst="rect">
-            <a:avLst/>
-          </a:prstGeom>
-          <a:solidFill>
-            <a:srgbClr val="0E7A54"/>
-          </a:solidFill>
-          <a:ln>
-            <a:noFill/>
-          </a:ln>
-          <a:effectLst/>
-        </p:spPr>
-        <p:style>
-          <a:lnRef idx="1">
-            <a:schemeClr val="accent1"/>
-          </a:lnRef>
-          <a:fillRef idx="3">
-            <a:schemeClr val="accent1"/>
-          </a:fillRef>
-          <a:effectRef idx="2">
-            <a:schemeClr val="accent1"/>
-          </a:effectRef>
-          <a:fontRef idx="minor">
-            <a:schemeClr val="lt1"/>
-          </a:fontRef>
-        </p:style>
-        <p:txBody>
-          <a:bodyPr rtlCol="0" anchor="ctr"/>
-          <a:lstStyle/>
-          <a:p>
-            <a:pPr algn="ctr"/>
+          <p:cNvPr id="2" name="TextBox 1"/>
+          <p:cNvSpPr txBox="1"/>
+          <p:nvPr/>
+        </p:nvSpPr>
+        <p:spPr>
+          <a:xfrm>
+            <a:off x="548640" y="822960"/>
+            <a:ext cx="3657600" cy="2011680"/>
+          </a:xfrm>
+          <a:prstGeom prst="rect">
+            <a:avLst/>
+          </a:prstGeom>
+          <a:noFill/>
+        </p:spPr>
+        <p:txBody>
+          <a:bodyPr wrap="square" anchor="t" lIns="0" rIns="0" tIns="0" bIns="0">
+            <a:spAutoFit/>
+          </a:bodyPr>
+          <a:lstStyle/>
+          <a:p>
+            <a:pPr algn="l">
+              <a:lnSpc>
+                <a:spcPct val="100000"/>
+              </a:lnSpc>
+              <a:spcAft>
+                <a:spcPts val="0"/>
+              </a:spcAft>
+            </a:pPr>
+            <a:r>
+              <a:rPr sz="15000" b="1">
+                <a:solidFill>
+                  <a:srgbClr val="7AB6A1"/>
+                </a:solidFill>
+                <a:latin typeface="Calibri"/>
+              </a:rPr>
+              <a:t>04</a:t>
+            </a:r>
           </a:p>
         </p:txBody>
       </p:sp>
@@ -19734,8 +20425,8 @@
         </p:nvSpPr>
         <p:spPr>
           <a:xfrm>
-            <a:off x="548640" y="347472"/>
-            <a:ext cx="11094415" cy="274320"/>
+            <a:off x="548640" y="2880360"/>
+            <a:ext cx="11094415" cy="1280160"/>
           </a:xfrm>
           <a:prstGeom prst="rect">
             <a:avLst/>
@@ -19757,13 +20448,13 @@
               </a:spcAft>
             </a:pPr>
             <a:r>
-              <a:rPr sz="1250" b="1">
-                <a:solidFill>
-                  <a:srgbClr val="0E7A54"/>
-                </a:solidFill>
-                <a:latin typeface="Calibri"/>
-              </a:rPr>
-              <a:t>CLOSING · SYNTHESIS</a:t>
+              <a:rPr sz="4000" b="1">
+                <a:solidFill>
+                  <a:srgbClr val="FFFFFF"/>
+                </a:solidFill>
+                <a:latin typeface="Calibri"/>
+              </a:rPr>
+              <a:t>Does Any of It Hold Up?</a:t>
             </a:r>
           </a:p>
         </p:txBody>
@@ -19776,8 +20467,8 @@
         </p:nvSpPr>
         <p:spPr>
           <a:xfrm>
-            <a:off x="548640" y="603504"/>
-            <a:ext cx="11094415" cy="777240"/>
+            <a:off x="548640" y="3977639"/>
+            <a:ext cx="11094415" cy="365760"/>
           </a:xfrm>
           <a:prstGeom prst="rect">
             <a:avLst/>
@@ -19799,13 +20490,13 @@
               </a:spcAft>
             </a:pPr>
             <a:r>
-              <a:rPr sz="3000" b="1">
-                <a:solidFill>
-                  <a:srgbClr val="0B0B0B"/>
-                </a:solidFill>
-                <a:latin typeface="Calibri"/>
-              </a:rPr>
-              <a:t>We tried to make it harder three times. It refused.</a:t>
+              <a:rPr sz="1600" b="0">
+                <a:solidFill>
+                  <a:srgbClr val="C3DED4"/>
+                </a:solidFill>
+                <a:latin typeface="Calibri"/>
+              </a:rPr>
+              <a:t>Presented by Guna Pasupathy</a:t>
             </a:r>
           </a:p>
         </p:txBody>
@@ -19818,8 +20509,8 @@
         </p:nvSpPr>
         <p:spPr>
           <a:xfrm>
-            <a:off x="548640" y="6519672"/>
-            <a:ext cx="8229600" cy="274320"/>
+            <a:off x="548640" y="4709160"/>
+            <a:ext cx="11094415" cy="1463040"/>
           </a:xfrm>
           <a:prstGeom prst="rect">
             <a:avLst/>
@@ -19837,714 +20528,55 @@
                 <a:spcPct val="100000"/>
               </a:lnSpc>
               <a:spcAft>
-                <a:spcPts val="0"/>
-              </a:spcAft>
-            </a:pPr>
-            <a:r>
-              <a:rPr sz="950" b="0">
-                <a:solidFill>
-                  <a:srgbClr val="898781"/>
-                </a:solidFill>
-                <a:latin typeface="Calibri"/>
-              </a:rPr>
-              <a:t>AAI-501 · Group 2 · Phishing URL Detection on PhiUSIIL</a:t>
-            </a:r>
-          </a:p>
-        </p:txBody>
-      </p:sp>
-      <p:sp>
-        <p:nvSpPr>
-          <p:cNvPr id="6" name="TextBox 5"/>
-          <p:cNvSpPr txBox="1"/>
-          <p:nvPr/>
-        </p:nvSpPr>
-        <p:spPr>
-          <a:xfrm>
-            <a:off x="10728655" y="6519672"/>
-            <a:ext cx="914400" cy="274320"/>
-          </a:xfrm>
-          <a:prstGeom prst="rect">
-            <a:avLst/>
-          </a:prstGeom>
-          <a:noFill/>
-        </p:spPr>
-        <p:txBody>
-          <a:bodyPr wrap="square" anchor="t" lIns="0" rIns="0" tIns="0" bIns="0">
-            <a:spAutoFit/>
-          </a:bodyPr>
-          <a:lstStyle/>
-          <a:p>
-            <a:pPr algn="r">
+                <a:spcPts val="600"/>
+              </a:spcAft>
+            </a:pPr>
+            <a:r>
+              <a:rPr sz="1400" b="0">
+                <a:solidFill>
+                  <a:srgbClr val="DBEBE5"/>
+                </a:solidFill>
+                <a:latin typeface="Calibri"/>
+              </a:rPr>
+              <a:t>Notebook 04 — validity &amp; error analysis</a:t>
+            </a:r>
+          </a:p>
+          <a:p>
+            <a:pPr algn="l">
               <a:lnSpc>
                 <a:spcPct val="100000"/>
               </a:lnSpc>
               <a:spcAft>
-                <a:spcPts val="0"/>
-              </a:spcAft>
-            </a:pPr>
-            <a:r>
-              <a:rPr sz="950" b="0">
-                <a:solidFill>
-                  <a:srgbClr val="898781"/>
-                </a:solidFill>
-                <a:latin typeface="Calibri"/>
-              </a:rPr>
-              <a:t>25</a:t>
-            </a:r>
-          </a:p>
-        </p:txBody>
-      </p:sp>
-      <p:sp>
-        <p:nvSpPr>
-          <p:cNvPr id="7" name="Rounded Rectangle 6"/>
-          <p:cNvSpPr/>
-          <p:nvPr/>
-        </p:nvSpPr>
-        <p:spPr>
-          <a:xfrm>
-            <a:off x="548640" y="1783080"/>
-            <a:ext cx="3566160" cy="3017520"/>
-          </a:xfrm>
-          <a:prstGeom prst="roundRect">
-            <a:avLst>
-              <a:gd name="adj" fmla="val 8000"/>
-            </a:avLst>
-          </a:prstGeom>
-          <a:solidFill>
-            <a:srgbClr val="F0F6FC"/>
-          </a:solidFill>
-          <a:ln>
-            <a:noFill/>
-          </a:ln>
-          <a:effectLst/>
-        </p:spPr>
-        <p:style>
-          <a:lnRef idx="1">
-            <a:schemeClr val="accent1"/>
-          </a:lnRef>
-          <a:fillRef idx="3">
-            <a:schemeClr val="accent1"/>
-          </a:fillRef>
-          <a:effectRef idx="2">
-            <a:schemeClr val="accent1"/>
-          </a:effectRef>
-          <a:fontRef idx="minor">
-            <a:schemeClr val="lt1"/>
-          </a:fontRef>
-        </p:style>
-        <p:txBody>
-          <a:bodyPr rtlCol="0" anchor="ctr"/>
-          <a:lstStyle/>
-          <a:p>
-            <a:pPr algn="ctr"/>
-          </a:p>
-        </p:txBody>
-      </p:sp>
-      <p:sp>
-        <p:nvSpPr>
-          <p:cNvPr id="8" name="TextBox 7"/>
-          <p:cNvSpPr txBox="1"/>
-          <p:nvPr/>
-        </p:nvSpPr>
-        <p:spPr>
-          <a:xfrm>
-            <a:off x="804672" y="2011680"/>
-            <a:ext cx="3063240" cy="411480"/>
-          </a:xfrm>
-          <a:prstGeom prst="rect">
-            <a:avLst/>
-          </a:prstGeom>
-          <a:noFill/>
-        </p:spPr>
-        <p:txBody>
-          <a:bodyPr wrap="square" anchor="t" lIns="0" rIns="0" tIns="0" bIns="0">
-            <a:spAutoFit/>
-          </a:bodyPr>
-          <a:lstStyle/>
+                <a:spcPts val="600"/>
+              </a:spcAft>
+            </a:pPr>
+            <a:r>
+              <a:rPr sz="1400" b="0">
+                <a:solidFill>
+                  <a:srgbClr val="DBEBE5"/>
+                </a:solidFill>
+                <a:latin typeface="Calibri"/>
+              </a:rPr>
+              <a:t>Statistical significance, realistic base rates</a:t>
+            </a:r>
+          </a:p>
           <a:p>
             <a:pPr algn="l">
               <a:lnSpc>
                 <a:spcPct val="100000"/>
               </a:lnSpc>
               <a:spcAft>
-                <a:spcPts val="0"/>
-              </a:spcAft>
-            </a:pPr>
-            <a:r>
-              <a:rPr sz="1600" b="1">
-                <a:solidFill>
-                  <a:srgbClr val="0B0B0B"/>
-                </a:solidFill>
-                <a:latin typeface="Calibri"/>
-              </a:rPr>
-              <a:t>Drop the leak</a:t>
-            </a:r>
-          </a:p>
-        </p:txBody>
-      </p:sp>
-      <p:sp>
-        <p:nvSpPr>
-          <p:cNvPr id="9" name="TextBox 8"/>
-          <p:cNvSpPr txBox="1"/>
-          <p:nvPr/>
-        </p:nvSpPr>
-        <p:spPr>
-          <a:xfrm>
-            <a:off x="804672" y="2468880"/>
-            <a:ext cx="3063240" cy="914400"/>
-          </a:xfrm>
-          <a:prstGeom prst="rect">
-            <a:avLst/>
-          </a:prstGeom>
-          <a:noFill/>
-        </p:spPr>
-        <p:txBody>
-          <a:bodyPr wrap="square" anchor="t" lIns="0" rIns="0" tIns="0" bIns="0">
-            <a:spAutoFit/>
-          </a:bodyPr>
-          <a:lstStyle/>
-          <a:p>
-            <a:pPr algn="l">
-              <a:lnSpc>
-                <a:spcPct val="100000"/>
-              </a:lnSpc>
-              <a:spcAft>
-                <a:spcPts val="0"/>
-              </a:spcAft>
-            </a:pPr>
-            <a:r>
-              <a:rPr sz="4400" b="1">
-                <a:solidFill>
-                  <a:srgbClr val="2A78D6"/>
-                </a:solidFill>
-                <a:latin typeface="Calibri"/>
-              </a:rPr>
-              <a:t>99.9%</a:t>
-            </a:r>
-          </a:p>
-        </p:txBody>
-      </p:sp>
-      <p:sp>
-        <p:nvSpPr>
-          <p:cNvPr id="10" name="TextBox 9"/>
-          <p:cNvSpPr txBox="1"/>
-          <p:nvPr/>
-        </p:nvSpPr>
-        <p:spPr>
-          <a:xfrm>
-            <a:off x="804672" y="3520440"/>
-            <a:ext cx="3063240" cy="1188720"/>
-          </a:xfrm>
-          <a:prstGeom prst="rect">
-            <a:avLst/>
-          </a:prstGeom>
-          <a:noFill/>
-        </p:spPr>
-        <p:txBody>
-          <a:bodyPr wrap="square" anchor="t" lIns="0" rIns="0" tIns="0" bIns="0">
-            <a:spAutoFit/>
-          </a:bodyPr>
-          <a:lstStyle/>
-          <a:p>
-            <a:pPr algn="l">
-              <a:lnSpc>
-                <a:spcPct val="110000"/>
-              </a:lnSpc>
-              <a:spcAft>
-                <a:spcPts val="0"/>
-              </a:spcAft>
-            </a:pPr>
-            <a:r>
-              <a:rPr sz="1250" b="0">
-                <a:solidFill>
-                  <a:srgbClr val="52514E"/>
-                </a:solidFill>
-                <a:latin typeface="Calibri"/>
-              </a:rPr>
-              <a:t>remove URLSimilarityIndex → remaining features barely move</a:t>
-            </a:r>
-          </a:p>
-        </p:txBody>
-      </p:sp>
-      <p:sp>
-        <p:nvSpPr>
-          <p:cNvPr id="11" name="Rounded Rectangle 10"/>
-          <p:cNvSpPr/>
-          <p:nvPr/>
-        </p:nvSpPr>
-        <p:spPr>
-          <a:xfrm>
-            <a:off x="4325112" y="1783080"/>
-            <a:ext cx="3566160" cy="3017520"/>
-          </a:xfrm>
-          <a:prstGeom prst="roundRect">
-            <a:avLst>
-              <a:gd name="adj" fmla="val 8000"/>
-            </a:avLst>
-          </a:prstGeom>
-          <a:solidFill>
-            <a:srgbClr val="FEF4F1"/>
-          </a:solidFill>
-          <a:ln>
-            <a:noFill/>
-          </a:ln>
-          <a:effectLst/>
-        </p:spPr>
-        <p:style>
-          <a:lnRef idx="1">
-            <a:schemeClr val="accent1"/>
-          </a:lnRef>
-          <a:fillRef idx="3">
-            <a:schemeClr val="accent1"/>
-          </a:fillRef>
-          <a:effectRef idx="2">
-            <a:schemeClr val="accent1"/>
-          </a:effectRef>
-          <a:fontRef idx="minor">
-            <a:schemeClr val="lt1"/>
-          </a:fontRef>
-        </p:style>
-        <p:txBody>
-          <a:bodyPr rtlCol="0" anchor="ctr"/>
-          <a:lstStyle/>
-          <a:p>
-            <a:pPr algn="ctr"/>
-          </a:p>
-        </p:txBody>
-      </p:sp>
-      <p:sp>
-        <p:nvSpPr>
-          <p:cNvPr id="12" name="TextBox 11"/>
-          <p:cNvSpPr txBox="1"/>
-          <p:nvPr/>
-        </p:nvSpPr>
-        <p:spPr>
-          <a:xfrm>
-            <a:off x="4581144" y="2011680"/>
-            <a:ext cx="3063240" cy="411480"/>
-          </a:xfrm>
-          <a:prstGeom prst="rect">
-            <a:avLst/>
-          </a:prstGeom>
-          <a:noFill/>
-        </p:spPr>
-        <p:txBody>
-          <a:bodyPr wrap="square" anchor="t" lIns="0" rIns="0" tIns="0" bIns="0">
-            <a:spAutoFit/>
-          </a:bodyPr>
-          <a:lstStyle/>
-          <a:p>
-            <a:pPr algn="l">
-              <a:lnSpc>
-                <a:spcPct val="100000"/>
-              </a:lnSpc>
-              <a:spcAft>
-                <a:spcPts val="0"/>
-              </a:spcAft>
-            </a:pPr>
-            <a:r>
-              <a:rPr sz="1600" b="1">
-                <a:solidFill>
-                  <a:srgbClr val="0B0B0B"/>
-                </a:solidFill>
-                <a:latin typeface="Calibri"/>
-              </a:rPr>
-              <a:t>Tighten the split</a:t>
-            </a:r>
-          </a:p>
-        </p:txBody>
-      </p:sp>
-      <p:sp>
-        <p:nvSpPr>
-          <p:cNvPr id="13" name="TextBox 12"/>
-          <p:cNvSpPr txBox="1"/>
-          <p:nvPr/>
-        </p:nvSpPr>
-        <p:spPr>
-          <a:xfrm>
-            <a:off x="4581144" y="2468880"/>
-            <a:ext cx="3063240" cy="914400"/>
-          </a:xfrm>
-          <a:prstGeom prst="rect">
-            <a:avLst/>
-          </a:prstGeom>
-          <a:noFill/>
-        </p:spPr>
-        <p:txBody>
-          <a:bodyPr wrap="square" anchor="t" lIns="0" rIns="0" tIns="0" bIns="0">
-            <a:spAutoFit/>
-          </a:bodyPr>
-          <a:lstStyle/>
-          <a:p>
-            <a:pPr algn="l">
-              <a:lnSpc>
-                <a:spcPct val="100000"/>
-              </a:lnSpc>
-              <a:spcAft>
-                <a:spcPts val="0"/>
-              </a:spcAft>
-            </a:pPr>
-            <a:r>
-              <a:rPr sz="4400" b="1">
-                <a:solidFill>
-                  <a:srgbClr val="EB6834"/>
-                </a:solidFill>
-                <a:latin typeface="Calibri"/>
-              </a:rPr>
-              <a:t>0.9990</a:t>
-            </a:r>
-          </a:p>
-        </p:txBody>
-      </p:sp>
-      <p:sp>
-        <p:nvSpPr>
-          <p:cNvPr id="14" name="TextBox 13"/>
-          <p:cNvSpPr txBox="1"/>
-          <p:nvPr/>
-        </p:nvSpPr>
-        <p:spPr>
-          <a:xfrm>
-            <a:off x="4581144" y="3520440"/>
-            <a:ext cx="3063240" cy="1188720"/>
-          </a:xfrm>
-          <a:prstGeom prst="rect">
-            <a:avLst/>
-          </a:prstGeom>
-          <a:noFill/>
-        </p:spPr>
-        <p:txBody>
-          <a:bodyPr wrap="square" anchor="t" lIns="0" rIns="0" tIns="0" bIns="0">
-            <a:spAutoFit/>
-          </a:bodyPr>
-          <a:lstStyle/>
-          <a:p>
-            <a:pPr algn="l">
-              <a:lnSpc>
-                <a:spcPct val="110000"/>
-              </a:lnSpc>
-              <a:spcAft>
-                <a:spcPts val="0"/>
-              </a:spcAft>
-            </a:pPr>
-            <a:r>
-              <a:rPr sz="1250" b="0">
-                <a:solidFill>
-                  <a:srgbClr val="52514E"/>
-                </a:solidFill>
-                <a:latin typeface="Calibri"/>
-              </a:rPr>
-              <a:t>44,577-group range of strictness → accuracy shifts by 0.0005</a:t>
-            </a:r>
-          </a:p>
-        </p:txBody>
-      </p:sp>
-      <p:sp>
-        <p:nvSpPr>
-          <p:cNvPr id="15" name="Rounded Rectangle 14"/>
-          <p:cNvSpPr/>
-          <p:nvPr/>
-        </p:nvSpPr>
-        <p:spPr>
-          <a:xfrm>
-            <a:off x="8101583" y="1783080"/>
-            <a:ext cx="3566160" cy="3017520"/>
-          </a:xfrm>
-          <a:prstGeom prst="roundRect">
-            <a:avLst>
-              <a:gd name="adj" fmla="val 8000"/>
-            </a:avLst>
-          </a:prstGeom>
-          <a:solidFill>
-            <a:srgbClr val="F2F1F9"/>
-          </a:solidFill>
-          <a:ln>
-            <a:noFill/>
-          </a:ln>
-          <a:effectLst/>
-        </p:spPr>
-        <p:style>
-          <a:lnRef idx="1">
-            <a:schemeClr val="accent1"/>
-          </a:lnRef>
-          <a:fillRef idx="3">
-            <a:schemeClr val="accent1"/>
-          </a:fillRef>
-          <a:effectRef idx="2">
-            <a:schemeClr val="accent1"/>
-          </a:effectRef>
-          <a:fontRef idx="minor">
-            <a:schemeClr val="lt1"/>
-          </a:fontRef>
-        </p:style>
-        <p:txBody>
-          <a:bodyPr rtlCol="0" anchor="ctr"/>
-          <a:lstStyle/>
-          <a:p>
-            <a:pPr algn="ctr"/>
-          </a:p>
-        </p:txBody>
-      </p:sp>
-      <p:sp>
-        <p:nvSpPr>
-          <p:cNvPr id="16" name="TextBox 15"/>
-          <p:cNvSpPr txBox="1"/>
-          <p:nvPr/>
-        </p:nvSpPr>
-        <p:spPr>
-          <a:xfrm>
-            <a:off x="8357615" y="2011680"/>
-            <a:ext cx="3063240" cy="411480"/>
-          </a:xfrm>
-          <a:prstGeom prst="rect">
-            <a:avLst/>
-          </a:prstGeom>
-          <a:noFill/>
-        </p:spPr>
-        <p:txBody>
-          <a:bodyPr wrap="square" anchor="t" lIns="0" rIns="0" tIns="0" bIns="0">
-            <a:spAutoFit/>
-          </a:bodyPr>
-          <a:lstStyle/>
-          <a:p>
-            <a:pPr algn="l">
-              <a:lnSpc>
-                <a:spcPct val="100000"/>
-              </a:lnSpc>
-              <a:spcAft>
-                <a:spcPts val="0"/>
-              </a:spcAft>
-            </a:pPr>
-            <a:r>
-              <a:rPr sz="1600" b="1">
-                <a:solidFill>
-                  <a:srgbClr val="0B0B0B"/>
-                </a:solidFill>
-                <a:latin typeface="Calibri"/>
-              </a:rPr>
-              <a:t>Remove ALL features</a:t>
-            </a:r>
-          </a:p>
-        </p:txBody>
-      </p:sp>
-      <p:sp>
-        <p:nvSpPr>
-          <p:cNvPr id="17" name="TextBox 16"/>
-          <p:cNvSpPr txBox="1"/>
-          <p:nvPr/>
-        </p:nvSpPr>
-        <p:spPr>
-          <a:xfrm>
-            <a:off x="8357615" y="2468880"/>
-            <a:ext cx="3063240" cy="914400"/>
-          </a:xfrm>
-          <a:prstGeom prst="rect">
-            <a:avLst/>
-          </a:prstGeom>
-          <a:noFill/>
-        </p:spPr>
-        <p:txBody>
-          <a:bodyPr wrap="square" anchor="t" lIns="0" rIns="0" tIns="0" bIns="0">
-            <a:spAutoFit/>
-          </a:bodyPr>
-          <a:lstStyle/>
-          <a:p>
-            <a:pPr algn="l">
-              <a:lnSpc>
-                <a:spcPct val="100000"/>
-              </a:lnSpc>
-              <a:spcAft>
-                <a:spcPts val="0"/>
-              </a:spcAft>
-            </a:pPr>
-            <a:r>
-              <a:rPr sz="4400" b="1">
-                <a:solidFill>
-                  <a:srgbClr val="4A3AA7"/>
-                </a:solidFill>
-                <a:latin typeface="Calibri"/>
-              </a:rPr>
-              <a:t>0.9985</a:t>
-            </a:r>
-          </a:p>
-        </p:txBody>
-      </p:sp>
-      <p:sp>
-        <p:nvSpPr>
-          <p:cNvPr id="18" name="TextBox 17"/>
-          <p:cNvSpPr txBox="1"/>
-          <p:nvPr/>
-        </p:nvSpPr>
-        <p:spPr>
-          <a:xfrm>
-            <a:off x="8357615" y="3520440"/>
-            <a:ext cx="3063240" cy="1188720"/>
-          </a:xfrm>
-          <a:prstGeom prst="rect">
-            <a:avLst/>
-          </a:prstGeom>
-          <a:noFill/>
-        </p:spPr>
-        <p:txBody>
-          <a:bodyPr wrap="square" anchor="t" lIns="0" rIns="0" tIns="0" bIns="0">
-            <a:spAutoFit/>
-          </a:bodyPr>
-          <a:lstStyle/>
-          <a:p>
-            <a:pPr algn="l">
-              <a:lnSpc>
-                <a:spcPct val="110000"/>
-              </a:lnSpc>
-              <a:spcAft>
-                <a:spcPts val="0"/>
-              </a:spcAft>
-            </a:pPr>
-            <a:r>
-              <a:rPr sz="1250" b="0">
-                <a:solidFill>
-                  <a:srgbClr val="52514E"/>
-                </a:solidFill>
-                <a:latin typeface="Calibri"/>
-              </a:rPr>
-              <a:t>CNN on raw URL characters only → still ties the tabular models</a:t>
-            </a:r>
-          </a:p>
-        </p:txBody>
-      </p:sp>
-      <p:sp>
-        <p:nvSpPr>
-          <p:cNvPr id="19" name="Rounded Rectangle 18"/>
-          <p:cNvSpPr/>
-          <p:nvPr/>
-        </p:nvSpPr>
-        <p:spPr>
-          <a:xfrm>
-            <a:off x="548640" y="5120640"/>
-            <a:ext cx="11094415" cy="566928"/>
-          </a:xfrm>
-          <a:prstGeom prst="roundRect">
-            <a:avLst>
-              <a:gd name="adj" fmla="val 16000"/>
-            </a:avLst>
-          </a:prstGeom>
-          <a:solidFill>
-            <a:srgbClr val="E7F2EE"/>
-          </a:solidFill>
-          <a:ln>
-            <a:noFill/>
-          </a:ln>
-          <a:effectLst/>
-        </p:spPr>
-        <p:style>
-          <a:lnRef idx="1">
-            <a:schemeClr val="accent1"/>
-          </a:lnRef>
-          <a:fillRef idx="3">
-            <a:schemeClr val="accent1"/>
-          </a:fillRef>
-          <a:effectRef idx="2">
-            <a:schemeClr val="accent1"/>
-          </a:effectRef>
-          <a:fontRef idx="minor">
-            <a:schemeClr val="lt1"/>
-          </a:fontRef>
-        </p:style>
-        <p:txBody>
-          <a:bodyPr rtlCol="0" anchor="ctr"/>
-          <a:lstStyle/>
-          <a:p>
-            <a:pPr algn="ctr"/>
-          </a:p>
-        </p:txBody>
-      </p:sp>
-      <p:sp>
-        <p:nvSpPr>
-          <p:cNvPr id="20" name="TextBox 19"/>
-          <p:cNvSpPr txBox="1"/>
-          <p:nvPr/>
-        </p:nvSpPr>
-        <p:spPr>
-          <a:xfrm>
-            <a:off x="804672" y="5120640"/>
-            <a:ext cx="10582351" cy="566928"/>
-          </a:xfrm>
-          <a:prstGeom prst="rect">
-            <a:avLst/>
-          </a:prstGeom>
-          <a:noFill/>
-        </p:spPr>
-        <p:txBody>
-          <a:bodyPr wrap="square" anchor="ctr" lIns="0" rIns="0" tIns="0" bIns="0">
-            <a:spAutoFit/>
-          </a:bodyPr>
-          <a:lstStyle/>
-          <a:p>
-            <a:pPr algn="l">
-              <a:lnSpc>
-                <a:spcPct val="100000"/>
-              </a:lnSpc>
-              <a:spcAft>
-                <a:spcPts val="0"/>
-              </a:spcAft>
-            </a:pPr>
-            <a:r>
-              <a:rPr sz="1400" b="1">
-                <a:solidFill>
-                  <a:srgbClr val="0E7A54"/>
-                </a:solidFill>
-                <a:latin typeface="Calibri"/>
-              </a:rPr>
-              <a:t>Takeaway   </a:t>
-            </a:r>
+                <a:spcPts val="600"/>
+              </a:spcAft>
+            </a:pPr>
             <a:r>
               <a:rPr sz="1400" b="0">
                 <a:solidFill>
-                  <a:srgbClr val="0B0B0B"/>
-                </a:solidFill>
-                <a:latin typeface="Calibri"/>
-              </a:rPr>
-              <a:t>Three independent designs, one conclusion: PhiUSIIL's separability is intrinsic to the data — it goes all the way down to the raw characters.</a:t>
-            </a:r>
-          </a:p>
-        </p:txBody>
-      </p:sp>
-      <p:sp>
-        <p:nvSpPr>
-          <p:cNvPr id="21" name="TextBox 20"/>
-          <p:cNvSpPr txBox="1"/>
-          <p:nvPr/>
-        </p:nvSpPr>
-        <p:spPr>
-          <a:xfrm>
-            <a:off x="548640" y="5943600"/>
-            <a:ext cx="11064240" cy="457200"/>
-          </a:xfrm>
-          <a:prstGeom prst="rect">
-            <a:avLst/>
-          </a:prstGeom>
-          <a:noFill/>
-        </p:spPr>
-        <p:txBody>
-          <a:bodyPr wrap="square" anchor="t" lIns="0" rIns="0" tIns="0" bIns="0">
-            <a:spAutoFit/>
-          </a:bodyPr>
-          <a:lstStyle/>
-          <a:p>
-            <a:pPr algn="ctr">
-              <a:lnSpc>
-                <a:spcPct val="100000"/>
-              </a:lnSpc>
-              <a:spcAft>
-                <a:spcPts val="0"/>
-              </a:spcAft>
-            </a:pPr>
-            <a:r>
-              <a:rPr sz="1400" b="0">
-                <a:solidFill>
-                  <a:srgbClr val="52514E"/>
-                </a:solidFill>
-                <a:latin typeface="Calibri"/>
-              </a:rPr>
-              <a:t>That consistency — not any single accuracy number — is the project's result.</a:t>
+                  <a:srgbClr val="DBEBE5"/>
+                </a:solidFill>
+                <a:latin typeface="Calibri"/>
+              </a:rPr>
+              <a:t>The misses that matter — and a cross-dataset stress test</a:t>
             </a:r>
           </a:p>
         </p:txBody>
@@ -20656,7 +20688,7 @@
                 </a:solidFill>
                 <a:latin typeface="Calibri"/>
               </a:rPr>
-              <a:t>CLOSING · BEING HONEST ABOUT THE EDGES</a:t>
+              <a:t>PART 4 · SIGNIFICANCE</a:t>
             </a:r>
           </a:p>
         </p:txBody>
@@ -20698,7 +20730,7 @@
                 </a:solidFill>
                 <a:latin typeface="Calibri"/>
               </a:rPr>
-              <a:t>Limitations &amp; next steps</a:t>
+              <a:t>Two regimes, one statistically real gap</a:t>
             </a:r>
           </a:p>
         </p:txBody>
@@ -20787,16 +20819,344 @@
           </a:p>
         </p:txBody>
       </p:sp>
-      <p:sp>
-        <p:nvSpPr>
-          <p:cNvPr id="7" name="TextBox 6"/>
-          <p:cNvSpPr txBox="1"/>
-          <p:nvPr/>
-        </p:nvSpPr>
-        <p:spPr>
-          <a:xfrm>
-            <a:off x="548640" y="1645920"/>
-            <a:ext cx="5394960" cy="365760"/>
+      <p:graphicFrame>
+        <p:nvGraphicFramePr>
+          <p:cNvPr id="7" name="Table 6"/>
+          <p:cNvGraphicFramePr>
+            <a:graphicFrameLocks noGrp="1"/>
+          </p:cNvGraphicFramePr>
+          <p:nvPr/>
+        </p:nvGraphicFramePr>
+        <p:xfrm>
+          <a:off x="548640" y="1691640"/>
+          <a:ext cx="9052560" cy="1261872"/>
+        </p:xfrm>
+        <a:graphic>
+          <a:graphicData uri="http://schemas.openxmlformats.org/drawingml/2006/table">
+            <a:tbl>
+              <a:tblPr>
+                <a:tableStyleId>{5C22544A-7EE6-4342-B048-85BDC9FD1C3A}</a:tableStyleId>
+              </a:tblPr>
+              <a:tblGrid>
+                <a:gridCol w="3108960"/>
+                <a:gridCol w="2468880"/>
+                <a:gridCol w="3474720"/>
+              </a:tblGrid>
+              <a:tr h="420624">
+                <a:tc>
+                  <a:txBody>
+                    <a:bodyPr wrap="square"/>
+                    <a:lstStyle/>
+                    <a:p>
+                      <a:pPr algn="l"/>
+                      <a:r>
+                        <a:rPr sz="1250" b="1">
+                          <a:solidFill>
+                            <a:srgbClr val="FFFFFF"/>
+                          </a:solidFill>
+                          <a:latin typeface="Calibri"/>
+                        </a:rPr>
+                        <a:t>Regime</a:t>
+                      </a:r>
+                    </a:p>
+                  </a:txBody>
+                  <a:tcPr marL="73152" marR="73152" marT="18288" marB="18288" anchor="ctr">
+                    <a:solidFill>
+                      <a:srgbClr val="0E7A54"/>
+                    </a:solidFill>
+                  </a:tcPr>
+                </a:tc>
+                <a:tc>
+                  <a:txBody>
+                    <a:bodyPr wrap="square"/>
+                    <a:lstStyle/>
+                    <a:p>
+                      <a:pPr algn="ctr"/>
+                      <a:r>
+                        <a:rPr sz="1250" b="1">
+                          <a:solidFill>
+                            <a:srgbClr val="FFFFFF"/>
+                          </a:solidFill>
+                          <a:latin typeface="Calibri"/>
+                        </a:rPr>
+                        <a:t>Errors on 46,632</a:t>
+                      </a:r>
+                    </a:p>
+                  </a:txBody>
+                  <a:tcPr marL="73152" marR="73152" marT="18288" marB="18288" anchor="ctr">
+                    <a:solidFill>
+                      <a:srgbClr val="0E7A54"/>
+                    </a:solidFill>
+                  </a:tcPr>
+                </a:tc>
+                <a:tc>
+                  <a:txBody>
+                    <a:bodyPr wrap="square"/>
+                    <a:lstStyle/>
+                    <a:p>
+                      <a:pPr algn="ctr"/>
+                      <a:r>
+                        <a:rPr sz="1250" b="1">
+                          <a:solidFill>
+                            <a:srgbClr val="FFFFFF"/>
+                          </a:solidFill>
+                          <a:latin typeface="Calibri"/>
+                        </a:rPr>
+                        <a:t>Accuracy (95% CI)</a:t>
+                      </a:r>
+                    </a:p>
+                  </a:txBody>
+                  <a:tcPr marL="73152" marR="73152" marT="18288" marB="18288" anchor="ctr">
+                    <a:solidFill>
+                      <a:srgbClr val="0E7A54"/>
+                    </a:solidFill>
+                  </a:tcPr>
+                </a:tc>
+              </a:tr>
+              <a:tr h="420624">
+                <a:tc>
+                  <a:txBody>
+                    <a:bodyPr wrap="square"/>
+                    <a:lstStyle/>
+                    <a:p>
+                      <a:pPr algn="l"/>
+                      <a:r>
+                        <a:rPr sz="1200" b="1">
+                          <a:solidFill>
+                            <a:srgbClr val="0B0B0B"/>
+                          </a:solidFill>
+                          <a:latin typeface="Calibri"/>
+                        </a:rPr>
+                        <a:t>Full — 49 clean features</a:t>
+                      </a:r>
+                    </a:p>
+                  </a:txBody>
+                  <a:tcPr marL="73152" marR="73152" marT="18288" marB="18288" anchor="ctr">
+                    <a:solidFill>
+                      <a:srgbClr val="FCFCFB"/>
+                    </a:solidFill>
+                  </a:tcPr>
+                </a:tc>
+                <a:tc>
+                  <a:txBody>
+                    <a:bodyPr wrap="square"/>
+                    <a:lstStyle/>
+                    <a:p>
+                      <a:pPr algn="ctr"/>
+                      <a:r>
+                        <a:rPr sz="1200" b="0">
+                          <a:solidFill>
+                            <a:srgbClr val="0B0B0B"/>
+                          </a:solidFill>
+                          <a:latin typeface="Calibri"/>
+                        </a:rPr>
+                        <a:t>2   (0 FP / 2 FN)</a:t>
+                      </a:r>
+                    </a:p>
+                  </a:txBody>
+                  <a:tcPr marL="73152" marR="73152" marT="18288" marB="18288" anchor="ctr">
+                    <a:solidFill>
+                      <a:srgbClr val="FCFCFB"/>
+                    </a:solidFill>
+                  </a:tcPr>
+                </a:tc>
+                <a:tc>
+                  <a:txBody>
+                    <a:bodyPr wrap="square"/>
+                    <a:lstStyle/>
+                    <a:p>
+                      <a:pPr algn="ctr"/>
+                      <a:r>
+                        <a:rPr sz="1200" b="0">
+                          <a:solidFill>
+                            <a:srgbClr val="0B0B0B"/>
+                          </a:solidFill>
+                          <a:latin typeface="Calibri"/>
+                        </a:rPr>
+                        <a:t>0.99996  [0.99989, 1.00000]</a:t>
+                      </a:r>
+                    </a:p>
+                  </a:txBody>
+                  <a:tcPr marL="73152" marR="73152" marT="18288" marB="18288" anchor="ctr">
+                    <a:solidFill>
+                      <a:srgbClr val="FCFCFB"/>
+                    </a:solidFill>
+                  </a:tcPr>
+                </a:tc>
+              </a:tr>
+              <a:tr h="420624">
+                <a:tc>
+                  <a:txBody>
+                    <a:bodyPr wrap="square"/>
+                    <a:lstStyle/>
+                    <a:p>
+                      <a:pPr algn="l"/>
+                      <a:r>
+                        <a:rPr sz="1200" b="1">
+                          <a:solidFill>
+                            <a:srgbClr val="0B0B0B"/>
+                          </a:solidFill>
+                          <a:latin typeface="Calibri"/>
+                        </a:rPr>
+                        <a:t>URL-only — 21 features</a:t>
+                      </a:r>
+                    </a:p>
+                  </a:txBody>
+                  <a:tcPr marL="73152" marR="73152" marT="18288" marB="18288" anchor="ctr">
+                    <a:solidFill>
+                      <a:srgbClr val="F4F3F0"/>
+                    </a:solidFill>
+                  </a:tcPr>
+                </a:tc>
+                <a:tc>
+                  <a:txBody>
+                    <a:bodyPr wrap="square"/>
+                    <a:lstStyle/>
+                    <a:p>
+                      <a:pPr algn="ctr"/>
+                      <a:r>
+                        <a:rPr sz="1200" b="0">
+                          <a:solidFill>
+                            <a:srgbClr val="0B0B0B"/>
+                          </a:solidFill>
+                          <a:latin typeface="Calibri"/>
+                        </a:rPr>
+                        <a:t>90   (12 FP / 78 FN)</a:t>
+                      </a:r>
+                    </a:p>
+                  </a:txBody>
+                  <a:tcPr marL="73152" marR="73152" marT="18288" marB="18288" anchor="ctr">
+                    <a:solidFill>
+                      <a:srgbClr val="F4F3F0"/>
+                    </a:solidFill>
+                  </a:tcPr>
+                </a:tc>
+                <a:tc>
+                  <a:txBody>
+                    <a:bodyPr wrap="square"/>
+                    <a:lstStyle/>
+                    <a:p>
+                      <a:pPr algn="ctr"/>
+                      <a:r>
+                        <a:rPr sz="1200" b="0">
+                          <a:solidFill>
+                            <a:srgbClr val="0B0B0B"/>
+                          </a:solidFill>
+                          <a:latin typeface="Calibri"/>
+                        </a:rPr>
+                        <a:t>0.99807  [0.99764, 0.99846]</a:t>
+                      </a:r>
+                    </a:p>
+                  </a:txBody>
+                  <a:tcPr marL="73152" marR="73152" marT="18288" marB="18288" anchor="ctr">
+                    <a:solidFill>
+                      <a:srgbClr val="F4F3F0"/>
+                    </a:solidFill>
+                  </a:tcPr>
+                </a:tc>
+              </a:tr>
+            </a:tbl>
+          </a:graphicData>
+        </a:graphic>
+      </p:graphicFrame>
+      <p:sp>
+        <p:nvSpPr>
+          <p:cNvPr id="8" name="Rounded Rectangle 7"/>
+          <p:cNvSpPr/>
+          <p:nvPr/>
+        </p:nvSpPr>
+        <p:spPr>
+          <a:xfrm>
+            <a:off x="9189720" y="3291840"/>
+            <a:ext cx="2450592" cy="1371600"/>
+          </a:xfrm>
+          <a:prstGeom prst="roundRect">
+            <a:avLst>
+              <a:gd name="adj" fmla="val 10000"/>
+            </a:avLst>
+          </a:prstGeom>
+          <a:solidFill>
+            <a:srgbClr val="ECF4F1"/>
+          </a:solidFill>
+          <a:ln>
+            <a:noFill/>
+          </a:ln>
+          <a:effectLst/>
+        </p:spPr>
+        <p:style>
+          <a:lnRef idx="1">
+            <a:schemeClr val="accent1"/>
+          </a:lnRef>
+          <a:fillRef idx="3">
+            <a:schemeClr val="accent1"/>
+          </a:fillRef>
+          <a:effectRef idx="2">
+            <a:schemeClr val="accent1"/>
+          </a:effectRef>
+          <a:fontRef idx="minor">
+            <a:schemeClr val="lt1"/>
+          </a:fontRef>
+        </p:style>
+        <p:txBody>
+          <a:bodyPr rtlCol="0" anchor="ctr"/>
+          <a:lstStyle/>
+          <a:p>
+            <a:pPr algn="ctr"/>
+          </a:p>
+        </p:txBody>
+      </p:sp>
+      <p:sp>
+        <p:nvSpPr>
+          <p:cNvPr id="9" name="TextBox 8"/>
+          <p:cNvSpPr txBox="1"/>
+          <p:nvPr/>
+        </p:nvSpPr>
+        <p:spPr>
+          <a:xfrm>
+            <a:off x="9390888" y="3419856"/>
+            <a:ext cx="2048256" cy="795527"/>
+          </a:xfrm>
+          <a:prstGeom prst="rect">
+            <a:avLst/>
+          </a:prstGeom>
+          <a:noFill/>
+        </p:spPr>
+        <p:txBody>
+          <a:bodyPr wrap="square" anchor="ctr" lIns="0" rIns="0" tIns="0" bIns="0">
+            <a:spAutoFit/>
+          </a:bodyPr>
+          <a:lstStyle/>
+          <a:p>
+            <a:pPr algn="l">
+              <a:lnSpc>
+                <a:spcPct val="100000"/>
+              </a:lnSpc>
+              <a:spcAft>
+                <a:spcPts val="0"/>
+              </a:spcAft>
+            </a:pPr>
+            <a:r>
+              <a:rPr sz="2400" b="1">
+                <a:solidFill>
+                  <a:srgbClr val="0E7A54"/>
+                </a:solidFill>
+                <a:latin typeface="Calibri"/>
+              </a:rPr>
+              <a:t>1.7e-24</a:t>
+            </a:r>
+          </a:p>
+        </p:txBody>
+      </p:sp>
+      <p:sp>
+        <p:nvSpPr>
+          <p:cNvPr id="10" name="TextBox 9"/>
+          <p:cNvSpPr txBox="1"/>
+          <p:nvPr/>
+        </p:nvSpPr>
+        <p:spPr>
+          <a:xfrm>
+            <a:off x="9390888" y="4096511"/>
+            <a:ext cx="2048256" cy="502920"/>
           </a:xfrm>
           <a:prstGeom prst="rect">
             <a:avLst/>
@@ -20811,6 +21171,228 @@
           <a:p>
             <a:pPr algn="l">
               <a:lnSpc>
+                <a:spcPct val="95000"/>
+              </a:lnSpc>
+              <a:spcAft>
+                <a:spcPts val="0"/>
+              </a:spcAft>
+            </a:pPr>
+            <a:r>
+              <a:rPr sz="1150" b="0">
+                <a:solidFill>
+                  <a:srgbClr val="52514E"/>
+                </a:solidFill>
+                <a:latin typeface="Calibri"/>
+              </a:rPr>
+              <a:t>McNemar's exact test p-value — not noise</a:t>
+            </a:r>
+          </a:p>
+        </p:txBody>
+      </p:sp>
+      <p:sp>
+        <p:nvSpPr>
+          <p:cNvPr id="11" name="TextBox 10"/>
+          <p:cNvSpPr txBox="1"/>
+          <p:nvPr/>
+        </p:nvSpPr>
+        <p:spPr>
+          <a:xfrm>
+            <a:off x="548640" y="3291840"/>
+            <a:ext cx="8595360" cy="2103120"/>
+          </a:xfrm>
+          <a:prstGeom prst="rect">
+            <a:avLst/>
+          </a:prstGeom>
+          <a:noFill/>
+        </p:spPr>
+        <p:txBody>
+          <a:bodyPr wrap="square" anchor="t" lIns="0" rIns="0" tIns="0" bIns="0">
+            <a:spAutoFit/>
+          </a:bodyPr>
+          <a:lstStyle/>
+          <a:p>
+            <a:pPr algn="l">
+              <a:lnSpc>
+                <a:spcPct val="105000"/>
+              </a:lnSpc>
+              <a:spcAft>
+                <a:spcPts val="900"/>
+              </a:spcAft>
+            </a:pPr>
+            <a:r>
+              <a:rPr sz="1350" b="1">
+                <a:solidFill>
+                  <a:srgbClr val="0E7A54"/>
+                </a:solidFill>
+                <a:latin typeface="Calibri"/>
+              </a:rPr>
+              <a:t>•  </a:t>
+            </a:r>
+            <a:r>
+              <a:rPr sz="1350" b="1">
+                <a:solidFill>
+                  <a:srgbClr val="0B0B0B"/>
+                </a:solidFill>
+                <a:latin typeface="Calibri"/>
+              </a:rPr>
+              <a:t>URL-only = the pre-click setting:</a:t>
+            </a:r>
+            <a:r>
+              <a:rPr sz="1350" b="0">
+                <a:solidFill>
+                  <a:srgbClr val="52514E"/>
+                </a:solidFill>
+                <a:latin typeface="Calibri"/>
+              </a:rPr>
+              <a:t> nothing that needs fetching the page. The confidence intervals don't overlap; the gap is real.</a:t>
+            </a:r>
+          </a:p>
+          <a:p>
+            <a:pPr algn="l">
+              <a:lnSpc>
+                <a:spcPct val="105000"/>
+              </a:lnSpc>
+              <a:spcAft>
+                <a:spcPts val="900"/>
+              </a:spcAft>
+            </a:pPr>
+            <a:r>
+              <a:rPr sz="1350" b="1">
+                <a:solidFill>
+                  <a:srgbClr val="0E7A54"/>
+                </a:solidFill>
+                <a:latin typeface="Calibri"/>
+              </a:rPr>
+              <a:t>•  </a:t>
+            </a:r>
+            <a:r>
+              <a:rPr sz="1350" b="1">
+                <a:solidFill>
+                  <a:srgbClr val="0B0B0B"/>
+                </a:solidFill>
+                <a:latin typeface="Calibri"/>
+              </a:rPr>
+              <a:t>Our engineered features fail here too:</a:t>
+            </a:r>
+            <a:r>
+              <a:rPr sz="1350" b="0">
+                <a:solidFill>
+                  <a:srgbClr val="52514E"/>
+                </a:solidFill>
+                <a:latin typeface="Calibri"/>
+              </a:rPr>
+              <a:t> adding them changes accuracy 0.9981 → 0.9980, ranks 14–22 of 26. Notebook 02's open question is now closed — in both regimes.</a:t>
+            </a:r>
+          </a:p>
+          <a:p>
+            <a:pPr algn="l">
+              <a:lnSpc>
+                <a:spcPct val="105000"/>
+              </a:lnSpc>
+              <a:spcAft>
+                <a:spcPts val="900"/>
+              </a:spcAft>
+            </a:pPr>
+            <a:r>
+              <a:rPr sz="1350" b="1">
+                <a:solidFill>
+                  <a:srgbClr val="0E7A54"/>
+                </a:solidFill>
+                <a:latin typeface="Calibri"/>
+              </a:rPr>
+              <a:t>•  </a:t>
+            </a:r>
+            <a:r>
+              <a:rPr sz="1350" b="1">
+                <a:solidFill>
+                  <a:srgbClr val="0B0B0B"/>
+                </a:solidFill>
+                <a:latin typeface="Calibri"/>
+              </a:rPr>
+              <a:t>Dropping IsHTTPS costs only ~0.0004</a:t>
+            </a:r>
+            <a:r>
+              <a:rPr sz="1350" b="0">
+                <a:solidFill>
+                  <a:srgbClr val="52514E"/>
+                </a:solidFill>
+                <a:latin typeface="Calibri"/>
+              </a:rPr>
+              <a:t> — the URL-only result doesn't secretly lean on the collection artifact.</a:t>
+            </a:r>
+          </a:p>
+        </p:txBody>
+      </p:sp>
+      <p:sp>
+        <p:nvSpPr>
+          <p:cNvPr id="12" name="Rounded Rectangle 11"/>
+          <p:cNvSpPr/>
+          <p:nvPr/>
+        </p:nvSpPr>
+        <p:spPr>
+          <a:xfrm>
+            <a:off x="548640" y="5806440"/>
+            <a:ext cx="11094415" cy="566928"/>
+          </a:xfrm>
+          <a:prstGeom prst="roundRect">
+            <a:avLst>
+              <a:gd name="adj" fmla="val 16000"/>
+            </a:avLst>
+          </a:prstGeom>
+          <a:solidFill>
+            <a:srgbClr val="E7F2EE"/>
+          </a:solidFill>
+          <a:ln>
+            <a:noFill/>
+          </a:ln>
+          <a:effectLst/>
+        </p:spPr>
+        <p:style>
+          <a:lnRef idx="1">
+            <a:schemeClr val="accent1"/>
+          </a:lnRef>
+          <a:fillRef idx="3">
+            <a:schemeClr val="accent1"/>
+          </a:fillRef>
+          <a:effectRef idx="2">
+            <a:schemeClr val="accent1"/>
+          </a:effectRef>
+          <a:fontRef idx="minor">
+            <a:schemeClr val="lt1"/>
+          </a:fontRef>
+        </p:style>
+        <p:txBody>
+          <a:bodyPr rtlCol="0" anchor="ctr"/>
+          <a:lstStyle/>
+          <a:p>
+            <a:pPr algn="ctr"/>
+          </a:p>
+        </p:txBody>
+      </p:sp>
+      <p:sp>
+        <p:nvSpPr>
+          <p:cNvPr id="13" name="TextBox 12"/>
+          <p:cNvSpPr txBox="1"/>
+          <p:nvPr/>
+        </p:nvSpPr>
+        <p:spPr>
+          <a:xfrm>
+            <a:off x="804672" y="5806440"/>
+            <a:ext cx="10582351" cy="566928"/>
+          </a:xfrm>
+          <a:prstGeom prst="rect">
+            <a:avLst/>
+          </a:prstGeom>
+          <a:noFill/>
+        </p:spPr>
+        <p:txBody>
+          <a:bodyPr wrap="square" anchor="ctr" lIns="0" rIns="0" tIns="0" bIns="0">
+            <a:spAutoFit/>
+          </a:bodyPr>
+          <a:lstStyle/>
+          <a:p>
+            <a:pPr algn="l">
+              <a:lnSpc>
                 <a:spcPct val="100000"/>
               </a:lnSpc>
               <a:spcAft>
@@ -20818,360 +21400,22 @@
               </a:spcAft>
             </a:pPr>
             <a:r>
-              <a:rPr sz="1700" b="1">
+              <a:rPr sz="1400" b="1">
+                <a:solidFill>
+                  <a:srgbClr val="0E7A54"/>
+                </a:solidFill>
+                <a:latin typeface="Calibri"/>
+              </a:rPr>
+              <a:t>Takeaway   </a:t>
+            </a:r>
+            <a:r>
+              <a:rPr sz="1400" b="0">
                 <a:solidFill>
                   <a:srgbClr val="0B0B0B"/>
                 </a:solidFill>
                 <a:latin typeface="Calibri"/>
               </a:rPr>
-              <a:t>Limitations</a:t>
-            </a:r>
-          </a:p>
-        </p:txBody>
-      </p:sp>
-      <p:sp>
-        <p:nvSpPr>
-          <p:cNvPr id="8" name="TextBox 7"/>
-          <p:cNvSpPr txBox="1"/>
-          <p:nvPr/>
-        </p:nvSpPr>
-        <p:spPr>
-          <a:xfrm>
-            <a:off x="548640" y="2103120"/>
-            <a:ext cx="5394960" cy="3840480"/>
-          </a:xfrm>
-          <a:prstGeom prst="rect">
-            <a:avLst/>
-          </a:prstGeom>
-          <a:noFill/>
-        </p:spPr>
-        <p:txBody>
-          <a:bodyPr wrap="square" anchor="t" lIns="0" rIns="0" tIns="0" bIns="0">
-            <a:spAutoFit/>
-          </a:bodyPr>
-          <a:lstStyle/>
-          <a:p>
-            <a:pPr algn="l">
-              <a:lnSpc>
-                <a:spcPct val="105000"/>
-              </a:lnSpc>
-              <a:spcAft>
-                <a:spcPts val="900"/>
-              </a:spcAft>
-            </a:pPr>
-            <a:r>
-              <a:rPr sz="1350" b="1">
-                <a:solidFill>
-                  <a:srgbClr val="E34948"/>
-                </a:solidFill>
-                <a:latin typeface="Calibri"/>
-              </a:rPr>
-              <a:t>•  </a:t>
-            </a:r>
-            <a:r>
-              <a:rPr sz="1350" b="1">
-                <a:solidFill>
-                  <a:srgbClr val="0B0B0B"/>
-                </a:solidFill>
-                <a:latin typeface="Calibri"/>
-              </a:rPr>
-              <a:t>One collection, one snapshot:</a:t>
-            </a:r>
-            <a:r>
-              <a:rPr sz="1350" b="0">
-                <a:solidFill>
-                  <a:srgbClr val="52514E"/>
-                </a:solidFill>
-                <a:latin typeface="Calibri"/>
-              </a:rPr>
-              <a:t> train and test both come from PhiUSIIL's crawl — no temporal drift, no other source tested.</a:t>
-            </a:r>
-          </a:p>
-          <a:p>
-            <a:pPr algn="l">
-              <a:lnSpc>
-                <a:spcPct val="105000"/>
-              </a:lnSpc>
-              <a:spcAft>
-                <a:spcPts val="900"/>
-              </a:spcAft>
-            </a:pPr>
-            <a:r>
-              <a:rPr sz="1350" b="1">
-                <a:solidFill>
-                  <a:srgbClr val="E34948"/>
-                </a:solidFill>
-                <a:latin typeface="Calibri"/>
-              </a:rPr>
-              <a:t>•  </a:t>
-            </a:r>
-            <a:r>
-              <a:rPr sz="1350" b="1">
-                <a:solidFill>
-                  <a:srgbClr val="0B0B0B"/>
-                </a:solidFill>
-                <a:latin typeface="Calibri"/>
-              </a:rPr>
-              <a:t>Saturated metrics:</a:t>
-            </a:r>
-            <a:r>
-              <a:rPr sz="1350" b="0">
-                <a:solidFill>
-                  <a:srgbClr val="52514E"/>
-                </a:solidFill>
-                <a:latin typeface="Calibri"/>
-              </a:rPr>
-              <a:t> accuracy ordering among our models is noise; we say so rather than rank them.</a:t>
-            </a:r>
-          </a:p>
-          <a:p>
-            <a:pPr algn="l">
-              <a:lnSpc>
-                <a:spcPct val="105000"/>
-              </a:lnSpc>
-              <a:spcAft>
-                <a:spcPts val="900"/>
-              </a:spcAft>
-            </a:pPr>
-            <a:r>
-              <a:rPr sz="1350" b="1">
-                <a:solidFill>
-                  <a:srgbClr val="E34948"/>
-                </a:solidFill>
-                <a:latin typeface="Calibri"/>
-              </a:rPr>
-              <a:t>•  </a:t>
-            </a:r>
-            <a:r>
-              <a:rPr sz="1350" b="1">
-                <a:solidFill>
-                  <a:srgbClr val="0B0B0B"/>
-                </a:solidFill>
-                <a:latin typeface="Calibri"/>
-              </a:rPr>
-              <a:t>Illustrative costs:</a:t>
-            </a:r>
-            <a:r>
-              <a:rPr sz="1350" b="0">
-                <a:solidFill>
-                  <a:srgbClr val="52514E"/>
-                </a:solidFill>
-                <a:latin typeface="Calibri"/>
-              </a:rPr>
-              <a:t> the $500 / $5 asymmetry is defensible but not sourced from our own deployment.</a:t>
-            </a:r>
-          </a:p>
-          <a:p>
-            <a:pPr algn="l">
-              <a:lnSpc>
-                <a:spcPct val="105000"/>
-              </a:lnSpc>
-              <a:spcAft>
-                <a:spcPts val="900"/>
-              </a:spcAft>
-            </a:pPr>
-            <a:r>
-              <a:rPr sz="1350" b="1">
-                <a:solidFill>
-                  <a:srgbClr val="E34948"/>
-                </a:solidFill>
-                <a:latin typeface="Calibri"/>
-              </a:rPr>
-              <a:t>•  </a:t>
-            </a:r>
-            <a:r>
-              <a:rPr sz="1350" b="1">
-                <a:solidFill>
-                  <a:srgbClr val="0B0B0B"/>
-                </a:solidFill>
-                <a:latin typeface="Calibri"/>
-              </a:rPr>
-              <a:t>Platform siblings</a:t>
-            </a:r>
-            <a:r>
-              <a:rPr sz="1350" b="0">
-                <a:solidFill>
-                  <a:srgbClr val="52514E"/>
-                </a:solidFill>
-                <a:latin typeface="Calibri"/>
-              </a:rPr>
-              <a:t> (web.app, firebaseapp.com) can still straddle the split; the CNN is more exposed to this than the linear model.</a:t>
-            </a:r>
-          </a:p>
-        </p:txBody>
-      </p:sp>
-      <p:sp>
-        <p:nvSpPr>
-          <p:cNvPr id="9" name="TextBox 8"/>
-          <p:cNvSpPr txBox="1"/>
-          <p:nvPr/>
-        </p:nvSpPr>
-        <p:spPr>
-          <a:xfrm>
-            <a:off x="6400800" y="1645920"/>
-            <a:ext cx="5212080" cy="365760"/>
-          </a:xfrm>
-          <a:prstGeom prst="rect">
-            <a:avLst/>
-          </a:prstGeom>
-          <a:noFill/>
-        </p:spPr>
-        <p:txBody>
-          <a:bodyPr wrap="square" anchor="t" lIns="0" rIns="0" tIns="0" bIns="0">
-            <a:spAutoFit/>
-          </a:bodyPr>
-          <a:lstStyle/>
-          <a:p>
-            <a:pPr algn="l">
-              <a:lnSpc>
-                <a:spcPct val="100000"/>
-              </a:lnSpc>
-              <a:spcAft>
-                <a:spcPts val="0"/>
-              </a:spcAft>
-            </a:pPr>
-            <a:r>
-              <a:rPr sz="1700" b="1">
-                <a:solidFill>
-                  <a:srgbClr val="0B0B0B"/>
-                </a:solidFill>
-                <a:latin typeface="Calibri"/>
-              </a:rPr>
-              <a:t>Next steps</a:t>
-            </a:r>
-          </a:p>
-        </p:txBody>
-      </p:sp>
-      <p:sp>
-        <p:nvSpPr>
-          <p:cNvPr id="10" name="TextBox 9"/>
-          <p:cNvSpPr txBox="1"/>
-          <p:nvPr/>
-        </p:nvSpPr>
-        <p:spPr>
-          <a:xfrm>
-            <a:off x="6400800" y="2103120"/>
-            <a:ext cx="5212080" cy="3840480"/>
-          </a:xfrm>
-          <a:prstGeom prst="rect">
-            <a:avLst/>
-          </a:prstGeom>
-          <a:noFill/>
-        </p:spPr>
-        <p:txBody>
-          <a:bodyPr wrap="square" anchor="t" lIns="0" rIns="0" tIns="0" bIns="0">
-            <a:spAutoFit/>
-          </a:bodyPr>
-          <a:lstStyle/>
-          <a:p>
-            <a:pPr algn="l">
-              <a:lnSpc>
-                <a:spcPct val="105000"/>
-              </a:lnSpc>
-              <a:spcAft>
-                <a:spcPts val="900"/>
-              </a:spcAft>
-            </a:pPr>
-            <a:r>
-              <a:rPr sz="1350" b="1">
-                <a:solidFill>
-                  <a:srgbClr val="0E7A54"/>
-                </a:solidFill>
-                <a:latin typeface="Calibri"/>
-              </a:rPr>
-              <a:t>•  </a:t>
-            </a:r>
-            <a:r>
-              <a:rPr sz="1350" b="1">
-                <a:solidFill>
-                  <a:srgbClr val="0B0B0B"/>
-                </a:solidFill>
-                <a:latin typeface="Calibri"/>
-              </a:rPr>
-              <a:t>Cross-corpus testing:</a:t>
-            </a:r>
-            <a:r>
-              <a:rPr sz="1350" b="0">
-                <a:solidFill>
-                  <a:srgbClr val="52514E"/>
-                </a:solidFill>
-                <a:latin typeface="Calibri"/>
-              </a:rPr>
-              <a:t> evaluate the trained models on a different dataset to measure how much performance is PhiUSIIL-specific.</a:t>
-            </a:r>
-          </a:p>
-          <a:p>
-            <a:pPr algn="l">
-              <a:lnSpc>
-                <a:spcPct val="105000"/>
-              </a:lnSpc>
-              <a:spcAft>
-                <a:spcPts val="900"/>
-              </a:spcAft>
-            </a:pPr>
-            <a:r>
-              <a:rPr sz="1350" b="1">
-                <a:solidFill>
-                  <a:srgbClr val="0E7A54"/>
-                </a:solidFill>
-                <a:latin typeface="Calibri"/>
-              </a:rPr>
-              <a:t>•  </a:t>
-            </a:r>
-            <a:r>
-              <a:rPr sz="1350" b="1">
-                <a:solidFill>
-                  <a:srgbClr val="0B0B0B"/>
-                </a:solidFill>
-                <a:latin typeface="Calibri"/>
-              </a:rPr>
-              <a:t>Kit-level clustering:</a:t>
-            </a:r>
-            <a:r>
-              <a:rPr sz="1350" b="0">
-                <a:solidFill>
-                  <a:srgbClr val="52514E"/>
-                </a:solidFill>
-                <a:latin typeface="Calibri"/>
-              </a:rPr>
-              <a:t> feed the micro-cluster structure HDBSCAN surfaced into an operational grouping of phishing campaigns.</a:t>
-            </a:r>
-          </a:p>
-          <a:p>
-            <a:pPr algn="l">
-              <a:lnSpc>
-                <a:spcPct val="105000"/>
-              </a:lnSpc>
-              <a:spcAft>
-                <a:spcPts val="900"/>
-              </a:spcAft>
-            </a:pPr>
-            <a:r>
-              <a:rPr sz="1350" b="1">
-                <a:solidFill>
-                  <a:srgbClr val="0E7A54"/>
-                </a:solidFill>
-                <a:latin typeface="Calibri"/>
-              </a:rPr>
-              <a:t>•  </a:t>
-            </a:r>
-            <a:r>
-              <a:rPr sz="1350" b="1">
-                <a:solidFill>
-                  <a:srgbClr val="0B0B0B"/>
-                </a:solidFill>
-                <a:latin typeface="Calibri"/>
-              </a:rPr>
-              <a:t>Fully platform-aware split:</a:t>
-            </a:r>
-            <a:r>
-              <a:rPr sz="1350" b="0">
-                <a:solidFill>
-                  <a:srgbClr val="52514E"/>
-                </a:solidFill>
-                <a:latin typeface="Calibri"/>
-              </a:rPr>
-              <a:t> close the last grouping gap the eTLD+1 analysis identified.</a:t>
+              <a:t>The full-feature model really is better on this test set. Now — what do these numbers mean outside the test set?</a:t>
             </a:r>
           </a:p>
         </p:txBody>
@@ -21283,7 +21527,7 @@
                 </a:solidFill>
                 <a:latin typeface="Calibri"/>
               </a:rPr>
-              <a:t>CLOSING</a:t>
+              <a:t>PART 4 · BASE RATES</a:t>
             </a:r>
           </a:p>
         </p:txBody>
@@ -21325,7 +21569,7 @@
                 </a:solidFill>
                 <a:latin typeface="Calibri"/>
               </a:rPr>
-              <a:t>What we'd tell the next team</a:t>
+              <a:t>99.8% accuracy does not survive real traffic</a:t>
             </a:r>
           </a:p>
         </p:txBody>
@@ -21414,24 +21658,48 @@
           </a:p>
         </p:txBody>
       </p:sp>
-      <p:sp>
-        <p:nvSpPr>
-          <p:cNvPr id="7" name="Rounded Rectangle 6"/>
+      <p:pic>
+        <p:nvPicPr>
+          <p:cNvPr id="7" name="Picture 6" descr="fig_base_rates.png"/>
+          <p:cNvPicPr>
+            <a:picLocks noChangeAspect="1"/>
+          </p:cNvPicPr>
+          <p:nvPr/>
+        </p:nvPicPr>
+        <p:blipFill>
+          <a:blip r:embed="rId2"/>
+          <a:stretch>
+            <a:fillRect/>
+          </a:stretch>
+        </p:blipFill>
+        <p:spPr>
+          <a:xfrm>
+            <a:off x="548640" y="1678544"/>
+            <a:ext cx="6949440" cy="3866671"/>
+          </a:xfrm>
+          <a:prstGeom prst="rect">
+            <a:avLst/>
+          </a:prstGeom>
+        </p:spPr>
+      </p:pic>
+      <p:sp>
+        <p:nvSpPr>
+          <p:cNvPr id="8" name="Rounded Rectangle 7"/>
           <p:cNvSpPr/>
           <p:nvPr/>
         </p:nvSpPr>
         <p:spPr>
           <a:xfrm>
-            <a:off x="548640" y="1737360"/>
-            <a:ext cx="5394960" cy="1508760"/>
+            <a:off x="7818120" y="1691640"/>
+            <a:ext cx="3794760" cy="1463040"/>
           </a:xfrm>
           <a:prstGeom prst="roundRect">
             <a:avLst>
-              <a:gd name="adj" fmla="val 8000"/>
+              <a:gd name="adj" fmla="val 10000"/>
             </a:avLst>
           </a:prstGeom>
           <a:solidFill>
-            <a:srgbClr val="F0F6FC"/>
+            <a:srgbClr val="ECF4F1"/>
           </a:solidFill>
           <a:ln>
             <a:noFill/>
@@ -21462,14 +21730,56 @@
       </p:sp>
       <p:sp>
         <p:nvSpPr>
-          <p:cNvPr id="8" name="TextBox 7"/>
-          <p:cNvSpPr txBox="1"/>
-          <p:nvPr/>
-        </p:nvSpPr>
-        <p:spPr>
-          <a:xfrm>
-            <a:off x="804672" y="1883664"/>
-            <a:ext cx="4892040" cy="548640"/>
+          <p:cNvPr id="9" name="TextBox 8"/>
+          <p:cNvSpPr txBox="1"/>
+          <p:nvPr/>
+        </p:nvSpPr>
+        <p:spPr>
+          <a:xfrm>
+            <a:off x="8019288" y="1819656"/>
+            <a:ext cx="3392424" cy="848563"/>
+          </a:xfrm>
+          <a:prstGeom prst="rect">
+            <a:avLst/>
+          </a:prstGeom>
+          <a:noFill/>
+        </p:spPr>
+        <p:txBody>
+          <a:bodyPr wrap="square" anchor="ctr" lIns="0" rIns="0" tIns="0" bIns="0">
+            <a:spAutoFit/>
+          </a:bodyPr>
+          <a:lstStyle/>
+          <a:p>
+            <a:pPr algn="l">
+              <a:lnSpc>
+                <a:spcPct val="100000"/>
+              </a:lnSpc>
+              <a:spcAft>
+                <a:spcPts val="0"/>
+              </a:spcAft>
+            </a:pPr>
+            <a:r>
+              <a:rPr sz="3200" b="1">
+                <a:solidFill>
+                  <a:srgbClr val="0E7A54"/>
+                </a:solidFill>
+                <a:latin typeface="Calibri"/>
+              </a:rPr>
+              <a:t>18%</a:t>
+            </a:r>
+          </a:p>
+        </p:txBody>
+      </p:sp>
+      <p:sp>
+        <p:nvSpPr>
+          <p:cNvPr id="10" name="TextBox 9"/>
+          <p:cNvSpPr txBox="1"/>
+          <p:nvPr/>
+        </p:nvSpPr>
+        <p:spPr>
+          <a:xfrm>
+            <a:off x="8019288" y="2587752"/>
+            <a:ext cx="3392424" cy="502920"/>
           </a:xfrm>
           <a:prstGeom prst="rect">
             <a:avLst/>
@@ -21484,84 +21794,42 @@
           <a:p>
             <a:pPr algn="l">
               <a:lnSpc>
-                <a:spcPct val="100000"/>
+                <a:spcPct val="95000"/>
               </a:lnSpc>
               <a:spcAft>
                 <a:spcPts val="0"/>
               </a:spcAft>
             </a:pPr>
             <a:r>
-              <a:rPr sz="1550" b="1">
-                <a:solidFill>
-                  <a:srgbClr val="2A78D6"/>
-                </a:solidFill>
-                <a:latin typeface="Calibri"/>
-              </a:rPr>
-              <a:t>Audit before you model.</a:t>
-            </a:r>
-          </a:p>
-        </p:txBody>
-      </p:sp>
-      <p:sp>
-        <p:nvSpPr>
-          <p:cNvPr id="9" name="TextBox 8"/>
-          <p:cNvSpPr txBox="1"/>
-          <p:nvPr/>
-        </p:nvSpPr>
-        <p:spPr>
-          <a:xfrm>
-            <a:off x="804672" y="2395728"/>
-            <a:ext cx="4892040" cy="777240"/>
-          </a:xfrm>
-          <a:prstGeom prst="rect">
-            <a:avLst/>
-          </a:prstGeom>
-          <a:noFill/>
-        </p:spPr>
-        <p:txBody>
-          <a:bodyPr wrap="square" anchor="t" lIns="0" rIns="0" tIns="0" bIns="0">
-            <a:spAutoFit/>
-          </a:bodyPr>
-          <a:lstStyle/>
-          <a:p>
-            <a:pPr algn="l">
-              <a:lnSpc>
-                <a:spcPct val="105000"/>
-              </a:lnSpc>
-              <a:spcAft>
-                <a:spcPts val="0"/>
-              </a:spcAft>
-            </a:pPr>
-            <a:r>
-              <a:rPr sz="1200" b="0">
+              <a:rPr sz="1150" b="0">
                 <a:solidFill>
                   <a:srgbClr val="52514E"/>
                 </a:solidFill>
                 <a:latin typeface="Calibri"/>
               </a:rPr>
-              <a:t>An hour of leakage checking reframed our entire project — and saved us from a meaningless 100%.</a:t>
-            </a:r>
-          </a:p>
-        </p:txBody>
-      </p:sp>
-      <p:sp>
-        <p:nvSpPr>
-          <p:cNvPr id="10" name="Rounded Rectangle 9"/>
+              <a:t>precision of the 99.81%-accurate URL-only model at 1-in-10,000 prevalence</a:t>
+            </a:r>
+          </a:p>
+        </p:txBody>
+      </p:sp>
+      <p:sp>
+        <p:nvSpPr>
+          <p:cNvPr id="11" name="Rounded Rectangle 10"/>
           <p:cNvSpPr/>
           <p:nvPr/>
         </p:nvSpPr>
         <p:spPr>
           <a:xfrm>
-            <a:off x="6263640" y="1737360"/>
-            <a:ext cx="5394960" cy="1508760"/>
+            <a:off x="7818120" y="3337560"/>
+            <a:ext cx="3794760" cy="1463040"/>
           </a:xfrm>
           <a:prstGeom prst="roundRect">
             <a:avLst>
-              <a:gd name="adj" fmla="val 8000"/>
+              <a:gd name="adj" fmla="val 10000"/>
             </a:avLst>
           </a:prstGeom>
           <a:solidFill>
-            <a:srgbClr val="FEF4F1"/>
+            <a:srgbClr val="ECF4F1"/>
           </a:solidFill>
           <a:ln>
             <a:noFill/>
@@ -21592,14 +21860,56 @@
       </p:sp>
       <p:sp>
         <p:nvSpPr>
-          <p:cNvPr id="11" name="TextBox 10"/>
-          <p:cNvSpPr txBox="1"/>
-          <p:nvPr/>
-        </p:nvSpPr>
-        <p:spPr>
-          <a:xfrm>
-            <a:off x="6519672" y="1883664"/>
-            <a:ext cx="4892040" cy="548640"/>
+          <p:cNvPr id="12" name="TextBox 11"/>
+          <p:cNvSpPr txBox="1"/>
+          <p:nvPr/>
+        </p:nvSpPr>
+        <p:spPr>
+          <a:xfrm>
+            <a:off x="8019288" y="3465576"/>
+            <a:ext cx="3392424" cy="848563"/>
+          </a:xfrm>
+          <a:prstGeom prst="rect">
+            <a:avLst/>
+          </a:prstGeom>
+          <a:noFill/>
+        </p:spPr>
+        <p:txBody>
+          <a:bodyPr wrap="square" anchor="ctr" lIns="0" rIns="0" tIns="0" bIns="0">
+            <a:spAutoFit/>
+          </a:bodyPr>
+          <a:lstStyle/>
+          <a:p>
+            <a:pPr algn="l">
+              <a:lnSpc>
+                <a:spcPct val="100000"/>
+              </a:lnSpc>
+              <a:spcAft>
+                <a:spcPts val="0"/>
+              </a:spcAft>
+            </a:pPr>
+            <a:r>
+              <a:rPr sz="3200" b="1">
+                <a:solidFill>
+                  <a:srgbClr val="0E7A54"/>
+                </a:solidFill>
+                <a:latin typeface="Calibri"/>
+              </a:rPr>
+              <a:t>≤ 47%</a:t>
+            </a:r>
+          </a:p>
+        </p:txBody>
+      </p:sp>
+      <p:sp>
+        <p:nvSpPr>
+          <p:cNvPr id="13" name="TextBox 12"/>
+          <p:cNvSpPr txBox="1"/>
+          <p:nvPr/>
+        </p:nvSpPr>
+        <p:spPr>
+          <a:xfrm>
+            <a:off x="8019288" y="4233672"/>
+            <a:ext cx="3392424" cy="502920"/>
           </a:xfrm>
           <a:prstGeom prst="rect">
             <a:avLst/>
@@ -21614,84 +21924,42 @@
           <a:p>
             <a:pPr algn="l">
               <a:lnSpc>
-                <a:spcPct val="100000"/>
+                <a:spcPct val="95000"/>
               </a:lnSpc>
               <a:spcAft>
                 <a:spcPts val="0"/>
               </a:spcAft>
             </a:pPr>
             <a:r>
-              <a:rPr sz="1550" b="1">
-                <a:solidFill>
-                  <a:srgbClr val="EB6834"/>
-                </a:solidFill>
-                <a:latin typeface="Calibri"/>
-              </a:rPr>
-              <a:t>Report the clean AND the realistic regime.</a:t>
-            </a:r>
-          </a:p>
-        </p:txBody>
-      </p:sp>
-      <p:sp>
-        <p:nvSpPr>
-          <p:cNvPr id="12" name="TextBox 11"/>
-          <p:cNvSpPr txBox="1"/>
-          <p:nvPr/>
-        </p:nvSpPr>
-        <p:spPr>
-          <a:xfrm>
-            <a:off x="6519672" y="2395728"/>
-            <a:ext cx="4892040" cy="777240"/>
-          </a:xfrm>
-          <a:prstGeom prst="rect">
-            <a:avLst/>
-          </a:prstGeom>
-          <a:noFill/>
-        </p:spPr>
-        <p:txBody>
-          <a:bodyPr wrap="square" anchor="t" lIns="0" rIns="0" tIns="0" bIns="0">
-            <a:spAutoFit/>
-          </a:bodyPr>
-          <a:lstStyle/>
-          <a:p>
-            <a:pPr algn="l">
-              <a:lnSpc>
-                <a:spcPct val="105000"/>
-              </a:lnSpc>
-              <a:spcAft>
-                <a:spcPts val="0"/>
-              </a:spcAft>
-            </a:pPr>
-            <a:r>
-              <a:rPr sz="1200" b="0">
+              <a:rPr sz="1150" b="0">
                 <a:solidFill>
                   <a:srgbClr val="52514E"/>
                 </a:solidFill>
                 <a:latin typeface="Calibri"/>
               </a:rPr>
-              <a:t>Full features for comparability; URL-only for honesty. One number alone misleads.</a:t>
-            </a:r>
-          </a:p>
-        </p:txBody>
-      </p:sp>
-      <p:sp>
-        <p:nvSpPr>
-          <p:cNvPr id="13" name="Rounded Rectangle 12"/>
+              <a:t>what even the zero-FP full model can be certified to there (rule of three)</a:t>
+            </a:r>
+          </a:p>
+        </p:txBody>
+      </p:sp>
+      <p:sp>
+        <p:nvSpPr>
+          <p:cNvPr id="14" name="Rounded Rectangle 13"/>
           <p:cNvSpPr/>
           <p:nvPr/>
         </p:nvSpPr>
         <p:spPr>
           <a:xfrm>
-            <a:off x="548640" y="3429000"/>
-            <a:ext cx="5394960" cy="1508760"/>
+            <a:off x="548640" y="5806440"/>
+            <a:ext cx="11094415" cy="566928"/>
           </a:xfrm>
           <a:prstGeom prst="roundRect">
             <a:avLst>
-              <a:gd name="adj" fmla="val 8000"/>
+              <a:gd name="adj" fmla="val 16000"/>
             </a:avLst>
           </a:prstGeom>
           <a:solidFill>
-            <a:srgbClr val="F2F1F9"/>
+            <a:srgbClr val="E7F2EE"/>
           </a:solidFill>
           <a:ln>
             <a:noFill/>
@@ -21722,22 +21990,22 @@
       </p:sp>
       <p:sp>
         <p:nvSpPr>
-          <p:cNvPr id="14" name="TextBox 13"/>
-          <p:cNvSpPr txBox="1"/>
-          <p:nvPr/>
-        </p:nvSpPr>
-        <p:spPr>
-          <a:xfrm>
-            <a:off x="804672" y="3575304"/>
-            <a:ext cx="4892040" cy="548640"/>
-          </a:xfrm>
-          <a:prstGeom prst="rect">
-            <a:avLst/>
-          </a:prstGeom>
-          <a:noFill/>
-        </p:spPr>
-        <p:txBody>
-          <a:bodyPr wrap="square" anchor="t" lIns="0" rIns="0" tIns="0" bIns="0">
+          <p:cNvPr id="15" name="TextBox 14"/>
+          <p:cNvSpPr txBox="1"/>
+          <p:nvPr/>
+        </p:nvSpPr>
+        <p:spPr>
+          <a:xfrm>
+            <a:off x="804672" y="5806440"/>
+            <a:ext cx="10582351" cy="566928"/>
+          </a:xfrm>
+          <a:prstGeom prst="rect">
+            <a:avLst/>
+          </a:prstGeom>
+          <a:noFill/>
+        </p:spPr>
+        <p:txBody>
+          <a:bodyPr wrap="square" anchor="ctr" lIns="0" rIns="0" tIns="0" bIns="0">
             <a:spAutoFit/>
           </a:bodyPr>
           <a:lstStyle/>
@@ -21751,77 +22019,68 @@
               </a:spcAft>
             </a:pPr>
             <a:r>
-              <a:rPr sz="1550" b="1">
-                <a:solidFill>
-                  <a:srgbClr val="4A3AA7"/>
-                </a:solidFill>
-                <a:latin typeface="Calibri"/>
-              </a:rPr>
-              <a:t>Negative results are results.</a:t>
-            </a:r>
-          </a:p>
-        </p:txBody>
-      </p:sp>
-      <p:sp>
-        <p:nvSpPr>
-          <p:cNvPr id="15" name="TextBox 14"/>
-          <p:cNvSpPr txBox="1"/>
-          <p:nvPr/>
-        </p:nvSpPr>
-        <p:spPr>
-          <a:xfrm>
-            <a:off x="804672" y="4087368"/>
-            <a:ext cx="4892040" cy="777240"/>
-          </a:xfrm>
-          <a:prstGeom prst="rect">
-            <a:avLst/>
-          </a:prstGeom>
-          <a:noFill/>
-        </p:spPr>
-        <p:txBody>
-          <a:bodyPr wrap="square" anchor="t" lIns="0" rIns="0" tIns="0" bIns="0">
-            <a:spAutoFit/>
-          </a:bodyPr>
-          <a:lstStyle/>
-          <a:p>
-            <a:pPr algn="l">
-              <a:lnSpc>
-                <a:spcPct val="105000"/>
-              </a:lnSpc>
-              <a:spcAft>
-                <a:spcPts val="0"/>
-              </a:spcAft>
-            </a:pPr>
-            <a:r>
-              <a:rPr sz="1200" b="0">
-                <a:solidFill>
-                  <a:srgbClr val="52514E"/>
-                </a:solidFill>
-                <a:latin typeface="Calibri"/>
-              </a:rPr>
-              <a:t>Our engineered features failed and our clusters are soft — saying so is the scientific part.</a:t>
-            </a:r>
-          </a:p>
-        </p:txBody>
-      </p:sp>
-      <p:sp>
-        <p:nvSpPr>
-          <p:cNvPr id="16" name="Rounded Rectangle 15"/>
+              <a:rPr sz="1400" b="1">
+                <a:solidFill>
+                  <a:srgbClr val="0E7A54"/>
+                </a:solidFill>
+                <a:latin typeface="Calibri"/>
+              </a:rPr>
+              <a:t>Takeaway   </a:t>
+            </a:r>
+            <a:r>
+              <a:rPr sz="1400" b="0">
+                <a:solidFill>
+                  <a:srgbClr val="0B0B0B"/>
+                </a:solidFill>
+                <a:latin typeface="Calibri"/>
+              </a:rPr>
+              <a:t>Our test set is 42% phishing; real traffic is ~1 in 10,000. Benchmark precision is a property of the benchmark — deployment claims need far more legitimate-URL testing.</a:t>
+            </a:r>
+          </a:p>
+        </p:txBody>
+      </p:sp>
+    </p:spTree>
+  </p:cSld>
+  <p:clrMapOvr>
+    <a:masterClrMapping/>
+  </p:clrMapOvr>
+</p:sld>
+</file>
+
+<file path=ppt/slides/slide28.xml><?xml version="1.0" encoding="utf-8"?>
+<p:sld xmlns:a="http://schemas.openxmlformats.org/drawingml/2006/main" xmlns:p="http://schemas.openxmlformats.org/presentationml/2006/main" xmlns:r="http://schemas.openxmlformats.org/officeDocument/2006/relationships">
+  <p:cSld>
+    <p:bg>
+      <p:bgPr>
+        <a:solidFill>
+          <a:srgbClr val="FCFCFB"/>
+        </a:solidFill>
+        <a:effectLst/>
+      </p:bgPr>
+    </p:bg>
+    <p:spTree>
+      <p:nvGrpSpPr>
+        <p:cNvPr id="1" name=""/>
+        <p:cNvGrpSpPr/>
+        <p:nvPr/>
+      </p:nvGrpSpPr>
+      <p:grpSpPr/>
+      <p:sp>
+        <p:nvSpPr>
+          <p:cNvPr id="2" name="Rectangle 1"/>
           <p:cNvSpPr/>
           <p:nvPr/>
         </p:nvSpPr>
         <p:spPr>
           <a:xfrm>
-            <a:off x="6263640" y="3429000"/>
-            <a:ext cx="5394960" cy="1508760"/>
-          </a:xfrm>
-          <a:prstGeom prst="roundRect">
-            <a:avLst>
-              <a:gd name="adj" fmla="val 8000"/>
-            </a:avLst>
+            <a:off x="0" y="0"/>
+            <a:ext cx="12191695" cy="128016"/>
+          </a:xfrm>
+          <a:prstGeom prst="rect">
+            <a:avLst/>
           </a:prstGeom>
           <a:solidFill>
-            <a:srgbClr val="EEF6F3"/>
+            <a:srgbClr val="0E7A54"/>
           </a:solidFill>
           <a:ln>
             <a:noFill/>
@@ -21852,14 +22111,892 @@
       </p:sp>
       <p:sp>
         <p:nvSpPr>
+          <p:cNvPr id="3" name="TextBox 2"/>
+          <p:cNvSpPr txBox="1"/>
+          <p:nvPr/>
+        </p:nvSpPr>
+        <p:spPr>
+          <a:xfrm>
+            <a:off x="548640" y="347472"/>
+            <a:ext cx="11094415" cy="274320"/>
+          </a:xfrm>
+          <a:prstGeom prst="rect">
+            <a:avLst/>
+          </a:prstGeom>
+          <a:noFill/>
+        </p:spPr>
+        <p:txBody>
+          <a:bodyPr wrap="square" anchor="t" lIns="0" rIns="0" tIns="0" bIns="0">
+            <a:spAutoFit/>
+          </a:bodyPr>
+          <a:lstStyle/>
+          <a:p>
+            <a:pPr algn="l">
+              <a:lnSpc>
+                <a:spcPct val="100000"/>
+              </a:lnSpc>
+              <a:spcAft>
+                <a:spcPts val="0"/>
+              </a:spcAft>
+            </a:pPr>
+            <a:r>
+              <a:rPr sz="1250" b="1">
+                <a:solidFill>
+                  <a:srgbClr val="0E7A54"/>
+                </a:solidFill>
+                <a:latin typeface="Calibri"/>
+              </a:rPr>
+              <a:t>PART 4 · ERROR ANALYSIS</a:t>
+            </a:r>
+          </a:p>
+        </p:txBody>
+      </p:sp>
+      <p:sp>
+        <p:nvSpPr>
+          <p:cNvPr id="4" name="TextBox 3"/>
+          <p:cNvSpPr txBox="1"/>
+          <p:nvPr/>
+        </p:nvSpPr>
+        <p:spPr>
+          <a:xfrm>
+            <a:off x="548640" y="603504"/>
+            <a:ext cx="11094415" cy="777240"/>
+          </a:xfrm>
+          <a:prstGeom prst="rect">
+            <a:avLst/>
+          </a:prstGeom>
+          <a:noFill/>
+        </p:spPr>
+        <p:txBody>
+          <a:bodyPr wrap="square" anchor="t" lIns="0" rIns="0" tIns="0" bIns="0">
+            <a:spAutoFit/>
+          </a:bodyPr>
+          <a:lstStyle/>
+          <a:p>
+            <a:pPr algn="l">
+              <a:lnSpc>
+                <a:spcPct val="100000"/>
+              </a:lnSpc>
+              <a:spcAft>
+                <a:spcPts val="0"/>
+              </a:spcAft>
+            </a:pPr>
+            <a:r>
+              <a:rPr sz="3000" b="1">
+                <a:solidFill>
+                  <a:srgbClr val="0B0B0B"/>
+                </a:solidFill>
+                <a:latin typeface="Calibri"/>
+              </a:rPr>
+              <a:t>The 78 misses are exactly the dangerous ones</a:t>
+            </a:r>
+          </a:p>
+        </p:txBody>
+      </p:sp>
+      <p:sp>
+        <p:nvSpPr>
+          <p:cNvPr id="5" name="TextBox 4"/>
+          <p:cNvSpPr txBox="1"/>
+          <p:nvPr/>
+        </p:nvSpPr>
+        <p:spPr>
+          <a:xfrm>
+            <a:off x="548640" y="6519672"/>
+            <a:ext cx="8229600" cy="274320"/>
+          </a:xfrm>
+          <a:prstGeom prst="rect">
+            <a:avLst/>
+          </a:prstGeom>
+          <a:noFill/>
+        </p:spPr>
+        <p:txBody>
+          <a:bodyPr wrap="square" anchor="t" lIns="0" rIns="0" tIns="0" bIns="0">
+            <a:spAutoFit/>
+          </a:bodyPr>
+          <a:lstStyle/>
+          <a:p>
+            <a:pPr algn="l">
+              <a:lnSpc>
+                <a:spcPct val="100000"/>
+              </a:lnSpc>
+              <a:spcAft>
+                <a:spcPts val="0"/>
+              </a:spcAft>
+            </a:pPr>
+            <a:r>
+              <a:rPr sz="950" b="0">
+                <a:solidFill>
+                  <a:srgbClr val="898781"/>
+                </a:solidFill>
+                <a:latin typeface="Calibri"/>
+              </a:rPr>
+              <a:t>AAI-501 · Group 2 · Phishing URL Detection on PhiUSIIL</a:t>
+            </a:r>
+          </a:p>
+        </p:txBody>
+      </p:sp>
+      <p:sp>
+        <p:nvSpPr>
+          <p:cNvPr id="6" name="TextBox 5"/>
+          <p:cNvSpPr txBox="1"/>
+          <p:nvPr/>
+        </p:nvSpPr>
+        <p:spPr>
+          <a:xfrm>
+            <a:off x="10728655" y="6519672"/>
+            <a:ext cx="914400" cy="274320"/>
+          </a:xfrm>
+          <a:prstGeom prst="rect">
+            <a:avLst/>
+          </a:prstGeom>
+          <a:noFill/>
+        </p:spPr>
+        <p:txBody>
+          <a:bodyPr wrap="square" anchor="t" lIns="0" rIns="0" tIns="0" bIns="0">
+            <a:spAutoFit/>
+          </a:bodyPr>
+          <a:lstStyle/>
+          <a:p>
+            <a:pPr algn="r">
+              <a:lnSpc>
+                <a:spcPct val="100000"/>
+              </a:lnSpc>
+              <a:spcAft>
+                <a:spcPts val="0"/>
+              </a:spcAft>
+            </a:pPr>
+            <a:r>
+              <a:rPr sz="950" b="0">
+                <a:solidFill>
+                  <a:srgbClr val="898781"/>
+                </a:solidFill>
+                <a:latin typeface="Calibri"/>
+              </a:rPr>
+              <a:t>28</a:t>
+            </a:r>
+          </a:p>
+        </p:txBody>
+      </p:sp>
+      <p:graphicFrame>
+        <p:nvGraphicFramePr>
+          <p:cNvPr id="7" name="Table 6"/>
+          <p:cNvGraphicFramePr>
+            <a:graphicFrameLocks noGrp="1"/>
+          </p:cNvGraphicFramePr>
+          <p:nvPr/>
+        </p:nvGraphicFramePr>
+        <p:xfrm>
+          <a:off x="548640" y="1737360"/>
+          <a:ext cx="5760720" cy="1609344"/>
+        </p:xfrm>
+        <a:graphic>
+          <a:graphicData uri="http://schemas.openxmlformats.org/drawingml/2006/table">
+            <a:tbl>
+              <a:tblPr>
+                <a:tableStyleId>{5C22544A-7EE6-4342-B048-85BDC9FD1C3A}</a:tableStyleId>
+              </a:tblPr>
+              <a:tblGrid>
+                <a:gridCol w="2468880"/>
+                <a:gridCol w="1645920"/>
+                <a:gridCol w="1645920"/>
+              </a:tblGrid>
+              <a:tr h="402336">
+                <a:tc>
+                  <a:txBody>
+                    <a:bodyPr wrap="square"/>
+                    <a:lstStyle/>
+                    <a:p>
+                      <a:pPr algn="l"/>
+                      <a:r>
+                        <a:rPr sz="1250" b="1">
+                          <a:solidFill>
+                            <a:srgbClr val="FFFFFF"/>
+                          </a:solidFill>
+                          <a:latin typeface="Calibri"/>
+                        </a:rPr>
+                        <a:t>Median feature</a:t>
+                      </a:r>
+                    </a:p>
+                  </a:txBody>
+                  <a:tcPr marL="73152" marR="73152" marT="18288" marB="18288" anchor="ctr">
+                    <a:solidFill>
+                      <a:srgbClr val="0E7A54"/>
+                    </a:solidFill>
+                  </a:tcPr>
+                </a:tc>
+                <a:tc>
+                  <a:txBody>
+                    <a:bodyPr wrap="square"/>
+                    <a:lstStyle/>
+                    <a:p>
+                      <a:pPr algn="ctr"/>
+                      <a:r>
+                        <a:rPr sz="1250" b="1">
+                          <a:solidFill>
+                            <a:srgbClr val="FFFFFF"/>
+                          </a:solidFill>
+                          <a:latin typeface="Calibri"/>
+                        </a:rPr>
+                        <a:t>Missed phish</a:t>
+                      </a:r>
+                    </a:p>
+                  </a:txBody>
+                  <a:tcPr marL="73152" marR="73152" marT="18288" marB="18288" anchor="ctr">
+                    <a:solidFill>
+                      <a:srgbClr val="0E7A54"/>
+                    </a:solidFill>
+                  </a:tcPr>
+                </a:tc>
+                <a:tc>
+                  <a:txBody>
+                    <a:bodyPr wrap="square"/>
+                    <a:lstStyle/>
+                    <a:p>
+                      <a:pPr algn="ctr"/>
+                      <a:r>
+                        <a:rPr sz="1250" b="1">
+                          <a:solidFill>
+                            <a:srgbClr val="FFFFFF"/>
+                          </a:solidFill>
+                          <a:latin typeface="Calibri"/>
+                        </a:rPr>
+                        <a:t>Caught phish</a:t>
+                      </a:r>
+                    </a:p>
+                  </a:txBody>
+                  <a:tcPr marL="73152" marR="73152" marT="18288" marB="18288" anchor="ctr">
+                    <a:solidFill>
+                      <a:srgbClr val="0E7A54"/>
+                    </a:solidFill>
+                  </a:tcPr>
+                </a:tc>
+              </a:tr>
+              <a:tr h="402336">
+                <a:tc>
+                  <a:txBody>
+                    <a:bodyPr wrap="square"/>
+                    <a:lstStyle/>
+                    <a:p>
+                      <a:pPr algn="l"/>
+                      <a:r>
+                        <a:rPr sz="1200" b="1">
+                          <a:solidFill>
+                            <a:srgbClr val="0B0B0B"/>
+                          </a:solidFill>
+                          <a:latin typeface="Calibri"/>
+                        </a:rPr>
+                        <a:t>IsHTTPS</a:t>
+                      </a:r>
+                    </a:p>
+                  </a:txBody>
+                  <a:tcPr marL="73152" marR="73152" marT="18288" marB="18288" anchor="ctr">
+                    <a:solidFill>
+                      <a:srgbClr val="FCFCFB"/>
+                    </a:solidFill>
+                  </a:tcPr>
+                </a:tc>
+                <a:tc>
+                  <a:txBody>
+                    <a:bodyPr wrap="square"/>
+                    <a:lstStyle/>
+                    <a:p>
+                      <a:pPr algn="ctr"/>
+                      <a:r>
+                        <a:rPr sz="1200" b="0">
+                          <a:solidFill>
+                            <a:srgbClr val="0B0B0B"/>
+                          </a:solidFill>
+                          <a:latin typeface="Calibri"/>
+                        </a:rPr>
+                        <a:t>1</a:t>
+                      </a:r>
+                    </a:p>
+                  </a:txBody>
+                  <a:tcPr marL="73152" marR="73152" marT="18288" marB="18288" anchor="ctr">
+                    <a:solidFill>
+                      <a:srgbClr val="FCFCFB"/>
+                    </a:solidFill>
+                  </a:tcPr>
+                </a:tc>
+                <a:tc>
+                  <a:txBody>
+                    <a:bodyPr wrap="square"/>
+                    <a:lstStyle/>
+                    <a:p>
+                      <a:pPr algn="ctr"/>
+                      <a:r>
+                        <a:rPr sz="1200" b="0">
+                          <a:solidFill>
+                            <a:srgbClr val="0B0B0B"/>
+                          </a:solidFill>
+                          <a:latin typeface="Calibri"/>
+                        </a:rPr>
+                        <a:t>0</a:t>
+                      </a:r>
+                    </a:p>
+                  </a:txBody>
+                  <a:tcPr marL="73152" marR="73152" marT="18288" marB="18288" anchor="ctr">
+                    <a:solidFill>
+                      <a:srgbClr val="FCFCFB"/>
+                    </a:solidFill>
+                  </a:tcPr>
+                </a:tc>
+              </a:tr>
+              <a:tr h="402336">
+                <a:tc>
+                  <a:txBody>
+                    <a:bodyPr wrap="square"/>
+                    <a:lstStyle/>
+                    <a:p>
+                      <a:pPr algn="l"/>
+                      <a:r>
+                        <a:rPr sz="1200" b="1">
+                          <a:solidFill>
+                            <a:srgbClr val="0B0B0B"/>
+                          </a:solidFill>
+                          <a:latin typeface="Calibri"/>
+                        </a:rPr>
+                        <a:t>TLDLegitimateProb</a:t>
+                      </a:r>
+                    </a:p>
+                  </a:txBody>
+                  <a:tcPr marL="73152" marR="73152" marT="18288" marB="18288" anchor="ctr">
+                    <a:solidFill>
+                      <a:srgbClr val="F4F3F0"/>
+                    </a:solidFill>
+                  </a:tcPr>
+                </a:tc>
+                <a:tc>
+                  <a:txBody>
+                    <a:bodyPr wrap="square"/>
+                    <a:lstStyle/>
+                    <a:p>
+                      <a:pPr algn="ctr"/>
+                      <a:r>
+                        <a:rPr sz="1200" b="0">
+                          <a:solidFill>
+                            <a:srgbClr val="0B0B0B"/>
+                          </a:solidFill>
+                          <a:latin typeface="Calibri"/>
+                        </a:rPr>
+                        <a:t>0.523</a:t>
+                      </a:r>
+                    </a:p>
+                  </a:txBody>
+                  <a:tcPr marL="73152" marR="73152" marT="18288" marB="18288" anchor="ctr">
+                    <a:solidFill>
+                      <a:srgbClr val="F4F3F0"/>
+                    </a:solidFill>
+                  </a:tcPr>
+                </a:tc>
+                <a:tc>
+                  <a:txBody>
+                    <a:bodyPr wrap="square"/>
+                    <a:lstStyle/>
+                    <a:p>
+                      <a:pPr algn="ctr"/>
+                      <a:r>
+                        <a:rPr sz="1200" b="0">
+                          <a:solidFill>
+                            <a:srgbClr val="0B0B0B"/>
+                          </a:solidFill>
+                          <a:latin typeface="Calibri"/>
+                        </a:rPr>
+                        <a:t>0.018</a:t>
+                      </a:r>
+                    </a:p>
+                  </a:txBody>
+                  <a:tcPr marL="73152" marR="73152" marT="18288" marB="18288" anchor="ctr">
+                    <a:solidFill>
+                      <a:srgbClr val="F4F3F0"/>
+                    </a:solidFill>
+                  </a:tcPr>
+                </a:tc>
+              </a:tr>
+              <a:tr h="402336">
+                <a:tc>
+                  <a:txBody>
+                    <a:bodyPr wrap="square"/>
+                    <a:lstStyle/>
+                    <a:p>
+                      <a:pPr algn="l"/>
+                      <a:r>
+                        <a:rPr sz="1200" b="1">
+                          <a:solidFill>
+                            <a:srgbClr val="0B0B0B"/>
+                          </a:solidFill>
+                          <a:latin typeface="Calibri"/>
+                        </a:rPr>
+                        <a:t>URLLength</a:t>
+                      </a:r>
+                    </a:p>
+                  </a:txBody>
+                  <a:tcPr marL="73152" marR="73152" marT="18288" marB="18288" anchor="ctr">
+                    <a:solidFill>
+                      <a:srgbClr val="FCFCFB"/>
+                    </a:solidFill>
+                  </a:tcPr>
+                </a:tc>
+                <a:tc>
+                  <a:txBody>
+                    <a:bodyPr wrap="square"/>
+                    <a:lstStyle/>
+                    <a:p>
+                      <a:pPr algn="ctr"/>
+                      <a:r>
+                        <a:rPr sz="1200" b="0">
+                          <a:solidFill>
+                            <a:srgbClr val="0B0B0B"/>
+                          </a:solidFill>
+                          <a:latin typeface="Calibri"/>
+                        </a:rPr>
+                        <a:t>29</a:t>
+                      </a:r>
+                    </a:p>
+                  </a:txBody>
+                  <a:tcPr marL="73152" marR="73152" marT="18288" marB="18288" anchor="ctr">
+                    <a:solidFill>
+                      <a:srgbClr val="FCFCFB"/>
+                    </a:solidFill>
+                  </a:tcPr>
+                </a:tc>
+                <a:tc>
+                  <a:txBody>
+                    <a:bodyPr wrap="square"/>
+                    <a:lstStyle/>
+                    <a:p>
+                      <a:pPr algn="ctr"/>
+                      <a:r>
+                        <a:rPr sz="1200" b="0">
+                          <a:solidFill>
+                            <a:srgbClr val="0B0B0B"/>
+                          </a:solidFill>
+                          <a:latin typeface="Calibri"/>
+                        </a:rPr>
+                        <a:t>33</a:t>
+                      </a:r>
+                    </a:p>
+                  </a:txBody>
+                  <a:tcPr marL="73152" marR="73152" marT="18288" marB="18288" anchor="ctr">
+                    <a:solidFill>
+                      <a:srgbClr val="FCFCFB"/>
+                    </a:solidFill>
+                  </a:tcPr>
+                </a:tc>
+              </a:tr>
+            </a:tbl>
+          </a:graphicData>
+        </a:graphic>
+      </p:graphicFrame>
+      <p:sp>
+        <p:nvSpPr>
+          <p:cNvPr id="8" name="TextBox 7"/>
+          <p:cNvSpPr txBox="1"/>
+          <p:nvPr/>
+        </p:nvSpPr>
+        <p:spPr>
+          <a:xfrm>
+            <a:off x="548640" y="3657600"/>
+            <a:ext cx="5760720" cy="1737360"/>
+          </a:xfrm>
+          <a:prstGeom prst="rect">
+            <a:avLst/>
+          </a:prstGeom>
+          <a:noFill/>
+        </p:spPr>
+        <p:txBody>
+          <a:bodyPr wrap="square" anchor="t" lIns="0" rIns="0" tIns="0" bIns="0">
+            <a:spAutoFit/>
+          </a:bodyPr>
+          <a:lstStyle/>
+          <a:p>
+            <a:pPr algn="l">
+              <a:lnSpc>
+                <a:spcPct val="112000"/>
+              </a:lnSpc>
+              <a:spcAft>
+                <a:spcPts val="0"/>
+              </a:spcAft>
+            </a:pPr>
+            <a:r>
+              <a:rPr sz="1350" b="1">
+                <a:solidFill>
+                  <a:srgbClr val="0B0B0B"/>
+                </a:solidFill>
+                <a:latin typeface="Calibri"/>
+              </a:rPr>
+              <a:t>Pattern: </a:t>
+            </a:r>
+            <a:r>
+              <a:rPr sz="1350" b="0">
+                <a:solidFill>
+                  <a:srgbClr val="52514E"/>
+                </a:solidFill>
+                <a:latin typeface="Calibri"/>
+              </a:rPr>
+              <a:t>the model catches sloppy phish and misses the well-crafted ones — HTTPS, reputable TLDs, short clean strings.</a:t>
+            </a:r>
+          </a:p>
+        </p:txBody>
+      </p:sp>
+      <p:sp>
+        <p:nvSpPr>
+          <p:cNvPr id="9" name="Rounded Rectangle 8"/>
+          <p:cNvSpPr/>
+          <p:nvPr/>
+        </p:nvSpPr>
+        <p:spPr>
+          <a:xfrm>
+            <a:off x="6766560" y="1783080"/>
+            <a:ext cx="4846320" cy="841248"/>
+          </a:xfrm>
+          <a:prstGeom prst="roundRect">
+            <a:avLst>
+              <a:gd name="adj" fmla="val 12000"/>
+            </a:avLst>
+          </a:prstGeom>
+          <a:solidFill>
+            <a:srgbClr val="FDF0F0"/>
+          </a:solidFill>
+          <a:ln>
+            <a:noFill/>
+          </a:ln>
+          <a:effectLst/>
+        </p:spPr>
+        <p:style>
+          <a:lnRef idx="1">
+            <a:schemeClr val="accent1"/>
+          </a:lnRef>
+          <a:fillRef idx="3">
+            <a:schemeClr val="accent1"/>
+          </a:fillRef>
+          <a:effectRef idx="2">
+            <a:schemeClr val="accent1"/>
+          </a:effectRef>
+          <a:fontRef idx="minor">
+            <a:schemeClr val="lt1"/>
+          </a:fontRef>
+        </p:style>
+        <p:txBody>
+          <a:bodyPr rtlCol="0" anchor="ctr"/>
+          <a:lstStyle/>
+          <a:p>
+            <a:pPr algn="ctr"/>
+          </a:p>
+        </p:txBody>
+      </p:sp>
+      <p:sp>
+        <p:nvSpPr>
+          <p:cNvPr id="10" name="TextBox 9"/>
+          <p:cNvSpPr txBox="1"/>
+          <p:nvPr/>
+        </p:nvSpPr>
+        <p:spPr>
+          <a:xfrm>
+            <a:off x="6995160" y="1892807"/>
+            <a:ext cx="4480560" cy="365760"/>
+          </a:xfrm>
+          <a:prstGeom prst="rect">
+            <a:avLst/>
+          </a:prstGeom>
+          <a:noFill/>
+        </p:spPr>
+        <p:txBody>
+          <a:bodyPr wrap="square" anchor="t" lIns="0" rIns="0" tIns="0" bIns="0">
+            <a:spAutoFit/>
+          </a:bodyPr>
+          <a:lstStyle/>
+          <a:p>
+            <a:pPr algn="l">
+              <a:lnSpc>
+                <a:spcPct val="100000"/>
+              </a:lnSpc>
+              <a:spcAft>
+                <a:spcPts val="0"/>
+              </a:spcAft>
+            </a:pPr>
+            <a:r>
+              <a:rPr sz="1400" b="1">
+                <a:solidFill>
+                  <a:srgbClr val="0B0B0B"/>
+                </a:solidFill>
+                <a:latin typeface="Consolas"/>
+              </a:rPr>
+              <a:t>support-lcioud-maps.info</a:t>
+            </a:r>
+          </a:p>
+        </p:txBody>
+      </p:sp>
+      <p:sp>
+        <p:nvSpPr>
+          <p:cNvPr id="11" name="TextBox 10"/>
+          <p:cNvSpPr txBox="1"/>
+          <p:nvPr/>
+        </p:nvSpPr>
+        <p:spPr>
+          <a:xfrm>
+            <a:off x="6995160" y="2258568"/>
+            <a:ext cx="4480560" cy="320040"/>
+          </a:xfrm>
+          <a:prstGeom prst="rect">
+            <a:avLst/>
+          </a:prstGeom>
+          <a:noFill/>
+        </p:spPr>
+        <p:txBody>
+          <a:bodyPr wrap="square" anchor="t" lIns="0" rIns="0" tIns="0" bIns="0">
+            <a:spAutoFit/>
+          </a:bodyPr>
+          <a:lstStyle/>
+          <a:p>
+            <a:pPr algn="l">
+              <a:lnSpc>
+                <a:spcPct val="100000"/>
+              </a:lnSpc>
+              <a:spcAft>
+                <a:spcPts val="0"/>
+              </a:spcAft>
+            </a:pPr>
+            <a:r>
+              <a:rPr sz="1100" b="0">
+                <a:solidFill>
+                  <a:srgbClr val="E34948"/>
+                </a:solidFill>
+                <a:latin typeface="Calibri"/>
+              </a:rPr>
+              <a:t>iCloud, l/i swapped</a:t>
+            </a:r>
+          </a:p>
+        </p:txBody>
+      </p:sp>
+      <p:sp>
+        <p:nvSpPr>
+          <p:cNvPr id="12" name="Rounded Rectangle 11"/>
+          <p:cNvSpPr/>
+          <p:nvPr/>
+        </p:nvSpPr>
+        <p:spPr>
+          <a:xfrm>
+            <a:off x="6766560" y="2752344"/>
+            <a:ext cx="4846320" cy="841248"/>
+          </a:xfrm>
+          <a:prstGeom prst="roundRect">
+            <a:avLst>
+              <a:gd name="adj" fmla="val 12000"/>
+            </a:avLst>
+          </a:prstGeom>
+          <a:solidFill>
+            <a:srgbClr val="FDF0F0"/>
+          </a:solidFill>
+          <a:ln>
+            <a:noFill/>
+          </a:ln>
+          <a:effectLst/>
+        </p:spPr>
+        <p:style>
+          <a:lnRef idx="1">
+            <a:schemeClr val="accent1"/>
+          </a:lnRef>
+          <a:fillRef idx="3">
+            <a:schemeClr val="accent1"/>
+          </a:fillRef>
+          <a:effectRef idx="2">
+            <a:schemeClr val="accent1"/>
+          </a:effectRef>
+          <a:fontRef idx="minor">
+            <a:schemeClr val="lt1"/>
+          </a:fontRef>
+        </p:style>
+        <p:txBody>
+          <a:bodyPr rtlCol="0" anchor="ctr"/>
+          <a:lstStyle/>
+          <a:p>
+            <a:pPr algn="ctr"/>
+          </a:p>
+        </p:txBody>
+      </p:sp>
+      <p:sp>
+        <p:nvSpPr>
+          <p:cNvPr id="13" name="TextBox 12"/>
+          <p:cNvSpPr txBox="1"/>
+          <p:nvPr/>
+        </p:nvSpPr>
+        <p:spPr>
+          <a:xfrm>
+            <a:off x="6995160" y="2862072"/>
+            <a:ext cx="4480560" cy="365760"/>
+          </a:xfrm>
+          <a:prstGeom prst="rect">
+            <a:avLst/>
+          </a:prstGeom>
+          <a:noFill/>
+        </p:spPr>
+        <p:txBody>
+          <a:bodyPr wrap="square" anchor="t" lIns="0" rIns="0" tIns="0" bIns="0">
+            <a:spAutoFit/>
+          </a:bodyPr>
+          <a:lstStyle/>
+          <a:p>
+            <a:pPr algn="l">
+              <a:lnSpc>
+                <a:spcPct val="100000"/>
+              </a:lnSpc>
+              <a:spcAft>
+                <a:spcPts val="0"/>
+              </a:spcAft>
+            </a:pPr>
+            <a:r>
+              <a:rPr sz="1400" b="1">
+                <a:solidFill>
+                  <a:srgbClr val="0B0B0B"/>
+                </a:solidFill>
+                <a:latin typeface="Consolas"/>
+              </a:rPr>
+              <a:t>coinbesaprime-logi.com</a:t>
+            </a:r>
+          </a:p>
+        </p:txBody>
+      </p:sp>
+      <p:sp>
+        <p:nvSpPr>
+          <p:cNvPr id="14" name="TextBox 13"/>
+          <p:cNvSpPr txBox="1"/>
+          <p:nvPr/>
+        </p:nvSpPr>
+        <p:spPr>
+          <a:xfrm>
+            <a:off x="6995160" y="3227832"/>
+            <a:ext cx="4480560" cy="320040"/>
+          </a:xfrm>
+          <a:prstGeom prst="rect">
+            <a:avLst/>
+          </a:prstGeom>
+          <a:noFill/>
+        </p:spPr>
+        <p:txBody>
+          <a:bodyPr wrap="square" anchor="t" lIns="0" rIns="0" tIns="0" bIns="0">
+            <a:spAutoFit/>
+          </a:bodyPr>
+          <a:lstStyle/>
+          <a:p>
+            <a:pPr algn="l">
+              <a:lnSpc>
+                <a:spcPct val="100000"/>
+              </a:lnSpc>
+              <a:spcAft>
+                <a:spcPts val="0"/>
+              </a:spcAft>
+            </a:pPr>
+            <a:r>
+              <a:rPr sz="1100" b="0">
+                <a:solidFill>
+                  <a:srgbClr val="E34948"/>
+                </a:solidFill>
+                <a:latin typeface="Calibri"/>
+              </a:rPr>
+              <a:t>Coinbase, compounded</a:t>
+            </a:r>
+          </a:p>
+        </p:txBody>
+      </p:sp>
+      <p:sp>
+        <p:nvSpPr>
+          <p:cNvPr id="15" name="Rounded Rectangle 14"/>
+          <p:cNvSpPr/>
+          <p:nvPr/>
+        </p:nvSpPr>
+        <p:spPr>
+          <a:xfrm>
+            <a:off x="6766560" y="3721608"/>
+            <a:ext cx="4846320" cy="841248"/>
+          </a:xfrm>
+          <a:prstGeom prst="roundRect">
+            <a:avLst>
+              <a:gd name="adj" fmla="val 12000"/>
+            </a:avLst>
+          </a:prstGeom>
+          <a:solidFill>
+            <a:srgbClr val="FDF0F0"/>
+          </a:solidFill>
+          <a:ln>
+            <a:noFill/>
+          </a:ln>
+          <a:effectLst/>
+        </p:spPr>
+        <p:style>
+          <a:lnRef idx="1">
+            <a:schemeClr val="accent1"/>
+          </a:lnRef>
+          <a:fillRef idx="3">
+            <a:schemeClr val="accent1"/>
+          </a:fillRef>
+          <a:effectRef idx="2">
+            <a:schemeClr val="accent1"/>
+          </a:effectRef>
+          <a:fontRef idx="minor">
+            <a:schemeClr val="lt1"/>
+          </a:fontRef>
+        </p:style>
+        <p:txBody>
+          <a:bodyPr rtlCol="0" anchor="ctr"/>
+          <a:lstStyle/>
+          <a:p>
+            <a:pPr algn="ctr"/>
+          </a:p>
+        </p:txBody>
+      </p:sp>
+      <p:sp>
+        <p:nvSpPr>
+          <p:cNvPr id="16" name="TextBox 15"/>
+          <p:cNvSpPr txBox="1"/>
+          <p:nvPr/>
+        </p:nvSpPr>
+        <p:spPr>
+          <a:xfrm>
+            <a:off x="6995160" y="3831336"/>
+            <a:ext cx="4480560" cy="365760"/>
+          </a:xfrm>
+          <a:prstGeom prst="rect">
+            <a:avLst/>
+          </a:prstGeom>
+          <a:noFill/>
+        </p:spPr>
+        <p:txBody>
+          <a:bodyPr wrap="square" anchor="t" lIns="0" rIns="0" tIns="0" bIns="0">
+            <a:spAutoFit/>
+          </a:bodyPr>
+          <a:lstStyle/>
+          <a:p>
+            <a:pPr algn="l">
+              <a:lnSpc>
+                <a:spcPct val="100000"/>
+              </a:lnSpc>
+              <a:spcAft>
+                <a:spcPts val="0"/>
+              </a:spcAft>
+            </a:pPr>
+            <a:r>
+              <a:rPr sz="1400" b="1">
+                <a:solidFill>
+                  <a:srgbClr val="0B0B0B"/>
+                </a:solidFill>
+                <a:latin typeface="Consolas"/>
+              </a:rPr>
+              <a:t>bendigo-verification.com</a:t>
+            </a:r>
+          </a:p>
+        </p:txBody>
+      </p:sp>
+      <p:sp>
+        <p:nvSpPr>
           <p:cNvPr id="17" name="TextBox 16"/>
           <p:cNvSpPr txBox="1"/>
           <p:nvPr/>
         </p:nvSpPr>
         <p:spPr>
           <a:xfrm>
-            <a:off x="6519672" y="3575304"/>
-            <a:ext cx="4892040" cy="548640"/>
+            <a:off x="6995160" y="4197096"/>
+            <a:ext cx="4480560" cy="320040"/>
           </a:xfrm>
           <a:prstGeom prst="rect">
             <a:avLst/>
@@ -21881,13 +23018,887 @@
               </a:spcAft>
             </a:pPr>
             <a:r>
-              <a:rPr sz="1550" b="1">
+              <a:rPr sz="1100" b="0">
+                <a:solidFill>
+                  <a:srgbClr val="E34948"/>
+                </a:solidFill>
+                <a:latin typeface="Calibri"/>
+              </a:rPr>
+              <a:t>a bank + a calming word</a:t>
+            </a:r>
+          </a:p>
+        </p:txBody>
+      </p:sp>
+      <p:sp>
+        <p:nvSpPr>
+          <p:cNvPr id="18" name="TextBox 17"/>
+          <p:cNvSpPr txBox="1"/>
+          <p:nvPr/>
+        </p:nvSpPr>
+        <p:spPr>
+          <a:xfrm>
+            <a:off x="6766560" y="4736592"/>
+            <a:ext cx="4846320" cy="914400"/>
+          </a:xfrm>
+          <a:prstGeom prst="rect">
+            <a:avLst/>
+          </a:prstGeom>
+          <a:noFill/>
+        </p:spPr>
+        <p:txBody>
+          <a:bodyPr wrap="square" anchor="t" lIns="0" rIns="0" tIns="0" bIns="0">
+            <a:spAutoFit/>
+          </a:bodyPr>
+          <a:lstStyle/>
+          <a:p>
+            <a:pPr algn="l">
+              <a:lnSpc>
+                <a:spcPct val="110000"/>
+              </a:lnSpc>
+              <a:spcAft>
+                <a:spcPts val="200"/>
+              </a:spcAft>
+            </a:pPr>
+            <a:r>
+              <a:rPr sz="1200" b="1">
+                <a:solidFill>
+                  <a:srgbClr val="0B0B0B"/>
+                </a:solidFill>
+                <a:latin typeface="Calibri"/>
+              </a:rPr>
+              <a:t>Why brand_distance still failed: </a:t>
+            </a:r>
+          </a:p>
+          <a:p>
+            <a:pPr algn="l">
+              <a:lnSpc>
+                <a:spcPct val="110000"/>
+              </a:lnSpc>
+              <a:spcAft>
+                <a:spcPts val="200"/>
+              </a:spcAft>
+            </a:pPr>
+            <a:r>
+              <a:rPr sz="1200" b="0">
+                <a:solidFill>
+                  <a:srgbClr val="52514E"/>
+                </a:solidFill>
+                <a:latin typeface="Calibri"/>
+              </a:rPr>
+              <a:t>whole-string edit distance can't see “coinbase” inside a compound domain. Token-level matching = future work.</a:t>
+            </a:r>
+          </a:p>
+        </p:txBody>
+      </p:sp>
+      <p:sp>
+        <p:nvSpPr>
+          <p:cNvPr id="19" name="Rounded Rectangle 18"/>
+          <p:cNvSpPr/>
+          <p:nvPr/>
+        </p:nvSpPr>
+        <p:spPr>
+          <a:xfrm>
+            <a:off x="548640" y="5897880"/>
+            <a:ext cx="11094415" cy="566928"/>
+          </a:xfrm>
+          <a:prstGeom prst="roundRect">
+            <a:avLst>
+              <a:gd name="adj" fmla="val 16000"/>
+            </a:avLst>
+          </a:prstGeom>
+          <a:solidFill>
+            <a:srgbClr val="E7F2EE"/>
+          </a:solidFill>
+          <a:ln>
+            <a:noFill/>
+          </a:ln>
+          <a:effectLst/>
+        </p:spPr>
+        <p:style>
+          <a:lnRef idx="1">
+            <a:schemeClr val="accent1"/>
+          </a:lnRef>
+          <a:fillRef idx="3">
+            <a:schemeClr val="accent1"/>
+          </a:fillRef>
+          <a:effectRef idx="2">
+            <a:schemeClr val="accent1"/>
+          </a:effectRef>
+          <a:fontRef idx="minor">
+            <a:schemeClr val="lt1"/>
+          </a:fontRef>
+        </p:style>
+        <p:txBody>
+          <a:bodyPr rtlCol="0" anchor="ctr"/>
+          <a:lstStyle/>
+          <a:p>
+            <a:pPr algn="ctr"/>
+          </a:p>
+        </p:txBody>
+      </p:sp>
+      <p:sp>
+        <p:nvSpPr>
+          <p:cNvPr id="20" name="TextBox 19"/>
+          <p:cNvSpPr txBox="1"/>
+          <p:nvPr/>
+        </p:nvSpPr>
+        <p:spPr>
+          <a:xfrm>
+            <a:off x="804672" y="5897880"/>
+            <a:ext cx="10582351" cy="566928"/>
+          </a:xfrm>
+          <a:prstGeom prst="rect">
+            <a:avLst/>
+          </a:prstGeom>
+          <a:noFill/>
+        </p:spPr>
+        <p:txBody>
+          <a:bodyPr wrap="square" anchor="ctr" lIns="0" rIns="0" tIns="0" bIns="0">
+            <a:spAutoFit/>
+          </a:bodyPr>
+          <a:lstStyle/>
+          <a:p>
+            <a:pPr algn="l">
+              <a:lnSpc>
+                <a:spcPct val="100000"/>
+              </a:lnSpc>
+              <a:spcAft>
+                <a:spcPts val="0"/>
+              </a:spcAft>
+            </a:pPr>
+            <a:r>
+              <a:rPr sz="1400" b="1">
                 <a:solidFill>
                   <a:srgbClr val="0E7A54"/>
                 </a:solidFill>
                 <a:latin typeface="Calibri"/>
               </a:rPr>
-              <a:t>When metrics saturate, decisions move.</a:t>
+              <a:t>Takeaway   </a:t>
+            </a:r>
+            <a:r>
+              <a:rPr sz="1400" b="0">
+                <a:solidFill>
+                  <a:srgbClr val="0B0B0B"/>
+                </a:solidFill>
+                <a:latin typeface="Calibri"/>
+              </a:rPr>
+              <a:t>The residual errors aren't random — they're the crafted brand impersonations, the ones that actually fool people.</a:t>
+            </a:r>
+          </a:p>
+        </p:txBody>
+      </p:sp>
+    </p:spTree>
+  </p:cSld>
+  <p:clrMapOvr>
+    <a:masterClrMapping/>
+  </p:clrMapOvr>
+</p:sld>
+</file>
+
+<file path=ppt/slides/slide29.xml><?xml version="1.0" encoding="utf-8"?>
+<p:sld xmlns:a="http://schemas.openxmlformats.org/drawingml/2006/main" xmlns:p="http://schemas.openxmlformats.org/presentationml/2006/main" xmlns:r="http://schemas.openxmlformats.org/officeDocument/2006/relationships">
+  <p:cSld>
+    <p:bg>
+      <p:bgPr>
+        <a:solidFill>
+          <a:srgbClr val="FCFCFB"/>
+        </a:solidFill>
+        <a:effectLst/>
+      </p:bgPr>
+    </p:bg>
+    <p:spTree>
+      <p:nvGrpSpPr>
+        <p:cNvPr id="1" name=""/>
+        <p:cNvGrpSpPr/>
+        <p:nvPr/>
+      </p:nvGrpSpPr>
+      <p:grpSpPr/>
+      <p:sp>
+        <p:nvSpPr>
+          <p:cNvPr id="2" name="Rectangle 1"/>
+          <p:cNvSpPr/>
+          <p:nvPr/>
+        </p:nvSpPr>
+        <p:spPr>
+          <a:xfrm>
+            <a:off x="0" y="0"/>
+            <a:ext cx="12191695" cy="128016"/>
+          </a:xfrm>
+          <a:prstGeom prst="rect">
+            <a:avLst/>
+          </a:prstGeom>
+          <a:solidFill>
+            <a:srgbClr val="0E7A54"/>
+          </a:solidFill>
+          <a:ln>
+            <a:noFill/>
+          </a:ln>
+          <a:effectLst/>
+        </p:spPr>
+        <p:style>
+          <a:lnRef idx="1">
+            <a:schemeClr val="accent1"/>
+          </a:lnRef>
+          <a:fillRef idx="3">
+            <a:schemeClr val="accent1"/>
+          </a:fillRef>
+          <a:effectRef idx="2">
+            <a:schemeClr val="accent1"/>
+          </a:effectRef>
+          <a:fontRef idx="minor">
+            <a:schemeClr val="lt1"/>
+          </a:fontRef>
+        </p:style>
+        <p:txBody>
+          <a:bodyPr rtlCol="0" anchor="ctr"/>
+          <a:lstStyle/>
+          <a:p>
+            <a:pPr algn="ctr"/>
+          </a:p>
+        </p:txBody>
+      </p:sp>
+      <p:sp>
+        <p:nvSpPr>
+          <p:cNvPr id="3" name="TextBox 2"/>
+          <p:cNvSpPr txBox="1"/>
+          <p:nvPr/>
+        </p:nvSpPr>
+        <p:spPr>
+          <a:xfrm>
+            <a:off x="548640" y="347472"/>
+            <a:ext cx="11094415" cy="274320"/>
+          </a:xfrm>
+          <a:prstGeom prst="rect">
+            <a:avLst/>
+          </a:prstGeom>
+          <a:noFill/>
+        </p:spPr>
+        <p:txBody>
+          <a:bodyPr wrap="square" anchor="t" lIns="0" rIns="0" tIns="0" bIns="0">
+            <a:spAutoFit/>
+          </a:bodyPr>
+          <a:lstStyle/>
+          <a:p>
+            <a:pPr algn="l">
+              <a:lnSpc>
+                <a:spcPct val="100000"/>
+              </a:lnSpc>
+              <a:spcAft>
+                <a:spcPts val="0"/>
+              </a:spcAft>
+            </a:pPr>
+            <a:r>
+              <a:rPr sz="1250" b="1">
+                <a:solidFill>
+                  <a:srgbClr val="0E7A54"/>
+                </a:solidFill>
+                <a:latin typeface="Calibri"/>
+              </a:rPr>
+              <a:t>PART 4 · THE STRESS TEST</a:t>
+            </a:r>
+          </a:p>
+        </p:txBody>
+      </p:sp>
+      <p:sp>
+        <p:nvSpPr>
+          <p:cNvPr id="4" name="TextBox 3"/>
+          <p:cNvSpPr txBox="1"/>
+          <p:nvPr/>
+        </p:nvSpPr>
+        <p:spPr>
+          <a:xfrm>
+            <a:off x="548640" y="603504"/>
+            <a:ext cx="11094415" cy="777240"/>
+          </a:xfrm>
+          <a:prstGeom prst="rect">
+            <a:avLst/>
+          </a:prstGeom>
+          <a:noFill/>
+        </p:spPr>
+        <p:txBody>
+          <a:bodyPr wrap="square" anchor="t" lIns="0" rIns="0" tIns="0" bIns="0">
+            <a:spAutoFit/>
+          </a:bodyPr>
+          <a:lstStyle/>
+          <a:p>
+            <a:pPr algn="l">
+              <a:lnSpc>
+                <a:spcPct val="100000"/>
+              </a:lnSpc>
+              <a:spcAft>
+                <a:spcPts val="0"/>
+              </a:spcAft>
+            </a:pPr>
+            <a:r>
+              <a:rPr sz="3000" b="1">
+                <a:solidFill>
+                  <a:srgbClr val="0B0B0B"/>
+                </a:solidFill>
+                <a:latin typeface="Calibri"/>
+              </a:rPr>
+              <a:t>Trained on PhiUSIIL, tested on someone else's data</a:t>
+            </a:r>
+          </a:p>
+        </p:txBody>
+      </p:sp>
+      <p:sp>
+        <p:nvSpPr>
+          <p:cNvPr id="5" name="TextBox 4"/>
+          <p:cNvSpPr txBox="1"/>
+          <p:nvPr/>
+        </p:nvSpPr>
+        <p:spPr>
+          <a:xfrm>
+            <a:off x="548640" y="6519672"/>
+            <a:ext cx="8229600" cy="274320"/>
+          </a:xfrm>
+          <a:prstGeom prst="rect">
+            <a:avLst/>
+          </a:prstGeom>
+          <a:noFill/>
+        </p:spPr>
+        <p:txBody>
+          <a:bodyPr wrap="square" anchor="t" lIns="0" rIns="0" tIns="0" bIns="0">
+            <a:spAutoFit/>
+          </a:bodyPr>
+          <a:lstStyle/>
+          <a:p>
+            <a:pPr algn="l">
+              <a:lnSpc>
+                <a:spcPct val="100000"/>
+              </a:lnSpc>
+              <a:spcAft>
+                <a:spcPts val="0"/>
+              </a:spcAft>
+            </a:pPr>
+            <a:r>
+              <a:rPr sz="950" b="0">
+                <a:solidFill>
+                  <a:srgbClr val="898781"/>
+                </a:solidFill>
+                <a:latin typeface="Calibri"/>
+              </a:rPr>
+              <a:t>AAI-501 · Group 2 · Phishing URL Detection on PhiUSIIL</a:t>
+            </a:r>
+          </a:p>
+        </p:txBody>
+      </p:sp>
+      <p:sp>
+        <p:nvSpPr>
+          <p:cNvPr id="6" name="TextBox 5"/>
+          <p:cNvSpPr txBox="1"/>
+          <p:nvPr/>
+        </p:nvSpPr>
+        <p:spPr>
+          <a:xfrm>
+            <a:off x="10728655" y="6519672"/>
+            <a:ext cx="914400" cy="274320"/>
+          </a:xfrm>
+          <a:prstGeom prst="rect">
+            <a:avLst/>
+          </a:prstGeom>
+          <a:noFill/>
+        </p:spPr>
+        <p:txBody>
+          <a:bodyPr wrap="square" anchor="t" lIns="0" rIns="0" tIns="0" bIns="0">
+            <a:spAutoFit/>
+          </a:bodyPr>
+          <a:lstStyle/>
+          <a:p>
+            <a:pPr algn="r">
+              <a:lnSpc>
+                <a:spcPct val="100000"/>
+              </a:lnSpc>
+              <a:spcAft>
+                <a:spcPts val="0"/>
+              </a:spcAft>
+            </a:pPr>
+            <a:r>
+              <a:rPr sz="950" b="0">
+                <a:solidFill>
+                  <a:srgbClr val="898781"/>
+                </a:solidFill>
+                <a:latin typeface="Calibri"/>
+              </a:rPr>
+              <a:t>29</a:t>
+            </a:r>
+          </a:p>
+        </p:txBody>
+      </p:sp>
+      <p:sp>
+        <p:nvSpPr>
+          <p:cNvPr id="7" name="Rounded Rectangle 6"/>
+          <p:cNvSpPr/>
+          <p:nvPr/>
+        </p:nvSpPr>
+        <p:spPr>
+          <a:xfrm>
+            <a:off x="548640" y="1691640"/>
+            <a:ext cx="5486400" cy="1600200"/>
+          </a:xfrm>
+          <a:prstGeom prst="roundRect">
+            <a:avLst>
+              <a:gd name="adj" fmla="val 10000"/>
+            </a:avLst>
+          </a:prstGeom>
+          <a:solidFill>
+            <a:srgbClr val="ECF4F1"/>
+          </a:solidFill>
+          <a:ln>
+            <a:noFill/>
+          </a:ln>
+          <a:effectLst/>
+        </p:spPr>
+        <p:style>
+          <a:lnRef idx="1">
+            <a:schemeClr val="accent1"/>
+          </a:lnRef>
+          <a:fillRef idx="3">
+            <a:schemeClr val="accent1"/>
+          </a:fillRef>
+          <a:effectRef idx="2">
+            <a:schemeClr val="accent1"/>
+          </a:effectRef>
+          <a:fontRef idx="minor">
+            <a:schemeClr val="lt1"/>
+          </a:fontRef>
+        </p:style>
+        <p:txBody>
+          <a:bodyPr rtlCol="0" anchor="ctr"/>
+          <a:lstStyle/>
+          <a:p>
+            <a:pPr algn="ctr"/>
+          </a:p>
+        </p:txBody>
+      </p:sp>
+      <p:sp>
+        <p:nvSpPr>
+          <p:cNvPr id="8" name="TextBox 7"/>
+          <p:cNvSpPr txBox="1"/>
+          <p:nvPr/>
+        </p:nvSpPr>
+        <p:spPr>
+          <a:xfrm>
+            <a:off x="749808" y="1819656"/>
+            <a:ext cx="5084064" cy="928115"/>
+          </a:xfrm>
+          <a:prstGeom prst="rect">
+            <a:avLst/>
+          </a:prstGeom>
+          <a:noFill/>
+        </p:spPr>
+        <p:txBody>
+          <a:bodyPr wrap="square" anchor="ctr" lIns="0" rIns="0" tIns="0" bIns="0">
+            <a:spAutoFit/>
+          </a:bodyPr>
+          <a:lstStyle/>
+          <a:p>
+            <a:pPr algn="l">
+              <a:lnSpc>
+                <a:spcPct val="100000"/>
+              </a:lnSpc>
+              <a:spcAft>
+                <a:spcPts val="0"/>
+              </a:spcAft>
+            </a:pPr>
+            <a:r>
+              <a:rPr sz="3000" b="1">
+                <a:solidFill>
+                  <a:srgbClr val="0E7A54"/>
+                </a:solidFill>
+                <a:latin typeface="Calibri"/>
+              </a:rPr>
+              <a:t>99.7%  →  45.3%</a:t>
+            </a:r>
+          </a:p>
+        </p:txBody>
+      </p:sp>
+      <p:sp>
+        <p:nvSpPr>
+          <p:cNvPr id="9" name="TextBox 8"/>
+          <p:cNvSpPr txBox="1"/>
+          <p:nvPr/>
+        </p:nvSpPr>
+        <p:spPr>
+          <a:xfrm>
+            <a:off x="749808" y="2724912"/>
+            <a:ext cx="5084064" cy="502920"/>
+          </a:xfrm>
+          <a:prstGeom prst="rect">
+            <a:avLst/>
+          </a:prstGeom>
+          <a:noFill/>
+        </p:spPr>
+        <p:txBody>
+          <a:bodyPr wrap="square" anchor="t" lIns="0" rIns="0" tIns="0" bIns="0">
+            <a:spAutoFit/>
+          </a:bodyPr>
+          <a:lstStyle/>
+          <a:p>
+            <a:pPr algn="l">
+              <a:lnSpc>
+                <a:spcPct val="95000"/>
+              </a:lnSpc>
+              <a:spcAft>
+                <a:spcPts val="0"/>
+              </a:spcAft>
+            </a:pPr>
+            <a:r>
+              <a:rPr sz="1150" b="0">
+                <a:solidFill>
+                  <a:srgbClr val="52514E"/>
+                </a:solidFill>
+                <a:latin typeface="Calibri"/>
+              </a:rPr>
+              <a:t>same lexical model: PhiUSIIL test → Sahingoz (2019) corpus — worse than the 54.7% all-legitimate baseline</a:t>
+            </a:r>
+          </a:p>
+        </p:txBody>
+      </p:sp>
+      <p:sp>
+        <p:nvSpPr>
+          <p:cNvPr id="10" name="Rounded Rectangle 9"/>
+          <p:cNvSpPr/>
+          <p:nvPr/>
+        </p:nvSpPr>
+        <p:spPr>
+          <a:xfrm>
+            <a:off x="6217920" y="1691640"/>
+            <a:ext cx="5486400" cy="1600200"/>
+          </a:xfrm>
+          <a:prstGeom prst="roundRect">
+            <a:avLst>
+              <a:gd name="adj" fmla="val 10000"/>
+            </a:avLst>
+          </a:prstGeom>
+          <a:solidFill>
+            <a:srgbClr val="ECF4F1"/>
+          </a:solidFill>
+          <a:ln>
+            <a:noFill/>
+          </a:ln>
+          <a:effectLst/>
+        </p:spPr>
+        <p:style>
+          <a:lnRef idx="1">
+            <a:schemeClr val="accent1"/>
+          </a:lnRef>
+          <a:fillRef idx="3">
+            <a:schemeClr val="accent1"/>
+          </a:fillRef>
+          <a:effectRef idx="2">
+            <a:schemeClr val="accent1"/>
+          </a:effectRef>
+          <a:fontRef idx="minor">
+            <a:schemeClr val="lt1"/>
+          </a:fontRef>
+        </p:style>
+        <p:txBody>
+          <a:bodyPr rtlCol="0" anchor="ctr"/>
+          <a:lstStyle/>
+          <a:p>
+            <a:pPr algn="ctr"/>
+          </a:p>
+        </p:txBody>
+      </p:sp>
+      <p:sp>
+        <p:nvSpPr>
+          <p:cNvPr id="11" name="TextBox 10"/>
+          <p:cNvSpPr txBox="1"/>
+          <p:nvPr/>
+        </p:nvSpPr>
+        <p:spPr>
+          <a:xfrm>
+            <a:off x="6419088" y="1819656"/>
+            <a:ext cx="5084064" cy="928115"/>
+          </a:xfrm>
+          <a:prstGeom prst="rect">
+            <a:avLst/>
+          </a:prstGeom>
+          <a:noFill/>
+        </p:spPr>
+        <p:txBody>
+          <a:bodyPr wrap="square" anchor="ctr" lIns="0" rIns="0" tIns="0" bIns="0">
+            <a:spAutoFit/>
+          </a:bodyPr>
+          <a:lstStyle/>
+          <a:p>
+            <a:pPr algn="l">
+              <a:lnSpc>
+                <a:spcPct val="100000"/>
+              </a:lnSpc>
+              <a:spcAft>
+                <a:spcPts val="0"/>
+              </a:spcAft>
+            </a:pPr>
+            <a:r>
+              <a:rPr sz="3000" b="1">
+                <a:solidFill>
+                  <a:srgbClr val="0E7A54"/>
+                </a:solidFill>
+                <a:latin typeface="Calibri"/>
+              </a:rPr>
+              <a:t>76%</a:t>
+            </a:r>
+          </a:p>
+        </p:txBody>
+      </p:sp>
+      <p:sp>
+        <p:nvSpPr>
+          <p:cNvPr id="12" name="TextBox 11"/>
+          <p:cNvSpPr txBox="1"/>
+          <p:nvPr/>
+        </p:nvSpPr>
+        <p:spPr>
+          <a:xfrm>
+            <a:off x="6419088" y="2724912"/>
+            <a:ext cx="5084064" cy="502920"/>
+          </a:xfrm>
+          <a:prstGeom prst="rect">
+            <a:avLst/>
+          </a:prstGeom>
+          <a:noFill/>
+        </p:spPr>
+        <p:txBody>
+          <a:bodyPr wrap="square" anchor="t" lIns="0" rIns="0" tIns="0" bIns="0">
+            <a:spAutoFit/>
+          </a:bodyPr>
+          <a:lstStyle/>
+          <a:p>
+            <a:pPr algn="l">
+              <a:lnSpc>
+                <a:spcPct val="95000"/>
+              </a:lnSpc>
+              <a:spcAft>
+                <a:spcPts val="0"/>
+              </a:spcAft>
+            </a:pPr>
+            <a:r>
+              <a:rPr sz="1150" b="0">
+                <a:solidFill>
+                  <a:srgbClr val="52514E"/>
+                </a:solidFill>
+                <a:latin typeface="Calibri"/>
+              </a:rPr>
+              <a:t>of the model rode on ONE feature: path_len</a:t>
+            </a:r>
+          </a:p>
+        </p:txBody>
+      </p:sp>
+      <p:sp>
+        <p:nvSpPr>
+          <p:cNvPr id="13" name="Rounded Rectangle 12"/>
+          <p:cNvSpPr/>
+          <p:nvPr/>
+        </p:nvSpPr>
+        <p:spPr>
+          <a:xfrm>
+            <a:off x="548640" y="3474720"/>
+            <a:ext cx="5486400" cy="1600200"/>
+          </a:xfrm>
+          <a:prstGeom prst="roundRect">
+            <a:avLst>
+              <a:gd name="adj" fmla="val 10000"/>
+            </a:avLst>
+          </a:prstGeom>
+          <a:solidFill>
+            <a:srgbClr val="ECF4F1"/>
+          </a:solidFill>
+          <a:ln>
+            <a:noFill/>
+          </a:ln>
+          <a:effectLst/>
+        </p:spPr>
+        <p:style>
+          <a:lnRef idx="1">
+            <a:schemeClr val="accent1"/>
+          </a:lnRef>
+          <a:fillRef idx="3">
+            <a:schemeClr val="accent1"/>
+          </a:fillRef>
+          <a:effectRef idx="2">
+            <a:schemeClr val="accent1"/>
+          </a:effectRef>
+          <a:fontRef idx="minor">
+            <a:schemeClr val="lt1"/>
+          </a:fontRef>
+        </p:style>
+        <p:txBody>
+          <a:bodyPr rtlCol="0" anchor="ctr"/>
+          <a:lstStyle/>
+          <a:p>
+            <a:pPr algn="ctr"/>
+          </a:p>
+        </p:txBody>
+      </p:sp>
+      <p:sp>
+        <p:nvSpPr>
+          <p:cNvPr id="14" name="TextBox 13"/>
+          <p:cNvSpPr txBox="1"/>
+          <p:nvPr/>
+        </p:nvSpPr>
+        <p:spPr>
+          <a:xfrm>
+            <a:off x="749808" y="3602736"/>
+            <a:ext cx="5084064" cy="928115"/>
+          </a:xfrm>
+          <a:prstGeom prst="rect">
+            <a:avLst/>
+          </a:prstGeom>
+          <a:noFill/>
+        </p:spPr>
+        <p:txBody>
+          <a:bodyPr wrap="square" anchor="ctr" lIns="0" rIns="0" tIns="0" bIns="0">
+            <a:spAutoFit/>
+          </a:bodyPr>
+          <a:lstStyle/>
+          <a:p>
+            <a:pPr algn="l">
+              <a:lnSpc>
+                <a:spcPct val="100000"/>
+              </a:lnSpc>
+              <a:spcAft>
+                <a:spcPts val="0"/>
+              </a:spcAft>
+            </a:pPr>
+            <a:r>
+              <a:rPr sz="3000" b="1">
+                <a:solidFill>
+                  <a:srgbClr val="0E7A54"/>
+                </a:solidFill>
+                <a:latin typeface="Calibri"/>
+              </a:rPr>
+              <a:t>0 vs 29</a:t>
+            </a:r>
+          </a:p>
+        </p:txBody>
+      </p:sp>
+      <p:sp>
+        <p:nvSpPr>
+          <p:cNvPr id="15" name="TextBox 14"/>
+          <p:cNvSpPr txBox="1"/>
+          <p:nvPr/>
+        </p:nvSpPr>
+        <p:spPr>
+          <a:xfrm>
+            <a:off x="749808" y="4507992"/>
+            <a:ext cx="5084064" cy="502920"/>
+          </a:xfrm>
+          <a:prstGeom prst="rect">
+            <a:avLst/>
+          </a:prstGeom>
+          <a:noFill/>
+        </p:spPr>
+        <p:txBody>
+          <a:bodyPr wrap="square" anchor="t" lIns="0" rIns="0" tIns="0" bIns="0">
+            <a:spAutoFit/>
+          </a:bodyPr>
+          <a:lstStyle/>
+          <a:p>
+            <a:pPr algn="l">
+              <a:lnSpc>
+                <a:spcPct val="95000"/>
+              </a:lnSpc>
+              <a:spcAft>
+                <a:spcPts val="0"/>
+              </a:spcAft>
+            </a:pPr>
+            <a:r>
+              <a:rPr sz="1150" b="0">
+                <a:solidFill>
+                  <a:srgbClr val="52514E"/>
+                </a:solidFill>
+                <a:latin typeface="Calibri"/>
+              </a:rPr>
+              <a:t>median path length of legitimate URLs — PhiUSIIL (homepages) vs the external corpus (real browsing)</a:t>
+            </a:r>
+          </a:p>
+        </p:txBody>
+      </p:sp>
+      <p:sp>
+        <p:nvSpPr>
+          <p:cNvPr id="16" name="Rounded Rectangle 15"/>
+          <p:cNvSpPr/>
+          <p:nvPr/>
+        </p:nvSpPr>
+        <p:spPr>
+          <a:xfrm>
+            <a:off x="6217920" y="3474720"/>
+            <a:ext cx="5486400" cy="1600200"/>
+          </a:xfrm>
+          <a:prstGeom prst="roundRect">
+            <a:avLst>
+              <a:gd name="adj" fmla="val 10000"/>
+            </a:avLst>
+          </a:prstGeom>
+          <a:solidFill>
+            <a:srgbClr val="ECF4F1"/>
+          </a:solidFill>
+          <a:ln>
+            <a:noFill/>
+          </a:ln>
+          <a:effectLst/>
+        </p:spPr>
+        <p:style>
+          <a:lnRef idx="1">
+            <a:schemeClr val="accent1"/>
+          </a:lnRef>
+          <a:fillRef idx="3">
+            <a:schemeClr val="accent1"/>
+          </a:fillRef>
+          <a:effectRef idx="2">
+            <a:schemeClr val="accent1"/>
+          </a:effectRef>
+          <a:fontRef idx="minor">
+            <a:schemeClr val="lt1"/>
+          </a:fontRef>
+        </p:style>
+        <p:txBody>
+          <a:bodyPr rtlCol="0" anchor="ctr"/>
+          <a:lstStyle/>
+          <a:p>
+            <a:pPr algn="ctr"/>
+          </a:p>
+        </p:txBody>
+      </p:sp>
+      <p:sp>
+        <p:nvSpPr>
+          <p:cNvPr id="17" name="TextBox 16"/>
+          <p:cNvSpPr txBox="1"/>
+          <p:nvPr/>
+        </p:nvSpPr>
+        <p:spPr>
+          <a:xfrm>
+            <a:off x="6419088" y="3602736"/>
+            <a:ext cx="5084064" cy="928115"/>
+          </a:xfrm>
+          <a:prstGeom prst="rect">
+            <a:avLst/>
+          </a:prstGeom>
+          <a:noFill/>
+        </p:spPr>
+        <p:txBody>
+          <a:bodyPr wrap="square" anchor="ctr" lIns="0" rIns="0" tIns="0" bIns="0">
+            <a:spAutoFit/>
+          </a:bodyPr>
+          <a:lstStyle/>
+          <a:p>
+            <a:pPr algn="l">
+              <a:lnSpc>
+                <a:spcPct val="100000"/>
+              </a:lnSpc>
+              <a:spcAft>
+                <a:spcPts val="0"/>
+              </a:spcAft>
+            </a:pPr>
+            <a:r>
+              <a:rPr sz="3000" b="1">
+                <a:solidFill>
+                  <a:srgbClr val="0E7A54"/>
+                </a:solidFill>
+                <a:latin typeface="Calibri"/>
+              </a:rPr>
+              <a:t>70.0%</a:t>
             </a:r>
           </a:p>
         </p:txBody>
@@ -21900,8 +23911,8 @@
         </p:nvSpPr>
         <p:spPr>
           <a:xfrm>
-            <a:off x="6519672" y="4087368"/>
-            <a:ext cx="4892040" cy="777240"/>
+            <a:off x="6419088" y="4507992"/>
+            <a:ext cx="5084064" cy="502920"/>
           </a:xfrm>
           <a:prstGeom prst="rect">
             <a:avLst/>
@@ -21916,47 +23927,93 @@
           <a:p>
             <a:pPr algn="l">
               <a:lnSpc>
-                <a:spcPct val="105000"/>
+                <a:spcPct val="95000"/>
               </a:lnSpc>
               <a:spcAft>
                 <a:spcPts val="0"/>
               </a:spcAft>
             </a:pPr>
             <a:r>
-              <a:rPr sz="1200" b="0">
+              <a:rPr sz="1150" b="0">
                 <a:solidFill>
                   <a:srgbClr val="52514E"/>
                 </a:solidFill>
                 <a:latin typeface="Calibri"/>
               </a:rPr>
-              <a:t>Thresholds, costs, and operating points are where the real choices live.</a:t>
-            </a:r>
-          </a:p>
-        </p:txBody>
-      </p:sp>
-      <p:sp>
-        <p:nvSpPr>
-          <p:cNvPr id="19" name="TextBox 18"/>
-          <p:cNvSpPr txBox="1"/>
-          <p:nvPr/>
-        </p:nvSpPr>
-        <p:spPr>
-          <a:xfrm>
-            <a:off x="548640" y="5349240"/>
-            <a:ext cx="11064240" cy="457200"/>
-          </a:xfrm>
-          <a:prstGeom prst="rect">
-            <a:avLst/>
-          </a:prstGeom>
-          <a:noFill/>
-        </p:spPr>
-        <p:txBody>
-          <a:bodyPr wrap="square" anchor="t" lIns="0" rIns="0" tIns="0" bIns="0">
-            <a:spAutoFit/>
-          </a:bodyPr>
-          <a:lstStyle/>
-          <a:p>
-            <a:pPr algn="ctr">
+              <a:t>host-only model on external data — modest, but honest and real (87.9% on PhiUSIIL)</a:t>
+            </a:r>
+          </a:p>
+        </p:txBody>
+      </p:sp>
+      <p:sp>
+        <p:nvSpPr>
+          <p:cNvPr id="19" name="Rounded Rectangle 18"/>
+          <p:cNvSpPr/>
+          <p:nvPr/>
+        </p:nvSpPr>
+        <p:spPr>
+          <a:xfrm>
+            <a:off x="548640" y="5806440"/>
+            <a:ext cx="11094415" cy="566928"/>
+          </a:xfrm>
+          <a:prstGeom prst="roundRect">
+            <a:avLst>
+              <a:gd name="adj" fmla="val 16000"/>
+            </a:avLst>
+          </a:prstGeom>
+          <a:solidFill>
+            <a:srgbClr val="E7F2EE"/>
+          </a:solidFill>
+          <a:ln>
+            <a:noFill/>
+          </a:ln>
+          <a:effectLst/>
+        </p:spPr>
+        <p:style>
+          <a:lnRef idx="1">
+            <a:schemeClr val="accent1"/>
+          </a:lnRef>
+          <a:fillRef idx="3">
+            <a:schemeClr val="accent1"/>
+          </a:fillRef>
+          <a:effectRef idx="2">
+            <a:schemeClr val="accent1"/>
+          </a:effectRef>
+          <a:fontRef idx="minor">
+            <a:schemeClr val="lt1"/>
+          </a:fontRef>
+        </p:style>
+        <p:txBody>
+          <a:bodyPr rtlCol="0" anchor="ctr"/>
+          <a:lstStyle/>
+          <a:p>
+            <a:pPr algn="ctr"/>
+          </a:p>
+        </p:txBody>
+      </p:sp>
+      <p:sp>
+        <p:nvSpPr>
+          <p:cNvPr id="20" name="TextBox 19"/>
+          <p:cNvSpPr txBox="1"/>
+          <p:nvPr/>
+        </p:nvSpPr>
+        <p:spPr>
+          <a:xfrm>
+            <a:off x="804672" y="5806440"/>
+            <a:ext cx="10582351" cy="566928"/>
+          </a:xfrm>
+          <a:prstGeom prst="rect">
+            <a:avLst/>
+          </a:prstGeom>
+          <a:noFill/>
+        </p:spPr>
+        <p:txBody>
+          <a:bodyPr wrap="square" anchor="ctr" lIns="0" rIns="0" tIns="0" bIns="0">
+            <a:spAutoFit/>
+          </a:bodyPr>
+          <a:lstStyle/>
+          <a:p>
+            <a:pPr algn="l">
               <a:lnSpc>
                 <a:spcPct val="100000"/>
               </a:lnSpc>
@@ -21965,64 +24022,22 @@
               </a:spcAft>
             </a:pPr>
             <a:r>
-              <a:rPr sz="2000" b="1">
+              <a:rPr sz="1400" b="1">
+                <a:solidFill>
+                  <a:srgbClr val="0E7A54"/>
+                </a:solidFill>
+                <a:latin typeface="Calibri"/>
+              </a:rPr>
+              <a:t>Takeaway   </a:t>
+            </a:r>
+            <a:r>
+              <a:rPr sz="1400" b="0">
                 <a:solidFill>
                   <a:srgbClr val="0B0B0B"/>
                 </a:solidFill>
                 <a:latin typeface="Calibri"/>
               </a:rPr>
-              <a:t>Near-perfect accuracy should be explained, not celebrated.</a:t>
-            </a:r>
-          </a:p>
-        </p:txBody>
-      </p:sp>
-      <p:sp>
-        <p:nvSpPr>
-          <p:cNvPr id="20" name="TextBox 19"/>
-          <p:cNvSpPr txBox="1"/>
-          <p:nvPr/>
-        </p:nvSpPr>
-        <p:spPr>
-          <a:xfrm>
-            <a:off x="548640" y="5943600"/>
-            <a:ext cx="11064240" cy="365760"/>
-          </a:xfrm>
-          <a:prstGeom prst="rect">
-            <a:avLst/>
-          </a:prstGeom>
-          <a:noFill/>
-        </p:spPr>
-        <p:txBody>
-          <a:bodyPr wrap="square" anchor="t" lIns="0" rIns="0" tIns="0" bIns="0">
-            <a:spAutoFit/>
-          </a:bodyPr>
-          <a:lstStyle/>
-          <a:p>
-            <a:pPr algn="ctr">
-              <a:lnSpc>
-                <a:spcPct val="100000"/>
-              </a:lnSpc>
-              <a:spcAft>
-                <a:spcPts val="0"/>
-              </a:spcAft>
-            </a:pPr>
-            <a:r>
-              <a:rPr sz="1300" b="1">
-                <a:solidFill>
-                  <a:srgbClr val="0B0B0B"/>
-                </a:solidFill>
-                <a:latin typeface="Calibri"/>
-              </a:rPr>
-              <a:t>Thank you!   </a:t>
-            </a:r>
-            <a:r>
-              <a:rPr sz="1150" b="0">
-                <a:solidFill>
-                  <a:srgbClr val="898781"/>
-                </a:solidFill>
-                <a:latin typeface="Consolas"/>
-              </a:rPr>
-              <a:t>Code, notebooks &amp; full report: github.com/jjusticeusd/AAI-501-Final-Team-Project-Group2</a:t>
+              <a:t>Artifact #3: “URL has a path ⇒ phishing.” Invisible inside the benchmark, fatal outside it — only cross-dataset testing could catch it.</a:t>
             </a:r>
           </a:p>
         </p:txBody>
@@ -22255,6 +24270,2377 @@
                 <a:latin typeface="Calibri"/>
               </a:rPr>
               <a:t>The 49-feature “safe list” the rest of the project builds on</a:t>
+            </a:r>
+          </a:p>
+        </p:txBody>
+      </p:sp>
+    </p:spTree>
+  </p:cSld>
+  <p:clrMapOvr>
+    <a:masterClrMapping/>
+  </p:clrMapOvr>
+</p:sld>
+</file>
+
+<file path=ppt/slides/slide30.xml><?xml version="1.0" encoding="utf-8"?>
+<p:sld xmlns:a="http://schemas.openxmlformats.org/drawingml/2006/main" xmlns:p="http://schemas.openxmlformats.org/presentationml/2006/main" xmlns:r="http://schemas.openxmlformats.org/officeDocument/2006/relationships">
+  <p:cSld>
+    <p:bg>
+      <p:bgPr>
+        <a:solidFill>
+          <a:srgbClr val="FCFCFB"/>
+        </a:solidFill>
+        <a:effectLst/>
+      </p:bgPr>
+    </p:bg>
+    <p:spTree>
+      <p:nvGrpSpPr>
+        <p:cNvPr id="1" name=""/>
+        <p:cNvGrpSpPr/>
+        <p:nvPr/>
+      </p:nvGrpSpPr>
+      <p:grpSpPr/>
+      <p:sp>
+        <p:nvSpPr>
+          <p:cNvPr id="2" name="Rectangle 1"/>
+          <p:cNvSpPr/>
+          <p:nvPr/>
+        </p:nvSpPr>
+        <p:spPr>
+          <a:xfrm>
+            <a:off x="0" y="0"/>
+            <a:ext cx="12191695" cy="128016"/>
+          </a:xfrm>
+          <a:prstGeom prst="rect">
+            <a:avLst/>
+          </a:prstGeom>
+          <a:solidFill>
+            <a:srgbClr val="0E7A54"/>
+          </a:solidFill>
+          <a:ln>
+            <a:noFill/>
+          </a:ln>
+          <a:effectLst/>
+        </p:spPr>
+        <p:style>
+          <a:lnRef idx="1">
+            <a:schemeClr val="accent1"/>
+          </a:lnRef>
+          <a:fillRef idx="3">
+            <a:schemeClr val="accent1"/>
+          </a:fillRef>
+          <a:effectRef idx="2">
+            <a:schemeClr val="accent1"/>
+          </a:effectRef>
+          <a:fontRef idx="minor">
+            <a:schemeClr val="lt1"/>
+          </a:fontRef>
+        </p:style>
+        <p:txBody>
+          <a:bodyPr rtlCol="0" anchor="ctr"/>
+          <a:lstStyle/>
+          <a:p>
+            <a:pPr algn="ctr"/>
+          </a:p>
+        </p:txBody>
+      </p:sp>
+      <p:sp>
+        <p:nvSpPr>
+          <p:cNvPr id="3" name="TextBox 2"/>
+          <p:cNvSpPr txBox="1"/>
+          <p:nvPr/>
+        </p:nvSpPr>
+        <p:spPr>
+          <a:xfrm>
+            <a:off x="548640" y="347472"/>
+            <a:ext cx="11094415" cy="274320"/>
+          </a:xfrm>
+          <a:prstGeom prst="rect">
+            <a:avLst/>
+          </a:prstGeom>
+          <a:noFill/>
+        </p:spPr>
+        <p:txBody>
+          <a:bodyPr wrap="square" anchor="t" lIns="0" rIns="0" tIns="0" bIns="0">
+            <a:spAutoFit/>
+          </a:bodyPr>
+          <a:lstStyle/>
+          <a:p>
+            <a:pPr algn="l">
+              <a:lnSpc>
+                <a:spcPct val="100000"/>
+              </a:lnSpc>
+              <a:spcAft>
+                <a:spcPts val="0"/>
+              </a:spcAft>
+            </a:pPr>
+            <a:r>
+              <a:rPr sz="1250" b="1">
+                <a:solidFill>
+                  <a:srgbClr val="0E7A54"/>
+                </a:solidFill>
+                <a:latin typeface="Calibri"/>
+              </a:rPr>
+              <a:t>CLOSING · SYNTHESIS</a:t>
+            </a:r>
+          </a:p>
+        </p:txBody>
+      </p:sp>
+      <p:sp>
+        <p:nvSpPr>
+          <p:cNvPr id="4" name="TextBox 3"/>
+          <p:cNvSpPr txBox="1"/>
+          <p:nvPr/>
+        </p:nvSpPr>
+        <p:spPr>
+          <a:xfrm>
+            <a:off x="548640" y="603504"/>
+            <a:ext cx="11094415" cy="777240"/>
+          </a:xfrm>
+          <a:prstGeom prst="rect">
+            <a:avLst/>
+          </a:prstGeom>
+          <a:noFill/>
+        </p:spPr>
+        <p:txBody>
+          <a:bodyPr wrap="square" anchor="t" lIns="0" rIns="0" tIns="0" bIns="0">
+            <a:spAutoFit/>
+          </a:bodyPr>
+          <a:lstStyle/>
+          <a:p>
+            <a:pPr algn="l">
+              <a:lnSpc>
+                <a:spcPct val="100000"/>
+              </a:lnSpc>
+              <a:spcAft>
+                <a:spcPts val="0"/>
+              </a:spcAft>
+            </a:pPr>
+            <a:r>
+              <a:rPr sz="3000" b="1">
+                <a:solidFill>
+                  <a:srgbClr val="0B0B0B"/>
+                </a:solidFill>
+                <a:latin typeface="Calibri"/>
+              </a:rPr>
+              <a:t>We tried to make it harder three times. It refused.</a:t>
+            </a:r>
+          </a:p>
+        </p:txBody>
+      </p:sp>
+      <p:sp>
+        <p:nvSpPr>
+          <p:cNvPr id="5" name="TextBox 4"/>
+          <p:cNvSpPr txBox="1"/>
+          <p:nvPr/>
+        </p:nvSpPr>
+        <p:spPr>
+          <a:xfrm>
+            <a:off x="548640" y="6519672"/>
+            <a:ext cx="8229600" cy="274320"/>
+          </a:xfrm>
+          <a:prstGeom prst="rect">
+            <a:avLst/>
+          </a:prstGeom>
+          <a:noFill/>
+        </p:spPr>
+        <p:txBody>
+          <a:bodyPr wrap="square" anchor="t" lIns="0" rIns="0" tIns="0" bIns="0">
+            <a:spAutoFit/>
+          </a:bodyPr>
+          <a:lstStyle/>
+          <a:p>
+            <a:pPr algn="l">
+              <a:lnSpc>
+                <a:spcPct val="100000"/>
+              </a:lnSpc>
+              <a:spcAft>
+                <a:spcPts val="0"/>
+              </a:spcAft>
+            </a:pPr>
+            <a:r>
+              <a:rPr sz="950" b="0">
+                <a:solidFill>
+                  <a:srgbClr val="898781"/>
+                </a:solidFill>
+                <a:latin typeface="Calibri"/>
+              </a:rPr>
+              <a:t>AAI-501 · Group 2 · Phishing URL Detection on PhiUSIIL</a:t>
+            </a:r>
+          </a:p>
+        </p:txBody>
+      </p:sp>
+      <p:sp>
+        <p:nvSpPr>
+          <p:cNvPr id="6" name="TextBox 5"/>
+          <p:cNvSpPr txBox="1"/>
+          <p:nvPr/>
+        </p:nvSpPr>
+        <p:spPr>
+          <a:xfrm>
+            <a:off x="10728655" y="6519672"/>
+            <a:ext cx="914400" cy="274320"/>
+          </a:xfrm>
+          <a:prstGeom prst="rect">
+            <a:avLst/>
+          </a:prstGeom>
+          <a:noFill/>
+        </p:spPr>
+        <p:txBody>
+          <a:bodyPr wrap="square" anchor="t" lIns="0" rIns="0" tIns="0" bIns="0">
+            <a:spAutoFit/>
+          </a:bodyPr>
+          <a:lstStyle/>
+          <a:p>
+            <a:pPr algn="r">
+              <a:lnSpc>
+                <a:spcPct val="100000"/>
+              </a:lnSpc>
+              <a:spcAft>
+                <a:spcPts val="0"/>
+              </a:spcAft>
+            </a:pPr>
+            <a:r>
+              <a:rPr sz="950" b="0">
+                <a:solidFill>
+                  <a:srgbClr val="898781"/>
+                </a:solidFill>
+                <a:latin typeface="Calibri"/>
+              </a:rPr>
+              <a:t>30</a:t>
+            </a:r>
+          </a:p>
+        </p:txBody>
+      </p:sp>
+      <p:sp>
+        <p:nvSpPr>
+          <p:cNvPr id="7" name="Rounded Rectangle 6"/>
+          <p:cNvSpPr/>
+          <p:nvPr/>
+        </p:nvSpPr>
+        <p:spPr>
+          <a:xfrm>
+            <a:off x="548640" y="1783080"/>
+            <a:ext cx="3566160" cy="3017520"/>
+          </a:xfrm>
+          <a:prstGeom prst="roundRect">
+            <a:avLst>
+              <a:gd name="adj" fmla="val 8000"/>
+            </a:avLst>
+          </a:prstGeom>
+          <a:solidFill>
+            <a:srgbClr val="F0F6FC"/>
+          </a:solidFill>
+          <a:ln>
+            <a:noFill/>
+          </a:ln>
+          <a:effectLst/>
+        </p:spPr>
+        <p:style>
+          <a:lnRef idx="1">
+            <a:schemeClr val="accent1"/>
+          </a:lnRef>
+          <a:fillRef idx="3">
+            <a:schemeClr val="accent1"/>
+          </a:fillRef>
+          <a:effectRef idx="2">
+            <a:schemeClr val="accent1"/>
+          </a:effectRef>
+          <a:fontRef idx="minor">
+            <a:schemeClr val="lt1"/>
+          </a:fontRef>
+        </p:style>
+        <p:txBody>
+          <a:bodyPr rtlCol="0" anchor="ctr"/>
+          <a:lstStyle/>
+          <a:p>
+            <a:pPr algn="ctr"/>
+          </a:p>
+        </p:txBody>
+      </p:sp>
+      <p:sp>
+        <p:nvSpPr>
+          <p:cNvPr id="8" name="TextBox 7"/>
+          <p:cNvSpPr txBox="1"/>
+          <p:nvPr/>
+        </p:nvSpPr>
+        <p:spPr>
+          <a:xfrm>
+            <a:off x="804672" y="2011680"/>
+            <a:ext cx="3063240" cy="411480"/>
+          </a:xfrm>
+          <a:prstGeom prst="rect">
+            <a:avLst/>
+          </a:prstGeom>
+          <a:noFill/>
+        </p:spPr>
+        <p:txBody>
+          <a:bodyPr wrap="square" anchor="t" lIns="0" rIns="0" tIns="0" bIns="0">
+            <a:spAutoFit/>
+          </a:bodyPr>
+          <a:lstStyle/>
+          <a:p>
+            <a:pPr algn="l">
+              <a:lnSpc>
+                <a:spcPct val="100000"/>
+              </a:lnSpc>
+              <a:spcAft>
+                <a:spcPts val="0"/>
+              </a:spcAft>
+            </a:pPr>
+            <a:r>
+              <a:rPr sz="1600" b="1">
+                <a:solidFill>
+                  <a:srgbClr val="0B0B0B"/>
+                </a:solidFill>
+                <a:latin typeface="Calibri"/>
+              </a:rPr>
+              <a:t>Drop the leak</a:t>
+            </a:r>
+          </a:p>
+        </p:txBody>
+      </p:sp>
+      <p:sp>
+        <p:nvSpPr>
+          <p:cNvPr id="9" name="TextBox 8"/>
+          <p:cNvSpPr txBox="1"/>
+          <p:nvPr/>
+        </p:nvSpPr>
+        <p:spPr>
+          <a:xfrm>
+            <a:off x="804672" y="2468880"/>
+            <a:ext cx="3063240" cy="914400"/>
+          </a:xfrm>
+          <a:prstGeom prst="rect">
+            <a:avLst/>
+          </a:prstGeom>
+          <a:noFill/>
+        </p:spPr>
+        <p:txBody>
+          <a:bodyPr wrap="square" anchor="t" lIns="0" rIns="0" tIns="0" bIns="0">
+            <a:spAutoFit/>
+          </a:bodyPr>
+          <a:lstStyle/>
+          <a:p>
+            <a:pPr algn="l">
+              <a:lnSpc>
+                <a:spcPct val="100000"/>
+              </a:lnSpc>
+              <a:spcAft>
+                <a:spcPts val="0"/>
+              </a:spcAft>
+            </a:pPr>
+            <a:r>
+              <a:rPr sz="4400" b="1">
+                <a:solidFill>
+                  <a:srgbClr val="2A78D6"/>
+                </a:solidFill>
+                <a:latin typeface="Calibri"/>
+              </a:rPr>
+              <a:t>99.9%</a:t>
+            </a:r>
+          </a:p>
+        </p:txBody>
+      </p:sp>
+      <p:sp>
+        <p:nvSpPr>
+          <p:cNvPr id="10" name="TextBox 9"/>
+          <p:cNvSpPr txBox="1"/>
+          <p:nvPr/>
+        </p:nvSpPr>
+        <p:spPr>
+          <a:xfrm>
+            <a:off x="804672" y="3520440"/>
+            <a:ext cx="3063240" cy="1188720"/>
+          </a:xfrm>
+          <a:prstGeom prst="rect">
+            <a:avLst/>
+          </a:prstGeom>
+          <a:noFill/>
+        </p:spPr>
+        <p:txBody>
+          <a:bodyPr wrap="square" anchor="t" lIns="0" rIns="0" tIns="0" bIns="0">
+            <a:spAutoFit/>
+          </a:bodyPr>
+          <a:lstStyle/>
+          <a:p>
+            <a:pPr algn="l">
+              <a:lnSpc>
+                <a:spcPct val="110000"/>
+              </a:lnSpc>
+              <a:spcAft>
+                <a:spcPts val="0"/>
+              </a:spcAft>
+            </a:pPr>
+            <a:r>
+              <a:rPr sz="1250" b="0">
+                <a:solidFill>
+                  <a:srgbClr val="52514E"/>
+                </a:solidFill>
+                <a:latin typeface="Calibri"/>
+              </a:rPr>
+              <a:t>remove URLSimilarityIndex → remaining features barely move</a:t>
+            </a:r>
+          </a:p>
+        </p:txBody>
+      </p:sp>
+      <p:sp>
+        <p:nvSpPr>
+          <p:cNvPr id="11" name="Rounded Rectangle 10"/>
+          <p:cNvSpPr/>
+          <p:nvPr/>
+        </p:nvSpPr>
+        <p:spPr>
+          <a:xfrm>
+            <a:off x="4325112" y="1783080"/>
+            <a:ext cx="3566160" cy="3017520"/>
+          </a:xfrm>
+          <a:prstGeom prst="roundRect">
+            <a:avLst>
+              <a:gd name="adj" fmla="val 8000"/>
+            </a:avLst>
+          </a:prstGeom>
+          <a:solidFill>
+            <a:srgbClr val="FEF4F1"/>
+          </a:solidFill>
+          <a:ln>
+            <a:noFill/>
+          </a:ln>
+          <a:effectLst/>
+        </p:spPr>
+        <p:style>
+          <a:lnRef idx="1">
+            <a:schemeClr val="accent1"/>
+          </a:lnRef>
+          <a:fillRef idx="3">
+            <a:schemeClr val="accent1"/>
+          </a:fillRef>
+          <a:effectRef idx="2">
+            <a:schemeClr val="accent1"/>
+          </a:effectRef>
+          <a:fontRef idx="minor">
+            <a:schemeClr val="lt1"/>
+          </a:fontRef>
+        </p:style>
+        <p:txBody>
+          <a:bodyPr rtlCol="0" anchor="ctr"/>
+          <a:lstStyle/>
+          <a:p>
+            <a:pPr algn="ctr"/>
+          </a:p>
+        </p:txBody>
+      </p:sp>
+      <p:sp>
+        <p:nvSpPr>
+          <p:cNvPr id="12" name="TextBox 11"/>
+          <p:cNvSpPr txBox="1"/>
+          <p:nvPr/>
+        </p:nvSpPr>
+        <p:spPr>
+          <a:xfrm>
+            <a:off x="4581144" y="2011680"/>
+            <a:ext cx="3063240" cy="411480"/>
+          </a:xfrm>
+          <a:prstGeom prst="rect">
+            <a:avLst/>
+          </a:prstGeom>
+          <a:noFill/>
+        </p:spPr>
+        <p:txBody>
+          <a:bodyPr wrap="square" anchor="t" lIns="0" rIns="0" tIns="0" bIns="0">
+            <a:spAutoFit/>
+          </a:bodyPr>
+          <a:lstStyle/>
+          <a:p>
+            <a:pPr algn="l">
+              <a:lnSpc>
+                <a:spcPct val="100000"/>
+              </a:lnSpc>
+              <a:spcAft>
+                <a:spcPts val="0"/>
+              </a:spcAft>
+            </a:pPr>
+            <a:r>
+              <a:rPr sz="1600" b="1">
+                <a:solidFill>
+                  <a:srgbClr val="0B0B0B"/>
+                </a:solidFill>
+                <a:latin typeface="Calibri"/>
+              </a:rPr>
+              <a:t>Tighten the split</a:t>
+            </a:r>
+          </a:p>
+        </p:txBody>
+      </p:sp>
+      <p:sp>
+        <p:nvSpPr>
+          <p:cNvPr id="13" name="TextBox 12"/>
+          <p:cNvSpPr txBox="1"/>
+          <p:nvPr/>
+        </p:nvSpPr>
+        <p:spPr>
+          <a:xfrm>
+            <a:off x="4581144" y="2468880"/>
+            <a:ext cx="3063240" cy="914400"/>
+          </a:xfrm>
+          <a:prstGeom prst="rect">
+            <a:avLst/>
+          </a:prstGeom>
+          <a:noFill/>
+        </p:spPr>
+        <p:txBody>
+          <a:bodyPr wrap="square" anchor="t" lIns="0" rIns="0" tIns="0" bIns="0">
+            <a:spAutoFit/>
+          </a:bodyPr>
+          <a:lstStyle/>
+          <a:p>
+            <a:pPr algn="l">
+              <a:lnSpc>
+                <a:spcPct val="100000"/>
+              </a:lnSpc>
+              <a:spcAft>
+                <a:spcPts val="0"/>
+              </a:spcAft>
+            </a:pPr>
+            <a:r>
+              <a:rPr sz="4400" b="1">
+                <a:solidFill>
+                  <a:srgbClr val="EB6834"/>
+                </a:solidFill>
+                <a:latin typeface="Calibri"/>
+              </a:rPr>
+              <a:t>0.9990</a:t>
+            </a:r>
+          </a:p>
+        </p:txBody>
+      </p:sp>
+      <p:sp>
+        <p:nvSpPr>
+          <p:cNvPr id="14" name="TextBox 13"/>
+          <p:cNvSpPr txBox="1"/>
+          <p:nvPr/>
+        </p:nvSpPr>
+        <p:spPr>
+          <a:xfrm>
+            <a:off x="4581144" y="3520440"/>
+            <a:ext cx="3063240" cy="1188720"/>
+          </a:xfrm>
+          <a:prstGeom prst="rect">
+            <a:avLst/>
+          </a:prstGeom>
+          <a:noFill/>
+        </p:spPr>
+        <p:txBody>
+          <a:bodyPr wrap="square" anchor="t" lIns="0" rIns="0" tIns="0" bIns="0">
+            <a:spAutoFit/>
+          </a:bodyPr>
+          <a:lstStyle/>
+          <a:p>
+            <a:pPr algn="l">
+              <a:lnSpc>
+                <a:spcPct val="110000"/>
+              </a:lnSpc>
+              <a:spcAft>
+                <a:spcPts val="0"/>
+              </a:spcAft>
+            </a:pPr>
+            <a:r>
+              <a:rPr sz="1250" b="0">
+                <a:solidFill>
+                  <a:srgbClr val="52514E"/>
+                </a:solidFill>
+                <a:latin typeface="Calibri"/>
+              </a:rPr>
+              <a:t>44,577-group range of strictness → accuracy shifts by 0.0005</a:t>
+            </a:r>
+          </a:p>
+        </p:txBody>
+      </p:sp>
+      <p:sp>
+        <p:nvSpPr>
+          <p:cNvPr id="15" name="Rounded Rectangle 14"/>
+          <p:cNvSpPr/>
+          <p:nvPr/>
+        </p:nvSpPr>
+        <p:spPr>
+          <a:xfrm>
+            <a:off x="8101583" y="1783080"/>
+            <a:ext cx="3566160" cy="3017520"/>
+          </a:xfrm>
+          <a:prstGeom prst="roundRect">
+            <a:avLst>
+              <a:gd name="adj" fmla="val 8000"/>
+            </a:avLst>
+          </a:prstGeom>
+          <a:solidFill>
+            <a:srgbClr val="F2F1F9"/>
+          </a:solidFill>
+          <a:ln>
+            <a:noFill/>
+          </a:ln>
+          <a:effectLst/>
+        </p:spPr>
+        <p:style>
+          <a:lnRef idx="1">
+            <a:schemeClr val="accent1"/>
+          </a:lnRef>
+          <a:fillRef idx="3">
+            <a:schemeClr val="accent1"/>
+          </a:fillRef>
+          <a:effectRef idx="2">
+            <a:schemeClr val="accent1"/>
+          </a:effectRef>
+          <a:fontRef idx="minor">
+            <a:schemeClr val="lt1"/>
+          </a:fontRef>
+        </p:style>
+        <p:txBody>
+          <a:bodyPr rtlCol="0" anchor="ctr"/>
+          <a:lstStyle/>
+          <a:p>
+            <a:pPr algn="ctr"/>
+          </a:p>
+        </p:txBody>
+      </p:sp>
+      <p:sp>
+        <p:nvSpPr>
+          <p:cNvPr id="16" name="TextBox 15"/>
+          <p:cNvSpPr txBox="1"/>
+          <p:nvPr/>
+        </p:nvSpPr>
+        <p:spPr>
+          <a:xfrm>
+            <a:off x="8357615" y="2011680"/>
+            <a:ext cx="3063240" cy="411480"/>
+          </a:xfrm>
+          <a:prstGeom prst="rect">
+            <a:avLst/>
+          </a:prstGeom>
+          <a:noFill/>
+        </p:spPr>
+        <p:txBody>
+          <a:bodyPr wrap="square" anchor="t" lIns="0" rIns="0" tIns="0" bIns="0">
+            <a:spAutoFit/>
+          </a:bodyPr>
+          <a:lstStyle/>
+          <a:p>
+            <a:pPr algn="l">
+              <a:lnSpc>
+                <a:spcPct val="100000"/>
+              </a:lnSpc>
+              <a:spcAft>
+                <a:spcPts val="0"/>
+              </a:spcAft>
+            </a:pPr>
+            <a:r>
+              <a:rPr sz="1600" b="1">
+                <a:solidFill>
+                  <a:srgbClr val="0B0B0B"/>
+                </a:solidFill>
+                <a:latin typeface="Calibri"/>
+              </a:rPr>
+              <a:t>Remove ALL features</a:t>
+            </a:r>
+          </a:p>
+        </p:txBody>
+      </p:sp>
+      <p:sp>
+        <p:nvSpPr>
+          <p:cNvPr id="17" name="TextBox 16"/>
+          <p:cNvSpPr txBox="1"/>
+          <p:nvPr/>
+        </p:nvSpPr>
+        <p:spPr>
+          <a:xfrm>
+            <a:off x="8357615" y="2468880"/>
+            <a:ext cx="3063240" cy="914400"/>
+          </a:xfrm>
+          <a:prstGeom prst="rect">
+            <a:avLst/>
+          </a:prstGeom>
+          <a:noFill/>
+        </p:spPr>
+        <p:txBody>
+          <a:bodyPr wrap="square" anchor="t" lIns="0" rIns="0" tIns="0" bIns="0">
+            <a:spAutoFit/>
+          </a:bodyPr>
+          <a:lstStyle/>
+          <a:p>
+            <a:pPr algn="l">
+              <a:lnSpc>
+                <a:spcPct val="100000"/>
+              </a:lnSpc>
+              <a:spcAft>
+                <a:spcPts val="0"/>
+              </a:spcAft>
+            </a:pPr>
+            <a:r>
+              <a:rPr sz="4400" b="1">
+                <a:solidFill>
+                  <a:srgbClr val="4A3AA7"/>
+                </a:solidFill>
+                <a:latin typeface="Calibri"/>
+              </a:rPr>
+              <a:t>0.9985</a:t>
+            </a:r>
+          </a:p>
+        </p:txBody>
+      </p:sp>
+      <p:sp>
+        <p:nvSpPr>
+          <p:cNvPr id="18" name="TextBox 17"/>
+          <p:cNvSpPr txBox="1"/>
+          <p:nvPr/>
+        </p:nvSpPr>
+        <p:spPr>
+          <a:xfrm>
+            <a:off x="8357615" y="3520440"/>
+            <a:ext cx="3063240" cy="1188720"/>
+          </a:xfrm>
+          <a:prstGeom prst="rect">
+            <a:avLst/>
+          </a:prstGeom>
+          <a:noFill/>
+        </p:spPr>
+        <p:txBody>
+          <a:bodyPr wrap="square" anchor="t" lIns="0" rIns="0" tIns="0" bIns="0">
+            <a:spAutoFit/>
+          </a:bodyPr>
+          <a:lstStyle/>
+          <a:p>
+            <a:pPr algn="l">
+              <a:lnSpc>
+                <a:spcPct val="110000"/>
+              </a:lnSpc>
+              <a:spcAft>
+                <a:spcPts val="0"/>
+              </a:spcAft>
+            </a:pPr>
+            <a:r>
+              <a:rPr sz="1250" b="0">
+                <a:solidFill>
+                  <a:srgbClr val="52514E"/>
+                </a:solidFill>
+                <a:latin typeface="Calibri"/>
+              </a:rPr>
+              <a:t>CNN on raw URL characters only → still ties the tabular models</a:t>
+            </a:r>
+          </a:p>
+        </p:txBody>
+      </p:sp>
+      <p:sp>
+        <p:nvSpPr>
+          <p:cNvPr id="19" name="Rounded Rectangle 18"/>
+          <p:cNvSpPr/>
+          <p:nvPr/>
+        </p:nvSpPr>
+        <p:spPr>
+          <a:xfrm>
+            <a:off x="548640" y="5120640"/>
+            <a:ext cx="11094415" cy="566928"/>
+          </a:xfrm>
+          <a:prstGeom prst="roundRect">
+            <a:avLst>
+              <a:gd name="adj" fmla="val 16000"/>
+            </a:avLst>
+          </a:prstGeom>
+          <a:solidFill>
+            <a:srgbClr val="E7F2EE"/>
+          </a:solidFill>
+          <a:ln>
+            <a:noFill/>
+          </a:ln>
+          <a:effectLst/>
+        </p:spPr>
+        <p:style>
+          <a:lnRef idx="1">
+            <a:schemeClr val="accent1"/>
+          </a:lnRef>
+          <a:fillRef idx="3">
+            <a:schemeClr val="accent1"/>
+          </a:fillRef>
+          <a:effectRef idx="2">
+            <a:schemeClr val="accent1"/>
+          </a:effectRef>
+          <a:fontRef idx="minor">
+            <a:schemeClr val="lt1"/>
+          </a:fontRef>
+        </p:style>
+        <p:txBody>
+          <a:bodyPr rtlCol="0" anchor="ctr"/>
+          <a:lstStyle/>
+          <a:p>
+            <a:pPr algn="ctr"/>
+          </a:p>
+        </p:txBody>
+      </p:sp>
+      <p:sp>
+        <p:nvSpPr>
+          <p:cNvPr id="20" name="TextBox 19"/>
+          <p:cNvSpPr txBox="1"/>
+          <p:nvPr/>
+        </p:nvSpPr>
+        <p:spPr>
+          <a:xfrm>
+            <a:off x="804672" y="5120640"/>
+            <a:ext cx="10582351" cy="566928"/>
+          </a:xfrm>
+          <a:prstGeom prst="rect">
+            <a:avLst/>
+          </a:prstGeom>
+          <a:noFill/>
+        </p:spPr>
+        <p:txBody>
+          <a:bodyPr wrap="square" anchor="ctr" lIns="0" rIns="0" tIns="0" bIns="0">
+            <a:spAutoFit/>
+          </a:bodyPr>
+          <a:lstStyle/>
+          <a:p>
+            <a:pPr algn="l">
+              <a:lnSpc>
+                <a:spcPct val="100000"/>
+              </a:lnSpc>
+              <a:spcAft>
+                <a:spcPts val="0"/>
+              </a:spcAft>
+            </a:pPr>
+            <a:r>
+              <a:rPr sz="1400" b="1">
+                <a:solidFill>
+                  <a:srgbClr val="0E7A54"/>
+                </a:solidFill>
+                <a:latin typeface="Calibri"/>
+              </a:rPr>
+              <a:t>Takeaway   </a:t>
+            </a:r>
+            <a:r>
+              <a:rPr sz="1400" b="0">
+                <a:solidFill>
+                  <a:srgbClr val="0B0B0B"/>
+                </a:solidFill>
+                <a:latin typeface="Calibri"/>
+              </a:rPr>
+              <a:t>Three independent designs, one conclusion: PhiUSIIL's separability is intrinsic to the data — it goes all the way down to the raw characters.</a:t>
+            </a:r>
+          </a:p>
+        </p:txBody>
+      </p:sp>
+      <p:sp>
+        <p:nvSpPr>
+          <p:cNvPr id="21" name="TextBox 20"/>
+          <p:cNvSpPr txBox="1"/>
+          <p:nvPr/>
+        </p:nvSpPr>
+        <p:spPr>
+          <a:xfrm>
+            <a:off x="548640" y="5943600"/>
+            <a:ext cx="11064240" cy="457200"/>
+          </a:xfrm>
+          <a:prstGeom prst="rect">
+            <a:avLst/>
+          </a:prstGeom>
+          <a:noFill/>
+        </p:spPr>
+        <p:txBody>
+          <a:bodyPr wrap="square" anchor="t" lIns="0" rIns="0" tIns="0" bIns="0">
+            <a:spAutoFit/>
+          </a:bodyPr>
+          <a:lstStyle/>
+          <a:p>
+            <a:pPr algn="ctr">
+              <a:lnSpc>
+                <a:spcPct val="100000"/>
+              </a:lnSpc>
+              <a:spcAft>
+                <a:spcPts val="0"/>
+              </a:spcAft>
+            </a:pPr>
+            <a:r>
+              <a:rPr sz="1400" b="0">
+                <a:solidFill>
+                  <a:srgbClr val="52514E"/>
+                </a:solidFill>
+                <a:latin typeface="Calibri"/>
+              </a:rPr>
+              <a:t>That consistency — not any single accuracy number — is the project's result.</a:t>
+            </a:r>
+          </a:p>
+        </p:txBody>
+      </p:sp>
+    </p:spTree>
+  </p:cSld>
+  <p:clrMapOvr>
+    <a:masterClrMapping/>
+  </p:clrMapOvr>
+</p:sld>
+</file>
+
+<file path=ppt/slides/slide31.xml><?xml version="1.0" encoding="utf-8"?>
+<p:sld xmlns:a="http://schemas.openxmlformats.org/drawingml/2006/main" xmlns:p="http://schemas.openxmlformats.org/presentationml/2006/main" xmlns:r="http://schemas.openxmlformats.org/officeDocument/2006/relationships">
+  <p:cSld>
+    <p:bg>
+      <p:bgPr>
+        <a:solidFill>
+          <a:srgbClr val="FCFCFB"/>
+        </a:solidFill>
+        <a:effectLst/>
+      </p:bgPr>
+    </p:bg>
+    <p:spTree>
+      <p:nvGrpSpPr>
+        <p:cNvPr id="1" name=""/>
+        <p:cNvGrpSpPr/>
+        <p:nvPr/>
+      </p:nvGrpSpPr>
+      <p:grpSpPr/>
+      <p:sp>
+        <p:nvSpPr>
+          <p:cNvPr id="2" name="Rectangle 1"/>
+          <p:cNvSpPr/>
+          <p:nvPr/>
+        </p:nvSpPr>
+        <p:spPr>
+          <a:xfrm>
+            <a:off x="0" y="0"/>
+            <a:ext cx="12191695" cy="128016"/>
+          </a:xfrm>
+          <a:prstGeom prst="rect">
+            <a:avLst/>
+          </a:prstGeom>
+          <a:solidFill>
+            <a:srgbClr val="0E7A54"/>
+          </a:solidFill>
+          <a:ln>
+            <a:noFill/>
+          </a:ln>
+          <a:effectLst/>
+        </p:spPr>
+        <p:style>
+          <a:lnRef idx="1">
+            <a:schemeClr val="accent1"/>
+          </a:lnRef>
+          <a:fillRef idx="3">
+            <a:schemeClr val="accent1"/>
+          </a:fillRef>
+          <a:effectRef idx="2">
+            <a:schemeClr val="accent1"/>
+          </a:effectRef>
+          <a:fontRef idx="minor">
+            <a:schemeClr val="lt1"/>
+          </a:fontRef>
+        </p:style>
+        <p:txBody>
+          <a:bodyPr rtlCol="0" anchor="ctr"/>
+          <a:lstStyle/>
+          <a:p>
+            <a:pPr algn="ctr"/>
+          </a:p>
+        </p:txBody>
+      </p:sp>
+      <p:sp>
+        <p:nvSpPr>
+          <p:cNvPr id="3" name="TextBox 2"/>
+          <p:cNvSpPr txBox="1"/>
+          <p:nvPr/>
+        </p:nvSpPr>
+        <p:spPr>
+          <a:xfrm>
+            <a:off x="548640" y="347472"/>
+            <a:ext cx="11094415" cy="274320"/>
+          </a:xfrm>
+          <a:prstGeom prst="rect">
+            <a:avLst/>
+          </a:prstGeom>
+          <a:noFill/>
+        </p:spPr>
+        <p:txBody>
+          <a:bodyPr wrap="square" anchor="t" lIns="0" rIns="0" tIns="0" bIns="0">
+            <a:spAutoFit/>
+          </a:bodyPr>
+          <a:lstStyle/>
+          <a:p>
+            <a:pPr algn="l">
+              <a:lnSpc>
+                <a:spcPct val="100000"/>
+              </a:lnSpc>
+              <a:spcAft>
+                <a:spcPts val="0"/>
+              </a:spcAft>
+            </a:pPr>
+            <a:r>
+              <a:rPr sz="1250" b="1">
+                <a:solidFill>
+                  <a:srgbClr val="0E7A54"/>
+                </a:solidFill>
+                <a:latin typeface="Calibri"/>
+              </a:rPr>
+              <a:t>CLOSING · BEING HONEST ABOUT THE EDGES</a:t>
+            </a:r>
+          </a:p>
+        </p:txBody>
+      </p:sp>
+      <p:sp>
+        <p:nvSpPr>
+          <p:cNvPr id="4" name="TextBox 3"/>
+          <p:cNvSpPr txBox="1"/>
+          <p:nvPr/>
+        </p:nvSpPr>
+        <p:spPr>
+          <a:xfrm>
+            <a:off x="548640" y="603504"/>
+            <a:ext cx="11094415" cy="777240"/>
+          </a:xfrm>
+          <a:prstGeom prst="rect">
+            <a:avLst/>
+          </a:prstGeom>
+          <a:noFill/>
+        </p:spPr>
+        <p:txBody>
+          <a:bodyPr wrap="square" anchor="t" lIns="0" rIns="0" tIns="0" bIns="0">
+            <a:spAutoFit/>
+          </a:bodyPr>
+          <a:lstStyle/>
+          <a:p>
+            <a:pPr algn="l">
+              <a:lnSpc>
+                <a:spcPct val="100000"/>
+              </a:lnSpc>
+              <a:spcAft>
+                <a:spcPts val="0"/>
+              </a:spcAft>
+            </a:pPr>
+            <a:r>
+              <a:rPr sz="3000" b="1">
+                <a:solidFill>
+                  <a:srgbClr val="0B0B0B"/>
+                </a:solidFill>
+                <a:latin typeface="Calibri"/>
+              </a:rPr>
+              <a:t>Limitations &amp; next steps</a:t>
+            </a:r>
+          </a:p>
+        </p:txBody>
+      </p:sp>
+      <p:sp>
+        <p:nvSpPr>
+          <p:cNvPr id="5" name="TextBox 4"/>
+          <p:cNvSpPr txBox="1"/>
+          <p:nvPr/>
+        </p:nvSpPr>
+        <p:spPr>
+          <a:xfrm>
+            <a:off x="548640" y="6519672"/>
+            <a:ext cx="8229600" cy="274320"/>
+          </a:xfrm>
+          <a:prstGeom prst="rect">
+            <a:avLst/>
+          </a:prstGeom>
+          <a:noFill/>
+        </p:spPr>
+        <p:txBody>
+          <a:bodyPr wrap="square" anchor="t" lIns="0" rIns="0" tIns="0" bIns="0">
+            <a:spAutoFit/>
+          </a:bodyPr>
+          <a:lstStyle/>
+          <a:p>
+            <a:pPr algn="l">
+              <a:lnSpc>
+                <a:spcPct val="100000"/>
+              </a:lnSpc>
+              <a:spcAft>
+                <a:spcPts val="0"/>
+              </a:spcAft>
+            </a:pPr>
+            <a:r>
+              <a:rPr sz="950" b="0">
+                <a:solidFill>
+                  <a:srgbClr val="898781"/>
+                </a:solidFill>
+                <a:latin typeface="Calibri"/>
+              </a:rPr>
+              <a:t>AAI-501 · Group 2 · Phishing URL Detection on PhiUSIIL</a:t>
+            </a:r>
+          </a:p>
+        </p:txBody>
+      </p:sp>
+      <p:sp>
+        <p:nvSpPr>
+          <p:cNvPr id="6" name="TextBox 5"/>
+          <p:cNvSpPr txBox="1"/>
+          <p:nvPr/>
+        </p:nvSpPr>
+        <p:spPr>
+          <a:xfrm>
+            <a:off x="10728655" y="6519672"/>
+            <a:ext cx="914400" cy="274320"/>
+          </a:xfrm>
+          <a:prstGeom prst="rect">
+            <a:avLst/>
+          </a:prstGeom>
+          <a:noFill/>
+        </p:spPr>
+        <p:txBody>
+          <a:bodyPr wrap="square" anchor="t" lIns="0" rIns="0" tIns="0" bIns="0">
+            <a:spAutoFit/>
+          </a:bodyPr>
+          <a:lstStyle/>
+          <a:p>
+            <a:pPr algn="r">
+              <a:lnSpc>
+                <a:spcPct val="100000"/>
+              </a:lnSpc>
+              <a:spcAft>
+                <a:spcPts val="0"/>
+              </a:spcAft>
+            </a:pPr>
+            <a:r>
+              <a:rPr sz="950" b="0">
+                <a:solidFill>
+                  <a:srgbClr val="898781"/>
+                </a:solidFill>
+                <a:latin typeface="Calibri"/>
+              </a:rPr>
+              <a:t>31</a:t>
+            </a:r>
+          </a:p>
+        </p:txBody>
+      </p:sp>
+      <p:sp>
+        <p:nvSpPr>
+          <p:cNvPr id="7" name="TextBox 6"/>
+          <p:cNvSpPr txBox="1"/>
+          <p:nvPr/>
+        </p:nvSpPr>
+        <p:spPr>
+          <a:xfrm>
+            <a:off x="548640" y="1645920"/>
+            <a:ext cx="5394960" cy="365760"/>
+          </a:xfrm>
+          <a:prstGeom prst="rect">
+            <a:avLst/>
+          </a:prstGeom>
+          <a:noFill/>
+        </p:spPr>
+        <p:txBody>
+          <a:bodyPr wrap="square" anchor="t" lIns="0" rIns="0" tIns="0" bIns="0">
+            <a:spAutoFit/>
+          </a:bodyPr>
+          <a:lstStyle/>
+          <a:p>
+            <a:pPr algn="l">
+              <a:lnSpc>
+                <a:spcPct val="100000"/>
+              </a:lnSpc>
+              <a:spcAft>
+                <a:spcPts val="0"/>
+              </a:spcAft>
+            </a:pPr>
+            <a:r>
+              <a:rPr sz="1700" b="1">
+                <a:solidFill>
+                  <a:srgbClr val="0B0B0B"/>
+                </a:solidFill>
+                <a:latin typeface="Calibri"/>
+              </a:rPr>
+              <a:t>Limitations</a:t>
+            </a:r>
+          </a:p>
+        </p:txBody>
+      </p:sp>
+      <p:sp>
+        <p:nvSpPr>
+          <p:cNvPr id="8" name="TextBox 7"/>
+          <p:cNvSpPr txBox="1"/>
+          <p:nvPr/>
+        </p:nvSpPr>
+        <p:spPr>
+          <a:xfrm>
+            <a:off x="548640" y="2103120"/>
+            <a:ext cx="5394960" cy="3840480"/>
+          </a:xfrm>
+          <a:prstGeom prst="rect">
+            <a:avLst/>
+          </a:prstGeom>
+          <a:noFill/>
+        </p:spPr>
+        <p:txBody>
+          <a:bodyPr wrap="square" anchor="t" lIns="0" rIns="0" tIns="0" bIns="0">
+            <a:spAutoFit/>
+          </a:bodyPr>
+          <a:lstStyle/>
+          <a:p>
+            <a:pPr algn="l">
+              <a:lnSpc>
+                <a:spcPct val="105000"/>
+              </a:lnSpc>
+              <a:spcAft>
+                <a:spcPts val="900"/>
+              </a:spcAft>
+            </a:pPr>
+            <a:r>
+              <a:rPr sz="1350" b="1">
+                <a:solidFill>
+                  <a:srgbClr val="E34948"/>
+                </a:solidFill>
+                <a:latin typeface="Calibri"/>
+              </a:rPr>
+              <a:t>•  </a:t>
+            </a:r>
+            <a:r>
+              <a:rPr sz="1350" b="1">
+                <a:solidFill>
+                  <a:srgbClr val="0B0B0B"/>
+                </a:solidFill>
+                <a:latin typeface="Calibri"/>
+              </a:rPr>
+              <a:t>The external corpus is from 2019:</a:t>
+            </a:r>
+            <a:r>
+              <a:rPr sz="1350" b="0">
+                <a:solidFill>
+                  <a:srgbClr val="52514E"/>
+                </a:solidFill>
+                <a:latin typeface="Calibri"/>
+              </a:rPr>
+              <a:t> the 45.3% collapse mixes collection differences with years of temporal drift — both real, not separable here.</a:t>
+            </a:r>
+          </a:p>
+          <a:p>
+            <a:pPr algn="l">
+              <a:lnSpc>
+                <a:spcPct val="105000"/>
+              </a:lnSpc>
+              <a:spcAft>
+                <a:spcPts val="900"/>
+              </a:spcAft>
+            </a:pPr>
+            <a:r>
+              <a:rPr sz="1350" b="1">
+                <a:solidFill>
+                  <a:srgbClr val="E34948"/>
+                </a:solidFill>
+                <a:latin typeface="Calibri"/>
+              </a:rPr>
+              <a:t>•  </a:t>
+            </a:r>
+            <a:r>
+              <a:rPr sz="1350" b="1">
+                <a:solidFill>
+                  <a:srgbClr val="0B0B0B"/>
+                </a:solidFill>
+                <a:latin typeface="Calibri"/>
+              </a:rPr>
+              <a:t>Saturated metrics:</a:t>
+            </a:r>
+            <a:r>
+              <a:rPr sz="1350" b="0">
+                <a:solidFill>
+                  <a:srgbClr val="52514E"/>
+                </a:solidFill>
+                <a:latin typeface="Calibri"/>
+              </a:rPr>
+              <a:t> accuracy ordering among our models is noise; we say so rather than rank them.</a:t>
+            </a:r>
+          </a:p>
+          <a:p>
+            <a:pPr algn="l">
+              <a:lnSpc>
+                <a:spcPct val="105000"/>
+              </a:lnSpc>
+              <a:spcAft>
+                <a:spcPts val="900"/>
+              </a:spcAft>
+            </a:pPr>
+            <a:r>
+              <a:rPr sz="1350" b="1">
+                <a:solidFill>
+                  <a:srgbClr val="E34948"/>
+                </a:solidFill>
+                <a:latin typeface="Calibri"/>
+              </a:rPr>
+              <a:t>•  </a:t>
+            </a:r>
+            <a:r>
+              <a:rPr sz="1350" b="1">
+                <a:solidFill>
+                  <a:srgbClr val="0B0B0B"/>
+                </a:solidFill>
+                <a:latin typeface="Calibri"/>
+              </a:rPr>
+              <a:t>Illustrative costs:</a:t>
+            </a:r>
+            <a:r>
+              <a:rPr sz="1350" b="0">
+                <a:solidFill>
+                  <a:srgbClr val="52514E"/>
+                </a:solidFill>
+                <a:latin typeface="Calibri"/>
+              </a:rPr>
+              <a:t> the $500 / $5 asymmetry is defensible but not sourced from our own deployment.</a:t>
+            </a:r>
+          </a:p>
+          <a:p>
+            <a:pPr algn="l">
+              <a:lnSpc>
+                <a:spcPct val="105000"/>
+              </a:lnSpc>
+              <a:spcAft>
+                <a:spcPts val="900"/>
+              </a:spcAft>
+            </a:pPr>
+            <a:r>
+              <a:rPr sz="1350" b="1">
+                <a:solidFill>
+                  <a:srgbClr val="E34948"/>
+                </a:solidFill>
+                <a:latin typeface="Calibri"/>
+              </a:rPr>
+              <a:t>•  </a:t>
+            </a:r>
+            <a:r>
+              <a:rPr sz="1350" b="1">
+                <a:solidFill>
+                  <a:srgbClr val="0B0B0B"/>
+                </a:solidFill>
+                <a:latin typeface="Calibri"/>
+              </a:rPr>
+              <a:t>Platform siblings</a:t>
+            </a:r>
+            <a:r>
+              <a:rPr sz="1350" b="0">
+                <a:solidFill>
+                  <a:srgbClr val="52514E"/>
+                </a:solidFill>
+                <a:latin typeface="Calibri"/>
+              </a:rPr>
+              <a:t> (web.app, firebaseapp.com) can still straddle the split; the CNN is more exposed to this than the linear model.</a:t>
+            </a:r>
+          </a:p>
+        </p:txBody>
+      </p:sp>
+      <p:sp>
+        <p:nvSpPr>
+          <p:cNvPr id="9" name="TextBox 8"/>
+          <p:cNvSpPr txBox="1"/>
+          <p:nvPr/>
+        </p:nvSpPr>
+        <p:spPr>
+          <a:xfrm>
+            <a:off x="6400800" y="1645920"/>
+            <a:ext cx="5212080" cy="365760"/>
+          </a:xfrm>
+          <a:prstGeom prst="rect">
+            <a:avLst/>
+          </a:prstGeom>
+          <a:noFill/>
+        </p:spPr>
+        <p:txBody>
+          <a:bodyPr wrap="square" anchor="t" lIns="0" rIns="0" tIns="0" bIns="0">
+            <a:spAutoFit/>
+          </a:bodyPr>
+          <a:lstStyle/>
+          <a:p>
+            <a:pPr algn="l">
+              <a:lnSpc>
+                <a:spcPct val="100000"/>
+              </a:lnSpc>
+              <a:spcAft>
+                <a:spcPts val="0"/>
+              </a:spcAft>
+            </a:pPr>
+            <a:r>
+              <a:rPr sz="1700" b="1">
+                <a:solidFill>
+                  <a:srgbClr val="0B0B0B"/>
+                </a:solidFill>
+                <a:latin typeface="Calibri"/>
+              </a:rPr>
+              <a:t>Next steps</a:t>
+            </a:r>
+          </a:p>
+        </p:txBody>
+      </p:sp>
+      <p:sp>
+        <p:nvSpPr>
+          <p:cNvPr id="10" name="TextBox 9"/>
+          <p:cNvSpPr txBox="1"/>
+          <p:nvPr/>
+        </p:nvSpPr>
+        <p:spPr>
+          <a:xfrm>
+            <a:off x="6400800" y="2103120"/>
+            <a:ext cx="5212080" cy="3840480"/>
+          </a:xfrm>
+          <a:prstGeom prst="rect">
+            <a:avLst/>
+          </a:prstGeom>
+          <a:noFill/>
+        </p:spPr>
+        <p:txBody>
+          <a:bodyPr wrap="square" anchor="t" lIns="0" rIns="0" tIns="0" bIns="0">
+            <a:spAutoFit/>
+          </a:bodyPr>
+          <a:lstStyle/>
+          <a:p>
+            <a:pPr algn="l">
+              <a:lnSpc>
+                <a:spcPct val="105000"/>
+              </a:lnSpc>
+              <a:spcAft>
+                <a:spcPts val="900"/>
+              </a:spcAft>
+            </a:pPr>
+            <a:r>
+              <a:rPr sz="1350" b="1">
+                <a:solidFill>
+                  <a:srgbClr val="0E7A54"/>
+                </a:solidFill>
+                <a:latin typeface="Calibri"/>
+              </a:rPr>
+              <a:t>•  </a:t>
+            </a:r>
+            <a:r>
+              <a:rPr sz="1350" b="1">
+                <a:solidFill>
+                  <a:srgbClr val="0B0B0B"/>
+                </a:solidFill>
+                <a:latin typeface="Calibri"/>
+              </a:rPr>
+              <a:t>Token-level brand matching:</a:t>
+            </a:r>
+            <a:r>
+              <a:rPr sz="1350" b="0">
+                <a:solidFill>
+                  <a:srgbClr val="52514E"/>
+                </a:solidFill>
+                <a:latin typeface="Calibri"/>
+              </a:rPr>
+              <a:t> the error analysis shows whole-string edit distance misses compound-domain typosquats like coinbesaprime-logi.</a:t>
+            </a:r>
+          </a:p>
+          <a:p>
+            <a:pPr algn="l">
+              <a:lnSpc>
+                <a:spcPct val="105000"/>
+              </a:lnSpc>
+              <a:spcAft>
+                <a:spcPts val="900"/>
+              </a:spcAft>
+            </a:pPr>
+            <a:r>
+              <a:rPr sz="1350" b="1">
+                <a:solidFill>
+                  <a:srgbClr val="0E7A54"/>
+                </a:solidFill>
+                <a:latin typeface="Calibri"/>
+              </a:rPr>
+              <a:t>•  </a:t>
+            </a:r>
+            <a:r>
+              <a:rPr sz="1350" b="1">
+                <a:solidFill>
+                  <a:srgbClr val="0B0B0B"/>
+                </a:solidFill>
+                <a:latin typeface="Calibri"/>
+              </a:rPr>
+              <a:t>Kit-level clustering:</a:t>
+            </a:r>
+            <a:r>
+              <a:rPr sz="1350" b="0">
+                <a:solidFill>
+                  <a:srgbClr val="52514E"/>
+                </a:solidFill>
+                <a:latin typeface="Calibri"/>
+              </a:rPr>
+              <a:t> feed the micro-cluster structure HDBSCAN surfaced into an operational grouping of phishing campaigns.</a:t>
+            </a:r>
+          </a:p>
+          <a:p>
+            <a:pPr algn="l">
+              <a:lnSpc>
+                <a:spcPct val="105000"/>
+              </a:lnSpc>
+              <a:spcAft>
+                <a:spcPts val="900"/>
+              </a:spcAft>
+            </a:pPr>
+            <a:r>
+              <a:rPr sz="1350" b="1">
+                <a:solidFill>
+                  <a:srgbClr val="0E7A54"/>
+                </a:solidFill>
+                <a:latin typeface="Calibri"/>
+              </a:rPr>
+              <a:t>•  </a:t>
+            </a:r>
+            <a:r>
+              <a:rPr sz="1350" b="1">
+                <a:solidFill>
+                  <a:srgbClr val="0B0B0B"/>
+                </a:solidFill>
+                <a:latin typeface="Calibri"/>
+              </a:rPr>
+              <a:t>Fully platform-aware split:</a:t>
+            </a:r>
+            <a:r>
+              <a:rPr sz="1350" b="0">
+                <a:solidFill>
+                  <a:srgbClr val="52514E"/>
+                </a:solidFill>
+                <a:latin typeface="Calibri"/>
+              </a:rPr>
+              <a:t> close the last grouping gap the eTLD+1 analysis identified.</a:t>
+            </a:r>
+          </a:p>
+        </p:txBody>
+      </p:sp>
+    </p:spTree>
+  </p:cSld>
+  <p:clrMapOvr>
+    <a:masterClrMapping/>
+  </p:clrMapOvr>
+</p:sld>
+</file>
+
+<file path=ppt/slides/slide32.xml><?xml version="1.0" encoding="utf-8"?>
+<p:sld xmlns:a="http://schemas.openxmlformats.org/drawingml/2006/main" xmlns:p="http://schemas.openxmlformats.org/presentationml/2006/main" xmlns:r="http://schemas.openxmlformats.org/officeDocument/2006/relationships">
+  <p:cSld>
+    <p:bg>
+      <p:bgPr>
+        <a:solidFill>
+          <a:srgbClr val="FCFCFB"/>
+        </a:solidFill>
+        <a:effectLst/>
+      </p:bgPr>
+    </p:bg>
+    <p:spTree>
+      <p:nvGrpSpPr>
+        <p:cNvPr id="1" name=""/>
+        <p:cNvGrpSpPr/>
+        <p:nvPr/>
+      </p:nvGrpSpPr>
+      <p:grpSpPr/>
+      <p:sp>
+        <p:nvSpPr>
+          <p:cNvPr id="2" name="Rectangle 1"/>
+          <p:cNvSpPr/>
+          <p:nvPr/>
+        </p:nvSpPr>
+        <p:spPr>
+          <a:xfrm>
+            <a:off x="0" y="0"/>
+            <a:ext cx="12191695" cy="128016"/>
+          </a:xfrm>
+          <a:prstGeom prst="rect">
+            <a:avLst/>
+          </a:prstGeom>
+          <a:solidFill>
+            <a:srgbClr val="0E7A54"/>
+          </a:solidFill>
+          <a:ln>
+            <a:noFill/>
+          </a:ln>
+          <a:effectLst/>
+        </p:spPr>
+        <p:style>
+          <a:lnRef idx="1">
+            <a:schemeClr val="accent1"/>
+          </a:lnRef>
+          <a:fillRef idx="3">
+            <a:schemeClr val="accent1"/>
+          </a:fillRef>
+          <a:effectRef idx="2">
+            <a:schemeClr val="accent1"/>
+          </a:effectRef>
+          <a:fontRef idx="minor">
+            <a:schemeClr val="lt1"/>
+          </a:fontRef>
+        </p:style>
+        <p:txBody>
+          <a:bodyPr rtlCol="0" anchor="ctr"/>
+          <a:lstStyle/>
+          <a:p>
+            <a:pPr algn="ctr"/>
+          </a:p>
+        </p:txBody>
+      </p:sp>
+      <p:sp>
+        <p:nvSpPr>
+          <p:cNvPr id="3" name="TextBox 2"/>
+          <p:cNvSpPr txBox="1"/>
+          <p:nvPr/>
+        </p:nvSpPr>
+        <p:spPr>
+          <a:xfrm>
+            <a:off x="548640" y="347472"/>
+            <a:ext cx="11094415" cy="274320"/>
+          </a:xfrm>
+          <a:prstGeom prst="rect">
+            <a:avLst/>
+          </a:prstGeom>
+          <a:noFill/>
+        </p:spPr>
+        <p:txBody>
+          <a:bodyPr wrap="square" anchor="t" lIns="0" rIns="0" tIns="0" bIns="0">
+            <a:spAutoFit/>
+          </a:bodyPr>
+          <a:lstStyle/>
+          <a:p>
+            <a:pPr algn="l">
+              <a:lnSpc>
+                <a:spcPct val="100000"/>
+              </a:lnSpc>
+              <a:spcAft>
+                <a:spcPts val="0"/>
+              </a:spcAft>
+            </a:pPr>
+            <a:r>
+              <a:rPr sz="1250" b="1">
+                <a:solidFill>
+                  <a:srgbClr val="0E7A54"/>
+                </a:solidFill>
+                <a:latin typeface="Calibri"/>
+              </a:rPr>
+              <a:t>CLOSING</a:t>
+            </a:r>
+          </a:p>
+        </p:txBody>
+      </p:sp>
+      <p:sp>
+        <p:nvSpPr>
+          <p:cNvPr id="4" name="TextBox 3"/>
+          <p:cNvSpPr txBox="1"/>
+          <p:nvPr/>
+        </p:nvSpPr>
+        <p:spPr>
+          <a:xfrm>
+            <a:off x="548640" y="603504"/>
+            <a:ext cx="11094415" cy="777240"/>
+          </a:xfrm>
+          <a:prstGeom prst="rect">
+            <a:avLst/>
+          </a:prstGeom>
+          <a:noFill/>
+        </p:spPr>
+        <p:txBody>
+          <a:bodyPr wrap="square" anchor="t" lIns="0" rIns="0" tIns="0" bIns="0">
+            <a:spAutoFit/>
+          </a:bodyPr>
+          <a:lstStyle/>
+          <a:p>
+            <a:pPr algn="l">
+              <a:lnSpc>
+                <a:spcPct val="100000"/>
+              </a:lnSpc>
+              <a:spcAft>
+                <a:spcPts val="0"/>
+              </a:spcAft>
+            </a:pPr>
+            <a:r>
+              <a:rPr sz="3000" b="1">
+                <a:solidFill>
+                  <a:srgbClr val="0B0B0B"/>
+                </a:solidFill>
+                <a:latin typeface="Calibri"/>
+              </a:rPr>
+              <a:t>What we'd tell the next team</a:t>
+            </a:r>
+          </a:p>
+        </p:txBody>
+      </p:sp>
+      <p:sp>
+        <p:nvSpPr>
+          <p:cNvPr id="5" name="TextBox 4"/>
+          <p:cNvSpPr txBox="1"/>
+          <p:nvPr/>
+        </p:nvSpPr>
+        <p:spPr>
+          <a:xfrm>
+            <a:off x="548640" y="6519672"/>
+            <a:ext cx="8229600" cy="274320"/>
+          </a:xfrm>
+          <a:prstGeom prst="rect">
+            <a:avLst/>
+          </a:prstGeom>
+          <a:noFill/>
+        </p:spPr>
+        <p:txBody>
+          <a:bodyPr wrap="square" anchor="t" lIns="0" rIns="0" tIns="0" bIns="0">
+            <a:spAutoFit/>
+          </a:bodyPr>
+          <a:lstStyle/>
+          <a:p>
+            <a:pPr algn="l">
+              <a:lnSpc>
+                <a:spcPct val="100000"/>
+              </a:lnSpc>
+              <a:spcAft>
+                <a:spcPts val="0"/>
+              </a:spcAft>
+            </a:pPr>
+            <a:r>
+              <a:rPr sz="950" b="0">
+                <a:solidFill>
+                  <a:srgbClr val="898781"/>
+                </a:solidFill>
+                <a:latin typeface="Calibri"/>
+              </a:rPr>
+              <a:t>AAI-501 · Group 2 · Phishing URL Detection on PhiUSIIL</a:t>
+            </a:r>
+          </a:p>
+        </p:txBody>
+      </p:sp>
+      <p:sp>
+        <p:nvSpPr>
+          <p:cNvPr id="6" name="TextBox 5"/>
+          <p:cNvSpPr txBox="1"/>
+          <p:nvPr/>
+        </p:nvSpPr>
+        <p:spPr>
+          <a:xfrm>
+            <a:off x="10728655" y="6519672"/>
+            <a:ext cx="914400" cy="274320"/>
+          </a:xfrm>
+          <a:prstGeom prst="rect">
+            <a:avLst/>
+          </a:prstGeom>
+          <a:noFill/>
+        </p:spPr>
+        <p:txBody>
+          <a:bodyPr wrap="square" anchor="t" lIns="0" rIns="0" tIns="0" bIns="0">
+            <a:spAutoFit/>
+          </a:bodyPr>
+          <a:lstStyle/>
+          <a:p>
+            <a:pPr algn="r">
+              <a:lnSpc>
+                <a:spcPct val="100000"/>
+              </a:lnSpc>
+              <a:spcAft>
+                <a:spcPts val="0"/>
+              </a:spcAft>
+            </a:pPr>
+            <a:r>
+              <a:rPr sz="950" b="0">
+                <a:solidFill>
+                  <a:srgbClr val="898781"/>
+                </a:solidFill>
+                <a:latin typeface="Calibri"/>
+              </a:rPr>
+              <a:t>32</a:t>
+            </a:r>
+          </a:p>
+        </p:txBody>
+      </p:sp>
+      <p:sp>
+        <p:nvSpPr>
+          <p:cNvPr id="7" name="Rounded Rectangle 6"/>
+          <p:cNvSpPr/>
+          <p:nvPr/>
+        </p:nvSpPr>
+        <p:spPr>
+          <a:xfrm>
+            <a:off x="548640" y="1737360"/>
+            <a:ext cx="5394960" cy="1508760"/>
+          </a:xfrm>
+          <a:prstGeom prst="roundRect">
+            <a:avLst>
+              <a:gd name="adj" fmla="val 8000"/>
+            </a:avLst>
+          </a:prstGeom>
+          <a:solidFill>
+            <a:srgbClr val="F0F6FC"/>
+          </a:solidFill>
+          <a:ln>
+            <a:noFill/>
+          </a:ln>
+          <a:effectLst/>
+        </p:spPr>
+        <p:style>
+          <a:lnRef idx="1">
+            <a:schemeClr val="accent1"/>
+          </a:lnRef>
+          <a:fillRef idx="3">
+            <a:schemeClr val="accent1"/>
+          </a:fillRef>
+          <a:effectRef idx="2">
+            <a:schemeClr val="accent1"/>
+          </a:effectRef>
+          <a:fontRef idx="minor">
+            <a:schemeClr val="lt1"/>
+          </a:fontRef>
+        </p:style>
+        <p:txBody>
+          <a:bodyPr rtlCol="0" anchor="ctr"/>
+          <a:lstStyle/>
+          <a:p>
+            <a:pPr algn="ctr"/>
+          </a:p>
+        </p:txBody>
+      </p:sp>
+      <p:sp>
+        <p:nvSpPr>
+          <p:cNvPr id="8" name="TextBox 7"/>
+          <p:cNvSpPr txBox="1"/>
+          <p:nvPr/>
+        </p:nvSpPr>
+        <p:spPr>
+          <a:xfrm>
+            <a:off x="804672" y="1883664"/>
+            <a:ext cx="4892040" cy="548640"/>
+          </a:xfrm>
+          <a:prstGeom prst="rect">
+            <a:avLst/>
+          </a:prstGeom>
+          <a:noFill/>
+        </p:spPr>
+        <p:txBody>
+          <a:bodyPr wrap="square" anchor="t" lIns="0" rIns="0" tIns="0" bIns="0">
+            <a:spAutoFit/>
+          </a:bodyPr>
+          <a:lstStyle/>
+          <a:p>
+            <a:pPr algn="l">
+              <a:lnSpc>
+                <a:spcPct val="100000"/>
+              </a:lnSpc>
+              <a:spcAft>
+                <a:spcPts val="0"/>
+              </a:spcAft>
+            </a:pPr>
+            <a:r>
+              <a:rPr sz="1550" b="1">
+                <a:solidFill>
+                  <a:srgbClr val="2A78D6"/>
+                </a:solidFill>
+                <a:latin typeface="Calibri"/>
+              </a:rPr>
+              <a:t>Audit before you model.</a:t>
+            </a:r>
+          </a:p>
+        </p:txBody>
+      </p:sp>
+      <p:sp>
+        <p:nvSpPr>
+          <p:cNvPr id="9" name="TextBox 8"/>
+          <p:cNvSpPr txBox="1"/>
+          <p:nvPr/>
+        </p:nvSpPr>
+        <p:spPr>
+          <a:xfrm>
+            <a:off x="804672" y="2395728"/>
+            <a:ext cx="4892040" cy="777240"/>
+          </a:xfrm>
+          <a:prstGeom prst="rect">
+            <a:avLst/>
+          </a:prstGeom>
+          <a:noFill/>
+        </p:spPr>
+        <p:txBody>
+          <a:bodyPr wrap="square" anchor="t" lIns="0" rIns="0" tIns="0" bIns="0">
+            <a:spAutoFit/>
+          </a:bodyPr>
+          <a:lstStyle/>
+          <a:p>
+            <a:pPr algn="l">
+              <a:lnSpc>
+                <a:spcPct val="105000"/>
+              </a:lnSpc>
+              <a:spcAft>
+                <a:spcPts val="0"/>
+              </a:spcAft>
+            </a:pPr>
+            <a:r>
+              <a:rPr sz="1200" b="0">
+                <a:solidFill>
+                  <a:srgbClr val="52514E"/>
+                </a:solidFill>
+                <a:latin typeface="Calibri"/>
+              </a:rPr>
+              <a:t>An hour of leakage checking reframed our entire project — and saved us from a meaningless 100%.</a:t>
+            </a:r>
+          </a:p>
+        </p:txBody>
+      </p:sp>
+      <p:sp>
+        <p:nvSpPr>
+          <p:cNvPr id="10" name="Rounded Rectangle 9"/>
+          <p:cNvSpPr/>
+          <p:nvPr/>
+        </p:nvSpPr>
+        <p:spPr>
+          <a:xfrm>
+            <a:off x="6263640" y="1737360"/>
+            <a:ext cx="5394960" cy="1508760"/>
+          </a:xfrm>
+          <a:prstGeom prst="roundRect">
+            <a:avLst>
+              <a:gd name="adj" fmla="val 8000"/>
+            </a:avLst>
+          </a:prstGeom>
+          <a:solidFill>
+            <a:srgbClr val="FEF4F1"/>
+          </a:solidFill>
+          <a:ln>
+            <a:noFill/>
+          </a:ln>
+          <a:effectLst/>
+        </p:spPr>
+        <p:style>
+          <a:lnRef idx="1">
+            <a:schemeClr val="accent1"/>
+          </a:lnRef>
+          <a:fillRef idx="3">
+            <a:schemeClr val="accent1"/>
+          </a:fillRef>
+          <a:effectRef idx="2">
+            <a:schemeClr val="accent1"/>
+          </a:effectRef>
+          <a:fontRef idx="minor">
+            <a:schemeClr val="lt1"/>
+          </a:fontRef>
+        </p:style>
+        <p:txBody>
+          <a:bodyPr rtlCol="0" anchor="ctr"/>
+          <a:lstStyle/>
+          <a:p>
+            <a:pPr algn="ctr"/>
+          </a:p>
+        </p:txBody>
+      </p:sp>
+      <p:sp>
+        <p:nvSpPr>
+          <p:cNvPr id="11" name="TextBox 10"/>
+          <p:cNvSpPr txBox="1"/>
+          <p:nvPr/>
+        </p:nvSpPr>
+        <p:spPr>
+          <a:xfrm>
+            <a:off x="6519672" y="1883664"/>
+            <a:ext cx="4892040" cy="548640"/>
+          </a:xfrm>
+          <a:prstGeom prst="rect">
+            <a:avLst/>
+          </a:prstGeom>
+          <a:noFill/>
+        </p:spPr>
+        <p:txBody>
+          <a:bodyPr wrap="square" anchor="t" lIns="0" rIns="0" tIns="0" bIns="0">
+            <a:spAutoFit/>
+          </a:bodyPr>
+          <a:lstStyle/>
+          <a:p>
+            <a:pPr algn="l">
+              <a:lnSpc>
+                <a:spcPct val="100000"/>
+              </a:lnSpc>
+              <a:spcAft>
+                <a:spcPts val="0"/>
+              </a:spcAft>
+            </a:pPr>
+            <a:r>
+              <a:rPr sz="1550" b="1">
+                <a:solidFill>
+                  <a:srgbClr val="EB6834"/>
+                </a:solidFill>
+                <a:latin typeface="Calibri"/>
+              </a:rPr>
+              <a:t>Report the clean AND the realistic regime.</a:t>
+            </a:r>
+          </a:p>
+        </p:txBody>
+      </p:sp>
+      <p:sp>
+        <p:nvSpPr>
+          <p:cNvPr id="12" name="TextBox 11"/>
+          <p:cNvSpPr txBox="1"/>
+          <p:nvPr/>
+        </p:nvSpPr>
+        <p:spPr>
+          <a:xfrm>
+            <a:off x="6519672" y="2395728"/>
+            <a:ext cx="4892040" cy="777240"/>
+          </a:xfrm>
+          <a:prstGeom prst="rect">
+            <a:avLst/>
+          </a:prstGeom>
+          <a:noFill/>
+        </p:spPr>
+        <p:txBody>
+          <a:bodyPr wrap="square" anchor="t" lIns="0" rIns="0" tIns="0" bIns="0">
+            <a:spAutoFit/>
+          </a:bodyPr>
+          <a:lstStyle/>
+          <a:p>
+            <a:pPr algn="l">
+              <a:lnSpc>
+                <a:spcPct val="105000"/>
+              </a:lnSpc>
+              <a:spcAft>
+                <a:spcPts val="0"/>
+              </a:spcAft>
+            </a:pPr>
+            <a:r>
+              <a:rPr sz="1200" b="0">
+                <a:solidFill>
+                  <a:srgbClr val="52514E"/>
+                </a:solidFill>
+                <a:latin typeface="Calibri"/>
+              </a:rPr>
+              <a:t>Full features for comparability; URL-only for honesty. One number alone misleads.</a:t>
+            </a:r>
+          </a:p>
+        </p:txBody>
+      </p:sp>
+      <p:sp>
+        <p:nvSpPr>
+          <p:cNvPr id="13" name="Rounded Rectangle 12"/>
+          <p:cNvSpPr/>
+          <p:nvPr/>
+        </p:nvSpPr>
+        <p:spPr>
+          <a:xfrm>
+            <a:off x="548640" y="3429000"/>
+            <a:ext cx="5394960" cy="1508760"/>
+          </a:xfrm>
+          <a:prstGeom prst="roundRect">
+            <a:avLst>
+              <a:gd name="adj" fmla="val 8000"/>
+            </a:avLst>
+          </a:prstGeom>
+          <a:solidFill>
+            <a:srgbClr val="F2F1F9"/>
+          </a:solidFill>
+          <a:ln>
+            <a:noFill/>
+          </a:ln>
+          <a:effectLst/>
+        </p:spPr>
+        <p:style>
+          <a:lnRef idx="1">
+            <a:schemeClr val="accent1"/>
+          </a:lnRef>
+          <a:fillRef idx="3">
+            <a:schemeClr val="accent1"/>
+          </a:fillRef>
+          <a:effectRef idx="2">
+            <a:schemeClr val="accent1"/>
+          </a:effectRef>
+          <a:fontRef idx="minor">
+            <a:schemeClr val="lt1"/>
+          </a:fontRef>
+        </p:style>
+        <p:txBody>
+          <a:bodyPr rtlCol="0" anchor="ctr"/>
+          <a:lstStyle/>
+          <a:p>
+            <a:pPr algn="ctr"/>
+          </a:p>
+        </p:txBody>
+      </p:sp>
+      <p:sp>
+        <p:nvSpPr>
+          <p:cNvPr id="14" name="TextBox 13"/>
+          <p:cNvSpPr txBox="1"/>
+          <p:nvPr/>
+        </p:nvSpPr>
+        <p:spPr>
+          <a:xfrm>
+            <a:off x="804672" y="3575304"/>
+            <a:ext cx="4892040" cy="548640"/>
+          </a:xfrm>
+          <a:prstGeom prst="rect">
+            <a:avLst/>
+          </a:prstGeom>
+          <a:noFill/>
+        </p:spPr>
+        <p:txBody>
+          <a:bodyPr wrap="square" anchor="t" lIns="0" rIns="0" tIns="0" bIns="0">
+            <a:spAutoFit/>
+          </a:bodyPr>
+          <a:lstStyle/>
+          <a:p>
+            <a:pPr algn="l">
+              <a:lnSpc>
+                <a:spcPct val="100000"/>
+              </a:lnSpc>
+              <a:spcAft>
+                <a:spcPts val="0"/>
+              </a:spcAft>
+            </a:pPr>
+            <a:r>
+              <a:rPr sz="1550" b="1">
+                <a:solidFill>
+                  <a:srgbClr val="4A3AA7"/>
+                </a:solidFill>
+                <a:latin typeface="Calibri"/>
+              </a:rPr>
+              <a:t>Negative results are results.</a:t>
+            </a:r>
+          </a:p>
+        </p:txBody>
+      </p:sp>
+      <p:sp>
+        <p:nvSpPr>
+          <p:cNvPr id="15" name="TextBox 14"/>
+          <p:cNvSpPr txBox="1"/>
+          <p:nvPr/>
+        </p:nvSpPr>
+        <p:spPr>
+          <a:xfrm>
+            <a:off x="804672" y="4087368"/>
+            <a:ext cx="4892040" cy="777240"/>
+          </a:xfrm>
+          <a:prstGeom prst="rect">
+            <a:avLst/>
+          </a:prstGeom>
+          <a:noFill/>
+        </p:spPr>
+        <p:txBody>
+          <a:bodyPr wrap="square" anchor="t" lIns="0" rIns="0" tIns="0" bIns="0">
+            <a:spAutoFit/>
+          </a:bodyPr>
+          <a:lstStyle/>
+          <a:p>
+            <a:pPr algn="l">
+              <a:lnSpc>
+                <a:spcPct val="105000"/>
+              </a:lnSpc>
+              <a:spcAft>
+                <a:spcPts val="0"/>
+              </a:spcAft>
+            </a:pPr>
+            <a:r>
+              <a:rPr sz="1200" b="0">
+                <a:solidFill>
+                  <a:srgbClr val="52514E"/>
+                </a:solidFill>
+                <a:latin typeface="Calibri"/>
+              </a:rPr>
+              <a:t>Our engineered features failed and our clusters are soft — saying so is the scientific part.</a:t>
+            </a:r>
+          </a:p>
+        </p:txBody>
+      </p:sp>
+      <p:sp>
+        <p:nvSpPr>
+          <p:cNvPr id="16" name="Rounded Rectangle 15"/>
+          <p:cNvSpPr/>
+          <p:nvPr/>
+        </p:nvSpPr>
+        <p:spPr>
+          <a:xfrm>
+            <a:off x="6263640" y="3429000"/>
+            <a:ext cx="5394960" cy="1508760"/>
+          </a:xfrm>
+          <a:prstGeom prst="roundRect">
+            <a:avLst>
+              <a:gd name="adj" fmla="val 8000"/>
+            </a:avLst>
+          </a:prstGeom>
+          <a:solidFill>
+            <a:srgbClr val="EEF6F3"/>
+          </a:solidFill>
+          <a:ln>
+            <a:noFill/>
+          </a:ln>
+          <a:effectLst/>
+        </p:spPr>
+        <p:style>
+          <a:lnRef idx="1">
+            <a:schemeClr val="accent1"/>
+          </a:lnRef>
+          <a:fillRef idx="3">
+            <a:schemeClr val="accent1"/>
+          </a:fillRef>
+          <a:effectRef idx="2">
+            <a:schemeClr val="accent1"/>
+          </a:effectRef>
+          <a:fontRef idx="minor">
+            <a:schemeClr val="lt1"/>
+          </a:fontRef>
+        </p:style>
+        <p:txBody>
+          <a:bodyPr rtlCol="0" anchor="ctr"/>
+          <a:lstStyle/>
+          <a:p>
+            <a:pPr algn="ctr"/>
+          </a:p>
+        </p:txBody>
+      </p:sp>
+      <p:sp>
+        <p:nvSpPr>
+          <p:cNvPr id="17" name="TextBox 16"/>
+          <p:cNvSpPr txBox="1"/>
+          <p:nvPr/>
+        </p:nvSpPr>
+        <p:spPr>
+          <a:xfrm>
+            <a:off x="6519672" y="3575304"/>
+            <a:ext cx="4892040" cy="548640"/>
+          </a:xfrm>
+          <a:prstGeom prst="rect">
+            <a:avLst/>
+          </a:prstGeom>
+          <a:noFill/>
+        </p:spPr>
+        <p:txBody>
+          <a:bodyPr wrap="square" anchor="t" lIns="0" rIns="0" tIns="0" bIns="0">
+            <a:spAutoFit/>
+          </a:bodyPr>
+          <a:lstStyle/>
+          <a:p>
+            <a:pPr algn="l">
+              <a:lnSpc>
+                <a:spcPct val="100000"/>
+              </a:lnSpc>
+              <a:spcAft>
+                <a:spcPts val="0"/>
+              </a:spcAft>
+            </a:pPr>
+            <a:r>
+              <a:rPr sz="1550" b="1">
+                <a:solidFill>
+                  <a:srgbClr val="0E7A54"/>
+                </a:solidFill>
+                <a:latin typeface="Calibri"/>
+              </a:rPr>
+              <a:t>When metrics saturate, decisions move.</a:t>
+            </a:r>
+          </a:p>
+        </p:txBody>
+      </p:sp>
+      <p:sp>
+        <p:nvSpPr>
+          <p:cNvPr id="18" name="TextBox 17"/>
+          <p:cNvSpPr txBox="1"/>
+          <p:nvPr/>
+        </p:nvSpPr>
+        <p:spPr>
+          <a:xfrm>
+            <a:off x="6519672" y="4087368"/>
+            <a:ext cx="4892040" cy="777240"/>
+          </a:xfrm>
+          <a:prstGeom prst="rect">
+            <a:avLst/>
+          </a:prstGeom>
+          <a:noFill/>
+        </p:spPr>
+        <p:txBody>
+          <a:bodyPr wrap="square" anchor="t" lIns="0" rIns="0" tIns="0" bIns="0">
+            <a:spAutoFit/>
+          </a:bodyPr>
+          <a:lstStyle/>
+          <a:p>
+            <a:pPr algn="l">
+              <a:lnSpc>
+                <a:spcPct val="105000"/>
+              </a:lnSpc>
+              <a:spcAft>
+                <a:spcPts val="0"/>
+              </a:spcAft>
+            </a:pPr>
+            <a:r>
+              <a:rPr sz="1200" b="0">
+                <a:solidFill>
+                  <a:srgbClr val="52514E"/>
+                </a:solidFill>
+                <a:latin typeface="Calibri"/>
+              </a:rPr>
+              <a:t>Thresholds, costs, and operating points are where the real choices live.</a:t>
+            </a:r>
+          </a:p>
+        </p:txBody>
+      </p:sp>
+      <p:sp>
+        <p:nvSpPr>
+          <p:cNvPr id="19" name="TextBox 18"/>
+          <p:cNvSpPr txBox="1"/>
+          <p:nvPr/>
+        </p:nvSpPr>
+        <p:spPr>
+          <a:xfrm>
+            <a:off x="548640" y="5349240"/>
+            <a:ext cx="11064240" cy="457200"/>
+          </a:xfrm>
+          <a:prstGeom prst="rect">
+            <a:avLst/>
+          </a:prstGeom>
+          <a:noFill/>
+        </p:spPr>
+        <p:txBody>
+          <a:bodyPr wrap="square" anchor="t" lIns="0" rIns="0" tIns="0" bIns="0">
+            <a:spAutoFit/>
+          </a:bodyPr>
+          <a:lstStyle/>
+          <a:p>
+            <a:pPr algn="ctr">
+              <a:lnSpc>
+                <a:spcPct val="100000"/>
+              </a:lnSpc>
+              <a:spcAft>
+                <a:spcPts val="0"/>
+              </a:spcAft>
+            </a:pPr>
+            <a:r>
+              <a:rPr sz="2000" b="1">
+                <a:solidFill>
+                  <a:srgbClr val="0B0B0B"/>
+                </a:solidFill>
+                <a:latin typeface="Calibri"/>
+              </a:rPr>
+              <a:t>Near-perfect accuracy should be explained, not celebrated.</a:t>
+            </a:r>
+          </a:p>
+        </p:txBody>
+      </p:sp>
+      <p:sp>
+        <p:nvSpPr>
+          <p:cNvPr id="20" name="TextBox 19"/>
+          <p:cNvSpPr txBox="1"/>
+          <p:nvPr/>
+        </p:nvSpPr>
+        <p:spPr>
+          <a:xfrm>
+            <a:off x="548640" y="5943600"/>
+            <a:ext cx="11064240" cy="365760"/>
+          </a:xfrm>
+          <a:prstGeom prst="rect">
+            <a:avLst/>
+          </a:prstGeom>
+          <a:noFill/>
+        </p:spPr>
+        <p:txBody>
+          <a:bodyPr wrap="square" anchor="t" lIns="0" rIns="0" tIns="0" bIns="0">
+            <a:spAutoFit/>
+          </a:bodyPr>
+          <a:lstStyle/>
+          <a:p>
+            <a:pPr algn="ctr">
+              <a:lnSpc>
+                <a:spcPct val="100000"/>
+              </a:lnSpc>
+              <a:spcAft>
+                <a:spcPts val="0"/>
+              </a:spcAft>
+            </a:pPr>
+            <a:r>
+              <a:rPr sz="1300" b="1">
+                <a:solidFill>
+                  <a:srgbClr val="0B0B0B"/>
+                </a:solidFill>
+                <a:latin typeface="Calibri"/>
+              </a:rPr>
+              <a:t>Thank you!   </a:t>
+            </a:r>
+            <a:r>
+              <a:rPr sz="1150" b="0">
+                <a:solidFill>
+                  <a:srgbClr val="898781"/>
+                </a:solidFill>
+                <a:latin typeface="Consolas"/>
+              </a:rPr>
+              <a:t>Code, notebooks &amp; full report: github.com/jjusticeusd/AAI-501-Final-Team-Project-Group2</a:t>
             </a:r>
           </a:p>
         </p:txBody>
